--- a/analysis/slides/research-journey-20260819/agent-resource-research-journey-zh-20260819.pptx
+++ b/analysis/slides/research-journey-20260819/agent-resource-research-journey-zh-20260819.pptx
@@ -22,6 +22,8 @@
     <p:sldId id="270" r:id="rId21"/>
     <p:sldId id="271" r:id="rId22"/>
     <p:sldId id="272" r:id="rId23"/>
+    <p:sldId id="273" r:id="rId24"/>
+    <p:sldId id="274" r:id="rId25"/>
   </p:sldIdLst>
   <p:sldSz cx="12191695" cy="6858000" type="screen4x3"/>
   <p:notesSz cx="6858000" cy="9144000"/>
@@ -11934,7 +11936,7 @@
               </a:defRPr>
             </a:pPr>
             <a:r>
-              <a:t>把候选差异变成可证伪问题</a:t>
+              <a:t>Related work：比较实验世界</a:t>
             </a:r>
           </a:p>
         </p:txBody>
@@ -11970,7 +11972,7 @@
               </a:defRPr>
             </a:pPr>
             <a:r>
-              <a:t>下一步先做一个最小因果实验，不先造新系统</a:t>
+              <a:t>它们还覆盖了我们没有真正测过的系统场景</a:t>
             </a:r>
           </a:p>
         </p:txBody>
@@ -12048,734 +12050,14 @@
       </p:sp>
       <p:sp>
         <p:nvSpPr>
-          <p:cNvPr id="6" name="TextBox 5"/>
-          <p:cNvSpPr txBox="1"/>
-          <p:nvPr/>
-        </p:nvSpPr>
-        <p:spPr>
-          <a:xfrm>
-            <a:off x="749808" y="1335024"/>
-            <a:ext cx="6583680" cy="347472"/>
-          </a:xfrm>
-          <a:prstGeom prst="rect">
-            <a:avLst/>
-          </a:prstGeom>
-          <a:noFill/>
-        </p:spPr>
-        <p:txBody>
-          <a:bodyPr wrap="square" lIns="27432" rIns="27432" tIns="27432" bIns="27432" anchor="t">
-            <a:spAutoFit/>
-          </a:bodyPr>
-          <a:lstStyle/>
-          <a:p>
-            <a:pPr algn="l">
-              <a:defRPr sz="1600" b="1">
-                <a:solidFill>
-                  <a:srgbClr val="F4F7FB"/>
-                </a:solidFill>
-                <a:latin typeface="Noto Sans CJK SC"/>
-              </a:defRPr>
-            </a:pPr>
-            <a:r>
-              <a:t>同一批真实 trace，比较三层信息是否真的改变动作</a:t>
-            </a:r>
-          </a:p>
-        </p:txBody>
-      </p:sp>
-      <p:sp>
-        <p:nvSpPr>
-          <p:cNvPr id="7" name="Oval 6"/>
+          <p:cNvPr id="6" name="Rounded Rectangle 5"/>
           <p:cNvSpPr/>
           <p:nvPr/>
         </p:nvSpPr>
         <p:spPr>
           <a:xfrm>
-            <a:off x="822960" y="1920239"/>
-            <a:ext cx="475488" cy="475488"/>
-          </a:xfrm>
-          <a:prstGeom prst="ellipse">
-            <a:avLst/>
-          </a:prstGeom>
-          <a:solidFill>
-            <a:srgbClr val="677990"/>
-          </a:solidFill>
-          <a:ln>
-            <a:solidFill>
-              <a:srgbClr val="677990"/>
-            </a:solidFill>
-          </a:ln>
-        </p:spPr>
-        <p:style>
-          <a:lnRef idx="1">
-            <a:schemeClr val="accent1"/>
-          </a:lnRef>
-          <a:fillRef idx="3">
-            <a:schemeClr val="accent1"/>
-          </a:fillRef>
-          <a:effectRef idx="2">
-            <a:schemeClr val="accent1"/>
-          </a:effectRef>
-          <a:fontRef idx="minor">
-            <a:schemeClr val="lt1"/>
-          </a:fontRef>
-        </p:style>
-        <p:txBody>
-          <a:bodyPr rtlCol="0" anchor="ctr"/>
-          <a:lstStyle/>
-          <a:p>
-            <a:pPr algn="ctr"/>
-          </a:p>
-        </p:txBody>
-      </p:sp>
-      <p:sp>
-        <p:nvSpPr>
-          <p:cNvPr id="8" name="TextBox 7"/>
-          <p:cNvSpPr txBox="1"/>
-          <p:nvPr/>
-        </p:nvSpPr>
-        <p:spPr>
-          <a:xfrm>
-            <a:off x="822960" y="2011679"/>
-            <a:ext cx="475488" cy="201168"/>
-          </a:xfrm>
-          <a:prstGeom prst="rect">
-            <a:avLst/>
-          </a:prstGeom>
-          <a:noFill/>
-        </p:spPr>
-        <p:txBody>
-          <a:bodyPr wrap="square" lIns="27432" rIns="27432" tIns="27432" bIns="27432" anchor="t">
-            <a:spAutoFit/>
-          </a:bodyPr>
-          <a:lstStyle/>
-          <a:p>
-            <a:pPr algn="ctr">
-              <a:defRPr sz="1200" b="1">
-                <a:solidFill>
-                  <a:srgbClr val="09111F"/>
-                </a:solidFill>
-                <a:latin typeface="Noto Sans CJK SC"/>
-              </a:defRPr>
-            </a:pPr>
-            <a:r>
-              <a:t>A</a:t>
-            </a:r>
-          </a:p>
-        </p:txBody>
-      </p:sp>
-      <p:sp>
-        <p:nvSpPr>
-          <p:cNvPr id="9" name="Rounded Rectangle 8"/>
-          <p:cNvSpPr/>
-          <p:nvPr/>
-        </p:nvSpPr>
-        <p:spPr>
-          <a:xfrm>
-            <a:off x="1508760" y="1874519"/>
-            <a:ext cx="5074920" cy="640080"/>
-          </a:xfrm>
-          <a:prstGeom prst="roundRect">
-            <a:avLst/>
-          </a:prstGeom>
-          <a:solidFill>
-            <a:srgbClr val="111D30"/>
-          </a:solidFill>
-          <a:ln w="12700">
-            <a:solidFill>
-              <a:srgbClr val="677990"/>
-            </a:solidFill>
-          </a:ln>
-        </p:spPr>
-        <p:style>
-          <a:lnRef idx="1">
-            <a:schemeClr val="accent1"/>
-          </a:lnRef>
-          <a:fillRef idx="3">
-            <a:schemeClr val="accent1"/>
-          </a:fillRef>
-          <a:effectRef idx="2">
-            <a:schemeClr val="accent1"/>
-          </a:effectRef>
-          <a:fontRef idx="minor">
-            <a:schemeClr val="lt1"/>
-          </a:fontRef>
-        </p:style>
-        <p:txBody>
-          <a:bodyPr rtlCol="0" anchor="ctr"/>
-          <a:lstStyle/>
-          <a:p>
-            <a:pPr algn="ctr"/>
-          </a:p>
-        </p:txBody>
-      </p:sp>
-      <p:sp>
-        <p:nvSpPr>
-          <p:cNvPr id="10" name="TextBox 9"/>
-          <p:cNvSpPr txBox="1"/>
-          <p:nvPr/>
-        </p:nvSpPr>
-        <p:spPr>
-          <a:xfrm>
-            <a:off x="1691640" y="2029967"/>
-            <a:ext cx="1645920" cy="256032"/>
-          </a:xfrm>
-          <a:prstGeom prst="rect">
-            <a:avLst/>
-          </a:prstGeom>
-          <a:noFill/>
-        </p:spPr>
-        <p:txBody>
-          <a:bodyPr wrap="square" lIns="27432" rIns="27432" tIns="27432" bIns="27432" anchor="t">
-            <a:spAutoFit/>
-          </a:bodyPr>
-          <a:lstStyle/>
-          <a:p>
-            <a:pPr algn="l">
-              <a:defRPr sz="1400" b="1">
-                <a:solidFill>
-                  <a:srgbClr val="677990"/>
-                </a:solidFill>
-                <a:latin typeface="Noto Sans CJK SC"/>
-              </a:defRPr>
-            </a:pPr>
-            <a:r>
-              <a:t>阶段反馈</a:t>
-            </a:r>
-          </a:p>
-        </p:txBody>
-      </p:sp>
-      <p:sp>
-        <p:nvSpPr>
-          <p:cNvPr id="11" name="TextBox 10"/>
-          <p:cNvSpPr txBox="1"/>
-          <p:nvPr/>
-        </p:nvSpPr>
-        <p:spPr>
-          <a:xfrm>
-            <a:off x="3291840" y="2029967"/>
-            <a:ext cx="3063240" cy="274320"/>
-          </a:xfrm>
-          <a:prstGeom prst="rect">
-            <a:avLst/>
-          </a:prstGeom>
-          <a:noFill/>
-        </p:spPr>
-        <p:txBody>
-          <a:bodyPr wrap="square" lIns="27432" rIns="27432" tIns="27432" bIns="27432" anchor="t">
-            <a:spAutoFit/>
-          </a:bodyPr>
-          <a:lstStyle/>
-          <a:p>
-            <a:pPr algn="l">
-              <a:defRPr sz="1220" b="0">
-                <a:solidFill>
-                  <a:srgbClr val="A7B6CA"/>
-                </a:solidFill>
-                <a:latin typeface="Noto Sans CJK SC"/>
-              </a:defRPr>
-            </a:pPr>
-            <a:r>
-              <a:t>只知道：现在在 LLM 还是工具阶段</a:t>
-            </a:r>
-          </a:p>
-        </p:txBody>
-      </p:sp>
-      <p:sp>
-        <p:nvSpPr>
-          <p:cNvPr id="12" name="Right Arrow 11"/>
-          <p:cNvSpPr/>
-          <p:nvPr/>
-        </p:nvSpPr>
-        <p:spPr>
-          <a:xfrm>
-            <a:off x="969264" y="2624327"/>
-            <a:ext cx="164592" cy="182880"/>
-          </a:xfrm>
-          <a:prstGeom prst="rightArrow">
-            <a:avLst/>
-          </a:prstGeom>
-          <a:solidFill>
-            <a:srgbClr val="677990"/>
-          </a:solidFill>
-          <a:ln>
-            <a:solidFill>
-              <a:srgbClr val="677990"/>
-            </a:solidFill>
-          </a:ln>
-        </p:spPr>
-        <p:style>
-          <a:lnRef idx="1">
-            <a:schemeClr val="accent1"/>
-          </a:lnRef>
-          <a:fillRef idx="3">
-            <a:schemeClr val="accent1"/>
-          </a:fillRef>
-          <a:effectRef idx="2">
-            <a:schemeClr val="accent1"/>
-          </a:effectRef>
-          <a:fontRef idx="minor">
-            <a:schemeClr val="lt1"/>
-          </a:fontRef>
-        </p:style>
-        <p:txBody>
-          <a:bodyPr rtlCol="0" anchor="ctr"/>
-          <a:lstStyle/>
-          <a:p>
-            <a:pPr algn="ctr"/>
-          </a:p>
-        </p:txBody>
-      </p:sp>
-      <p:sp>
-        <p:nvSpPr>
-          <p:cNvPr id="13" name="Oval 12"/>
-          <p:cNvSpPr/>
-          <p:nvPr/>
-        </p:nvSpPr>
-        <p:spPr>
-          <a:xfrm>
-            <a:off x="822960" y="2926079"/>
-            <a:ext cx="475488" cy="475488"/>
-          </a:xfrm>
-          <a:prstGeom prst="ellipse">
-            <a:avLst/>
-          </a:prstGeom>
-          <a:solidFill>
-            <a:srgbClr val="F4C75B"/>
-          </a:solidFill>
-          <a:ln>
-            <a:solidFill>
-              <a:srgbClr val="F4C75B"/>
-            </a:solidFill>
-          </a:ln>
-        </p:spPr>
-        <p:style>
-          <a:lnRef idx="1">
-            <a:schemeClr val="accent1"/>
-          </a:lnRef>
-          <a:fillRef idx="3">
-            <a:schemeClr val="accent1"/>
-          </a:fillRef>
-          <a:effectRef idx="2">
-            <a:schemeClr val="accent1"/>
-          </a:effectRef>
-          <a:fontRef idx="minor">
-            <a:schemeClr val="lt1"/>
-          </a:fontRef>
-        </p:style>
-        <p:txBody>
-          <a:bodyPr rtlCol="0" anchor="ctr"/>
-          <a:lstStyle/>
-          <a:p>
-            <a:pPr algn="ctr"/>
-          </a:p>
-        </p:txBody>
-      </p:sp>
-      <p:sp>
-        <p:nvSpPr>
-          <p:cNvPr id="14" name="TextBox 13"/>
-          <p:cNvSpPr txBox="1"/>
-          <p:nvPr/>
-        </p:nvSpPr>
-        <p:spPr>
-          <a:xfrm>
-            <a:off x="822960" y="3017520"/>
-            <a:ext cx="475488" cy="201168"/>
-          </a:xfrm>
-          <a:prstGeom prst="rect">
-            <a:avLst/>
-          </a:prstGeom>
-          <a:noFill/>
-        </p:spPr>
-        <p:txBody>
-          <a:bodyPr wrap="square" lIns="27432" rIns="27432" tIns="27432" bIns="27432" anchor="t">
-            <a:spAutoFit/>
-          </a:bodyPr>
-          <a:lstStyle/>
-          <a:p>
-            <a:pPr algn="ctr">
-              <a:defRPr sz="1200" b="1">
-                <a:solidFill>
-                  <a:srgbClr val="09111F"/>
-                </a:solidFill>
-                <a:latin typeface="Noto Sans CJK SC"/>
-              </a:defRPr>
-            </a:pPr>
-            <a:r>
-              <a:t>B</a:t>
-            </a:r>
-          </a:p>
-        </p:txBody>
-      </p:sp>
-      <p:sp>
-        <p:nvSpPr>
-          <p:cNvPr id="15" name="Rounded Rectangle 14"/>
-          <p:cNvSpPr/>
-          <p:nvPr/>
-        </p:nvSpPr>
-        <p:spPr>
-          <a:xfrm>
-            <a:off x="1508760" y="2880360"/>
-            <a:ext cx="5074920" cy="640080"/>
-          </a:xfrm>
-          <a:prstGeom prst="roundRect">
-            <a:avLst/>
-          </a:prstGeom>
-          <a:solidFill>
-            <a:srgbClr val="111D30"/>
-          </a:solidFill>
-          <a:ln w="12700">
-            <a:solidFill>
-              <a:srgbClr val="F4C75B"/>
-            </a:solidFill>
-          </a:ln>
-        </p:spPr>
-        <p:style>
-          <a:lnRef idx="1">
-            <a:schemeClr val="accent1"/>
-          </a:lnRef>
-          <a:fillRef idx="3">
-            <a:schemeClr val="accent1"/>
-          </a:fillRef>
-          <a:effectRef idx="2">
-            <a:schemeClr val="accent1"/>
-          </a:effectRef>
-          <a:fontRef idx="minor">
-            <a:schemeClr val="lt1"/>
-          </a:fontRef>
-        </p:style>
-        <p:txBody>
-          <a:bodyPr rtlCol="0" anchor="ctr"/>
-          <a:lstStyle/>
-          <a:p>
-            <a:pPr algn="ctr"/>
-          </a:p>
-        </p:txBody>
-      </p:sp>
-      <p:sp>
-        <p:nvSpPr>
-          <p:cNvPr id="16" name="TextBox 15"/>
-          <p:cNvSpPr txBox="1"/>
-          <p:nvPr/>
-        </p:nvSpPr>
-        <p:spPr>
-          <a:xfrm>
-            <a:off x="1691640" y="3035808"/>
-            <a:ext cx="1645920" cy="256032"/>
-          </a:xfrm>
-          <a:prstGeom prst="rect">
-            <a:avLst/>
-          </a:prstGeom>
-          <a:noFill/>
-        </p:spPr>
-        <p:txBody>
-          <a:bodyPr wrap="square" lIns="27432" rIns="27432" tIns="27432" bIns="27432" anchor="t">
-            <a:spAutoFit/>
-          </a:bodyPr>
-          <a:lstStyle/>
-          <a:p>
-            <a:pPr algn="l">
-              <a:defRPr sz="1400" b="1">
-                <a:solidFill>
-                  <a:srgbClr val="F4C75B"/>
-                </a:solidFill>
-                <a:latin typeface="Noto Sans CJK SC"/>
-              </a:defRPr>
-            </a:pPr>
-            <a:r>
-              <a:t>ThunderAgent 风格</a:t>
-            </a:r>
-          </a:p>
-        </p:txBody>
-      </p:sp>
-      <p:sp>
-        <p:nvSpPr>
-          <p:cNvPr id="17" name="TextBox 16"/>
-          <p:cNvSpPr txBox="1"/>
-          <p:nvPr/>
-        </p:nvSpPr>
-        <p:spPr>
-          <a:xfrm>
-            <a:off x="3291840" y="3035808"/>
-            <a:ext cx="3063240" cy="274320"/>
-          </a:xfrm>
-          <a:prstGeom prst="rect">
-            <a:avLst/>
-          </a:prstGeom>
-          <a:noFill/>
-        </p:spPr>
-        <p:txBody>
-          <a:bodyPr wrap="square" lIns="27432" rIns="27432" tIns="27432" bIns="27432" anchor="t">
-            <a:spAutoFit/>
-          </a:bodyPr>
-          <a:lstStyle/>
-          <a:p>
-            <a:pPr algn="l">
-              <a:defRPr sz="1220" b="0">
-                <a:solidFill>
-                  <a:srgbClr val="A7B6CA"/>
-                </a:solidFill>
-                <a:latin typeface="Noto Sans CJK SC"/>
-              </a:defRPr>
-            </a:pPr>
-            <a:r>
-              <a:t>再加：工具已运行多久、GPU 状态位置</a:t>
-            </a:r>
-          </a:p>
-        </p:txBody>
-      </p:sp>
-      <p:sp>
-        <p:nvSpPr>
-          <p:cNvPr id="18" name="Right Arrow 17"/>
-          <p:cNvSpPr/>
-          <p:nvPr/>
-        </p:nvSpPr>
-        <p:spPr>
-          <a:xfrm>
-            <a:off x="969264" y="3630168"/>
-            <a:ext cx="164592" cy="182880"/>
-          </a:xfrm>
-          <a:prstGeom prst="rightArrow">
-            <a:avLst/>
-          </a:prstGeom>
-          <a:solidFill>
-            <a:srgbClr val="677990"/>
-          </a:solidFill>
-          <a:ln>
-            <a:solidFill>
-              <a:srgbClr val="677990"/>
-            </a:solidFill>
-          </a:ln>
-        </p:spPr>
-        <p:style>
-          <a:lnRef idx="1">
-            <a:schemeClr val="accent1"/>
-          </a:lnRef>
-          <a:fillRef idx="3">
-            <a:schemeClr val="accent1"/>
-          </a:fillRef>
-          <a:effectRef idx="2">
-            <a:schemeClr val="accent1"/>
-          </a:effectRef>
-          <a:fontRef idx="minor">
-            <a:schemeClr val="lt1"/>
-          </a:fontRef>
-        </p:style>
-        <p:txBody>
-          <a:bodyPr rtlCol="0" anchor="ctr"/>
-          <a:lstStyle/>
-          <a:p>
-            <a:pPr algn="ctr"/>
-          </a:p>
-        </p:txBody>
-      </p:sp>
-      <p:sp>
-        <p:nvSpPr>
-          <p:cNvPr id="19" name="Oval 18"/>
-          <p:cNvSpPr/>
-          <p:nvPr/>
-        </p:nvSpPr>
-        <p:spPr>
-          <a:xfrm>
-            <a:off x="822960" y="3931920"/>
-            <a:ext cx="475488" cy="475488"/>
-          </a:xfrm>
-          <a:prstGeom prst="ellipse">
-            <a:avLst/>
-          </a:prstGeom>
-          <a:solidFill>
-            <a:srgbClr val="32D5C4"/>
-          </a:solidFill>
-          <a:ln>
-            <a:solidFill>
-              <a:srgbClr val="32D5C4"/>
-            </a:solidFill>
-          </a:ln>
-        </p:spPr>
-        <p:style>
-          <a:lnRef idx="1">
-            <a:schemeClr val="accent1"/>
-          </a:lnRef>
-          <a:fillRef idx="3">
-            <a:schemeClr val="accent1"/>
-          </a:fillRef>
-          <a:effectRef idx="2">
-            <a:schemeClr val="accent1"/>
-          </a:effectRef>
-          <a:fontRef idx="minor">
-            <a:schemeClr val="lt1"/>
-          </a:fontRef>
-        </p:style>
-        <p:txBody>
-          <a:bodyPr rtlCol="0" anchor="ctr"/>
-          <a:lstStyle/>
-          <a:p>
-            <a:pPr algn="ctr"/>
-          </a:p>
-        </p:txBody>
-      </p:sp>
-      <p:sp>
-        <p:nvSpPr>
-          <p:cNvPr id="20" name="TextBox 19"/>
-          <p:cNvSpPr txBox="1"/>
-          <p:nvPr/>
-        </p:nvSpPr>
-        <p:spPr>
-          <a:xfrm>
-            <a:off x="822960" y="4023360"/>
-            <a:ext cx="475488" cy="201168"/>
-          </a:xfrm>
-          <a:prstGeom prst="rect">
-            <a:avLst/>
-          </a:prstGeom>
-          <a:noFill/>
-        </p:spPr>
-        <p:txBody>
-          <a:bodyPr wrap="square" lIns="27432" rIns="27432" tIns="27432" bIns="27432" anchor="t">
-            <a:spAutoFit/>
-          </a:bodyPr>
-          <a:lstStyle/>
-          <a:p>
-            <a:pPr algn="ctr">
-              <a:defRPr sz="1200" b="1">
-                <a:solidFill>
-                  <a:srgbClr val="09111F"/>
-                </a:solidFill>
-                <a:latin typeface="Noto Sans CJK SC"/>
-              </a:defRPr>
-            </a:pPr>
-            <a:r>
-              <a:t>C</a:t>
-            </a:r>
-          </a:p>
-        </p:txBody>
-      </p:sp>
-      <p:sp>
-        <p:nvSpPr>
-          <p:cNvPr id="21" name="Rounded Rectangle 20"/>
-          <p:cNvSpPr/>
-          <p:nvPr/>
-        </p:nvSpPr>
-        <p:spPr>
-          <a:xfrm>
-            <a:off x="1508760" y="3886200"/>
-            <a:ext cx="5074920" cy="640080"/>
-          </a:xfrm>
-          <a:prstGeom prst="roundRect">
-            <a:avLst/>
-          </a:prstGeom>
-          <a:solidFill>
-            <a:srgbClr val="111D30"/>
-          </a:solidFill>
-          <a:ln w="12700">
-            <a:solidFill>
-              <a:srgbClr val="32D5C4"/>
-            </a:solidFill>
-          </a:ln>
-        </p:spPr>
-        <p:style>
-          <a:lnRef idx="1">
-            <a:schemeClr val="accent1"/>
-          </a:lnRef>
-          <a:fillRef idx="3">
-            <a:schemeClr val="accent1"/>
-          </a:fillRef>
-          <a:effectRef idx="2">
-            <a:schemeClr val="accent1"/>
-          </a:effectRef>
-          <a:fontRef idx="minor">
-            <a:schemeClr val="lt1"/>
-          </a:fontRef>
-        </p:style>
-        <p:txBody>
-          <a:bodyPr rtlCol="0" anchor="ctr"/>
-          <a:lstStyle/>
-          <a:p>
-            <a:pPr algn="ctr"/>
-          </a:p>
-        </p:txBody>
-      </p:sp>
-      <p:sp>
-        <p:nvSpPr>
-          <p:cNvPr id="22" name="TextBox 21"/>
-          <p:cNvSpPr txBox="1"/>
-          <p:nvPr/>
-        </p:nvSpPr>
-        <p:spPr>
-          <a:xfrm>
-            <a:off x="1691640" y="4041648"/>
-            <a:ext cx="1645920" cy="256032"/>
-          </a:xfrm>
-          <a:prstGeom prst="rect">
-            <a:avLst/>
-          </a:prstGeom>
-          <a:noFill/>
-        </p:spPr>
-        <p:txBody>
-          <a:bodyPr wrap="square" lIns="27432" rIns="27432" tIns="27432" bIns="27432" anchor="t">
-            <a:spAutoFit/>
-          </a:bodyPr>
-          <a:lstStyle/>
-          <a:p>
-            <a:pPr algn="l">
-              <a:defRPr sz="1400" b="1">
-                <a:solidFill>
-                  <a:srgbClr val="32D5C4"/>
-                </a:solidFill>
-                <a:latin typeface="Noto Sans CJK SC"/>
-              </a:defRPr>
-            </a:pPr>
-            <a:r>
-              <a:t>工具内部状态</a:t>
-            </a:r>
-          </a:p>
-        </p:txBody>
-      </p:sp>
-      <p:sp>
-        <p:nvSpPr>
-          <p:cNvPr id="23" name="TextBox 22"/>
-          <p:cNvSpPr txBox="1"/>
-          <p:nvPr/>
-        </p:nvSpPr>
-        <p:spPr>
-          <a:xfrm>
-            <a:off x="3291840" y="4041648"/>
-            <a:ext cx="3063240" cy="274320"/>
-          </a:xfrm>
-          <a:prstGeom prst="rect">
-            <a:avLst/>
-          </a:prstGeom>
-          <a:noFill/>
-        </p:spPr>
-        <p:txBody>
-          <a:bodyPr wrap="square" lIns="27432" rIns="27432" tIns="27432" bIns="27432" anchor="t">
-            <a:spAutoFit/>
-          </a:bodyPr>
-          <a:lstStyle/>
-          <a:p>
-            <a:pPr algn="l">
-              <a:defRPr sz="1220" b="0">
-                <a:solidFill>
-                  <a:srgbClr val="A7B6CA"/>
-                </a:solidFill>
-                <a:latin typeface="Noto Sans CJK SC"/>
-              </a:defRPr>
-            </a:pPr>
-            <a:r>
-              <a:t>再加：子命令进度与 CPU/内存/读写反馈</a:t>
-            </a:r>
-          </a:p>
-        </p:txBody>
-      </p:sp>
-      <p:sp>
-        <p:nvSpPr>
-          <p:cNvPr id="24" name="Rounded Rectangle 23"/>
-          <p:cNvSpPr/>
-          <p:nvPr/>
-        </p:nvSpPr>
-        <p:spPr>
-          <a:xfrm>
-            <a:off x="7059168" y="1417320"/>
-            <a:ext cx="4069080" cy="1280160"/>
+            <a:off x="658368" y="1261872"/>
+            <a:ext cx="5440680" cy="1920240"/>
           </a:xfrm>
           <a:prstGeom prst="roundRect">
             <a:avLst/>
@@ -12813,21 +12095,21 @@
       </p:sp>
       <p:cxnSp>
         <p:nvCxnSpPr>
-          <p:cNvPr id="25" name="Connector 24"/>
+          <p:cNvPr id="7" name="Connector 6"/>
           <p:cNvCxnSpPr/>
           <p:nvPr/>
         </p:nvCxnSpPr>
         <p:spPr>
           <a:xfrm>
-            <a:off x="7196328" y="1581912"/>
-            <a:ext cx="0" cy="950976"/>
+            <a:off x="795528" y="1426463"/>
+            <a:ext cx="0" cy="1591057"/>
           </a:xfrm>
           <a:prstGeom prst="line">
             <a:avLst/>
           </a:prstGeom>
           <a:ln w="44450">
             <a:solidFill>
-              <a:srgbClr val="40D39C"/>
+              <a:srgbClr val="32D5C4"/>
             </a:solidFill>
           </a:ln>
         </p:spPr>
@@ -12848,14 +12130,14 @@
       </p:cxnSp>
       <p:sp>
         <p:nvSpPr>
-          <p:cNvPr id="26" name="TextBox 25"/>
-          <p:cNvSpPr txBox="1"/>
-          <p:nvPr/>
-        </p:nvSpPr>
-        <p:spPr>
-          <a:xfrm>
-            <a:off x="7370064" y="1563624"/>
-            <a:ext cx="3611880" cy="384048"/>
+          <p:cNvPr id="8" name="TextBox 7"/>
+          <p:cNvSpPr txBox="1"/>
+          <p:nvPr/>
+        </p:nvSpPr>
+        <p:spPr>
+          <a:xfrm>
+            <a:off x="969264" y="1408175"/>
+            <a:ext cx="4983480" cy="384048"/>
           </a:xfrm>
           <a:prstGeom prst="rect">
             <a:avLst/>
@@ -12871,27 +12153,27 @@
             <a:pPr algn="l">
               <a:defRPr sz="1500" b="1">
                 <a:solidFill>
-                  <a:srgbClr val="40D39C"/>
-                </a:solidFill>
-                <a:latin typeface="Noto Sans CJK SC"/>
-              </a:defRPr>
-            </a:pPr>
-            <a:r>
-              <a:t>先在现有 trace 上做</a:t>
-            </a:r>
-          </a:p>
-        </p:txBody>
-      </p:sp>
-      <p:sp>
-        <p:nvSpPr>
-          <p:cNvPr id="27" name="TextBox 26"/>
-          <p:cNvSpPr txBox="1"/>
-          <p:nvPr/>
-        </p:nvSpPr>
-        <p:spPr>
-          <a:xfrm>
-            <a:off x="7370064" y="2011680"/>
-            <a:ext cx="3611880" cy="566927"/>
+                  <a:srgbClr val="32D5C4"/>
+                </a:solidFill>
+                <a:latin typeface="Noto Sans CJK SC"/>
+              </a:defRPr>
+            </a:pPr>
+            <a:r>
+              <a:t>Continuum：更多模型、硬件与真实 agent</a:t>
+            </a:r>
+          </a:p>
+        </p:txBody>
+      </p:sp>
+      <p:sp>
+        <p:nvSpPr>
+          <p:cNvPr id="9" name="TextBox 8"/>
+          <p:cNvSpPr txBox="1"/>
+          <p:nvPr/>
+        </p:nvSpPr>
+        <p:spPr>
+          <a:xfrm>
+            <a:off x="969264" y="1856231"/>
+            <a:ext cx="4983480" cy="1207008"/>
           </a:xfrm>
           <a:prstGeom prst="rect">
             <a:avLst/>
@@ -12905,7 +12187,7 @@
           <a:lstStyle/>
           <a:p>
             <a:pPr algn="l">
-              <a:defRPr sz="1320" b="0">
+              <a:defRPr sz="1240" b="0">
                 <a:solidFill>
                   <a:srgbClr val="A7B6CA"/>
                 </a:solidFill>
@@ -12913,21 +12195,26 @@
               </a:defRPr>
             </a:pPr>
             <a:r>
-              <a:t>问 C 是否比 B 改变了借入、返回保护或 KV 保留决策；不需要 GPU。</a:t>
-            </a:r>
-          </a:p>
-        </p:txBody>
-      </p:sp>
-      <p:sp>
-        <p:nvSpPr>
-          <p:cNvPr id="28" name="Rounded Rectangle 27"/>
+              <a:t>mini-SWE-Agent、BFCL Web、OpenHands；另跑 500 个真实 SWE 任务。采用任务到达流，覆盖 A100/H100/B200、单卡到 4 卡和分布式推理。</a:t>
+            </a:r>
+            <a:br/>
+            <a:br/>
+            <a:r>
+              <a:t>我们未覆盖：多模型、多硬件、真实任务到达与 500 个任务的规模。</a:t>
+            </a:r>
+          </a:p>
+        </p:txBody>
+      </p:sp>
+      <p:sp>
+        <p:nvSpPr>
+          <p:cNvPr id="10" name="Rounded Rectangle 9"/>
           <p:cNvSpPr/>
           <p:nvPr/>
         </p:nvSpPr>
         <p:spPr>
           <a:xfrm>
-            <a:off x="7059168" y="2907792"/>
-            <a:ext cx="4069080" cy="1280160"/>
+            <a:off x="6291072" y="1261872"/>
+            <a:ext cx="5239512" cy="1920240"/>
           </a:xfrm>
           <a:prstGeom prst="roundRect">
             <a:avLst/>
@@ -12965,14 +12252,14 @@
       </p:sp>
       <p:cxnSp>
         <p:nvCxnSpPr>
-          <p:cNvPr id="29" name="Connector 28"/>
+          <p:cNvPr id="11" name="Connector 10"/>
           <p:cNvCxnSpPr/>
           <p:nvPr/>
         </p:nvCxnSpPr>
         <p:spPr>
           <a:xfrm>
-            <a:off x="7196328" y="3072384"/>
-            <a:ext cx="0" cy="950976"/>
+            <a:off x="6428232" y="1426463"/>
+            <a:ext cx="0" cy="1591057"/>
           </a:xfrm>
           <a:prstGeom prst="line">
             <a:avLst/>
@@ -13000,14 +12287,14 @@
       </p:cxnSp>
       <p:sp>
         <p:nvSpPr>
-          <p:cNvPr id="30" name="TextBox 29"/>
-          <p:cNvSpPr txBox="1"/>
-          <p:nvPr/>
-        </p:nvSpPr>
-        <p:spPr>
-          <a:xfrm>
-            <a:off x="7370064" y="3054096"/>
-            <a:ext cx="3611880" cy="384048"/>
+          <p:cNvPr id="12" name="TextBox 11"/>
+          <p:cNvSpPr txBox="1"/>
+          <p:nvPr/>
+        </p:nvSpPr>
+        <p:spPr>
+          <a:xfrm>
+            <a:off x="6601968" y="1408175"/>
+            <a:ext cx="4782312" cy="384048"/>
           </a:xfrm>
           <a:prstGeom prst="rect">
             <a:avLst/>
@@ -13029,21 +12316,21 @@
               </a:defRPr>
             </a:pPr>
             <a:r>
-              <a:t>只有过门槛才上实机</a:t>
-            </a:r>
-          </a:p>
-        </p:txBody>
-      </p:sp>
-      <p:sp>
-        <p:nvSpPr>
-          <p:cNvPr id="31" name="TextBox 30"/>
-          <p:cNvSpPr txBox="1"/>
-          <p:nvPr/>
-        </p:nvSpPr>
-        <p:spPr>
-          <a:xfrm>
-            <a:off x="7370064" y="3502152"/>
-            <a:ext cx="3611880" cy="566927"/>
+              <a:t>ThunderAgent：高并发、多节点与强化学习采样</a:t>
+            </a:r>
+          </a:p>
+        </p:txBody>
+      </p:sp>
+      <p:sp>
+        <p:nvSpPr>
+          <p:cNvPr id="13" name="TextBox 12"/>
+          <p:cNvSpPr txBox="1"/>
+          <p:nvPr/>
+        </p:nvSpPr>
+        <p:spPr>
+          <a:xfrm>
+            <a:off x="6601968" y="1856231"/>
+            <a:ext cx="4782312" cy="1207008"/>
           </a:xfrm>
           <a:prstGeom prst="rect">
             <a:avLst/>
@@ -13057,7 +12344,7 @@
           <a:lstStyle/>
           <a:p>
             <a:pPr algn="l">
-              <a:defRPr sz="1320" b="0">
+              <a:defRPr sz="1240" b="0">
                 <a:solidFill>
                   <a:srgbClr val="A7B6CA"/>
                 </a:solidFill>
@@ -13065,21 +12352,26 @@
               </a:defRPr>
             </a:pPr>
             <a:r>
-              <a:t>至少改变足够多独立任务的动作，并在 trace 回放中同时改善完成时间与返回重叠。</a:t>
-            </a:r>
-          </a:p>
-        </p:txBody>
-      </p:sp>
-      <p:sp>
-        <p:nvSpPr>
-          <p:cNvPr id="32" name="Rounded Rectangle 31"/>
+              <a:t>coding、routing、science agents 与强化学习采样；最高 96 个并发程序，模型跑在 H100 集群，Docker 工具环境放在独立 CPU 集群，并测环境准备与回收。</a:t>
+            </a:r>
+            <a:br/>
+            <a:br/>
+            <a:r>
+              <a:t>我们未覆盖：多节点、超大模型、强化学习与高并发。</a:t>
+            </a:r>
+          </a:p>
+        </p:txBody>
+      </p:sp>
+      <p:sp>
+        <p:nvSpPr>
+          <p:cNvPr id="14" name="Rounded Rectangle 13"/>
           <p:cNvSpPr/>
           <p:nvPr/>
         </p:nvSpPr>
         <p:spPr>
           <a:xfrm>
-            <a:off x="7059168" y="4398264"/>
-            <a:ext cx="4069080" cy="1005840"/>
+            <a:off x="658368" y="3493008"/>
+            <a:ext cx="5440680" cy="1920240"/>
           </a:xfrm>
           <a:prstGeom prst="roundRect">
             <a:avLst/>
@@ -13117,14 +12409,14 @@
       </p:sp>
       <p:cxnSp>
         <p:nvCxnSpPr>
-          <p:cNvPr id="33" name="Connector 32"/>
+          <p:cNvPr id="15" name="Connector 14"/>
           <p:cNvCxnSpPr/>
           <p:nvPr/>
         </p:nvCxnSpPr>
         <p:spPr>
           <a:xfrm>
-            <a:off x="7196328" y="4562855"/>
-            <a:ext cx="0" cy="676657"/>
+            <a:off x="795528" y="3657600"/>
+            <a:ext cx="0" cy="1591056"/>
           </a:xfrm>
           <a:prstGeom prst="line">
             <a:avLst/>
@@ -13152,14 +12444,14 @@
       </p:cxnSp>
       <p:sp>
         <p:nvSpPr>
-          <p:cNvPr id="34" name="TextBox 33"/>
-          <p:cNvSpPr txBox="1"/>
-          <p:nvPr/>
-        </p:nvSpPr>
-        <p:spPr>
-          <a:xfrm>
-            <a:off x="7370064" y="4544568"/>
-            <a:ext cx="3611880" cy="384048"/>
+          <p:cNvPr id="16" name="TextBox 15"/>
+          <p:cNvSpPr txBox="1"/>
+          <p:nvPr/>
+        </p:nvSpPr>
+        <p:spPr>
+          <a:xfrm>
+            <a:off x="969264" y="3639312"/>
+            <a:ext cx="4983480" cy="384048"/>
           </a:xfrm>
           <a:prstGeom prst="rect">
             <a:avLst/>
@@ -13181,21 +12473,21 @@
               </a:defRPr>
             </a:pPr>
             <a:r>
-              <a:t>实机对照不能缺</a:t>
-            </a:r>
-          </a:p>
-        </p:txBody>
-      </p:sp>
-      <p:sp>
-        <p:nvSpPr>
-          <p:cNvPr id="35" name="TextBox 34"/>
-          <p:cNvSpPr txBox="1"/>
-          <p:nvPr/>
-        </p:nvSpPr>
-        <p:spPr>
-          <a:xfrm>
-            <a:off x="7370064" y="4992624"/>
-            <a:ext cx="3611880" cy="292608"/>
+              <a:t>Agentix：混合程序、并行搜索与多副本</a:t>
+            </a:r>
+          </a:p>
+        </p:txBody>
+      </p:sp>
+      <p:sp>
+        <p:nvSpPr>
+          <p:cNvPr id="17" name="TextBox 16"/>
+          <p:cNvSpPr txBox="1"/>
+          <p:nvPr/>
+        </p:nvSpPr>
+        <p:spPr>
+          <a:xfrm>
+            <a:off x="969264" y="4087368"/>
+            <a:ext cx="4983480" cy="1207008"/>
           </a:xfrm>
           <a:prstGeom prst="rect">
             <a:avLst/>
@@ -13209,7 +12501,7 @@
           <a:lstStyle/>
           <a:p>
             <a:pPr algn="l">
-              <a:defRPr sz="1250" b="0">
+              <a:defRPr sz="1240" b="0">
                 <a:solidFill>
                   <a:srgbClr val="A7B6CA"/>
                 </a:solidFill>
@@ -13217,31 +12509,36 @@
               </a:defRPr>
             </a:pPr>
             <a:r>
-              <a:t>Continuum 式保留期限、ThunderAgent 式时间衰减、Agentix 式到达后优先级。</a:t>
-            </a:r>
-          </a:p>
-        </p:txBody>
-      </p:sp>
-      <p:sp>
-        <p:nvSpPr>
-          <p:cNvPr id="36" name="Rounded Rectangle 35"/>
+              <a:t>ShareGPT 对话、BFCL 工具调用、LATS 并行搜索及其混合负载；按任务而非请求生成到达流，使用 1/4/8 张 A100，并测 2–4 个模型副本。</a:t>
+            </a:r>
+            <a:br/>
+            <a:br/>
+            <a:r>
+              <a:t>我们未覆盖：并行程序图、混合负载与多副本局部性。</a:t>
+            </a:r>
+          </a:p>
+        </p:txBody>
+      </p:sp>
+      <p:sp>
+        <p:nvSpPr>
+          <p:cNvPr id="18" name="Rounded Rectangle 17"/>
           <p:cNvSpPr/>
           <p:nvPr/>
         </p:nvSpPr>
         <p:spPr>
           <a:xfrm>
-            <a:off x="658368" y="5733288"/>
-            <a:ext cx="10881360" cy="530352"/>
+            <a:off x="6291072" y="3493008"/>
+            <a:ext cx="5239512" cy="1920240"/>
           </a:xfrm>
           <a:prstGeom prst="roundRect">
             <a:avLst/>
           </a:prstGeom>
           <a:solidFill>
-            <a:srgbClr val="17263D"/>
+            <a:srgbClr val="111D30"/>
           </a:solidFill>
           <a:ln w="12700">
             <a:solidFill>
-              <a:srgbClr val="F4C75B"/>
+              <a:srgbClr val="17263D"/>
             </a:solidFill>
           </a:ln>
         </p:spPr>
@@ -13267,95 +12564,23 @@
           </a:p>
         </p:txBody>
       </p:sp>
-      <p:sp>
-        <p:nvSpPr>
-          <p:cNvPr id="37" name="TextBox 36"/>
-          <p:cNvSpPr txBox="1"/>
-          <p:nvPr/>
-        </p:nvSpPr>
-        <p:spPr>
-          <a:xfrm>
-            <a:off x="841248" y="5879592"/>
-            <a:ext cx="1325880" cy="201168"/>
-          </a:xfrm>
-          <a:prstGeom prst="rect">
-            <a:avLst/>
-          </a:prstGeom>
-          <a:noFill/>
-        </p:spPr>
-        <p:txBody>
-          <a:bodyPr wrap="square" lIns="27432" rIns="27432" tIns="27432" bIns="27432" anchor="t">
-            <a:spAutoFit/>
-          </a:bodyPr>
-          <a:lstStyle/>
-          <a:p>
-            <a:pPr algn="l">
-              <a:defRPr sz="1050" b="1">
-                <a:solidFill>
-                  <a:srgbClr val="F4C75B"/>
-                </a:solidFill>
-                <a:latin typeface="Noto Sans CJK SC"/>
-              </a:defRPr>
-            </a:pPr>
-            <a:r>
-              <a:t>这一阶段学到</a:t>
-            </a:r>
-          </a:p>
-        </p:txBody>
-      </p:sp>
-      <p:sp>
-        <p:nvSpPr>
-          <p:cNvPr id="38" name="TextBox 37"/>
-          <p:cNvSpPr txBox="1"/>
-          <p:nvPr/>
-        </p:nvSpPr>
-        <p:spPr>
-          <a:xfrm>
-            <a:off x="2066543" y="5833872"/>
-            <a:ext cx="9144000" cy="274320"/>
-          </a:xfrm>
-          <a:prstGeom prst="rect">
-            <a:avLst/>
-          </a:prstGeom>
-          <a:noFill/>
-        </p:spPr>
-        <p:txBody>
-          <a:bodyPr wrap="square" lIns="27432" rIns="27432" tIns="27432" bIns="27432" anchor="t">
-            <a:spAutoFit/>
-          </a:bodyPr>
-          <a:lstStyle/>
-          <a:p>
-            <a:pPr algn="l">
-              <a:defRPr sz="1420" b="1">
-                <a:solidFill>
-                  <a:srgbClr val="F4F7FB"/>
-                </a:solidFill>
-                <a:latin typeface="Noto Sans CJK SC"/>
-              </a:defRPr>
-            </a:pPr>
-            <a:r>
-              <a:t>贡献不是“我们看得更细”，而是这份细粒度状态在相同成本下改变了更好的动作。</a:t>
-            </a:r>
-          </a:p>
-        </p:txBody>
-      </p:sp>
       <p:cxnSp>
         <p:nvCxnSpPr>
-          <p:cNvPr id="39" name="Connector 38"/>
+          <p:cNvPr id="19" name="Connector 18"/>
           <p:cNvCxnSpPr/>
           <p:nvPr/>
         </p:nvCxnSpPr>
         <p:spPr>
           <a:xfrm>
-            <a:off x="566928" y="6455664"/>
-            <a:ext cx="11064240" cy="0"/>
+            <a:off x="6428232" y="3657600"/>
+            <a:ext cx="0" cy="1591056"/>
           </a:xfrm>
           <a:prstGeom prst="line">
             <a:avLst/>
           </a:prstGeom>
-          <a:ln w="10160">
+          <a:ln w="44450">
             <a:solidFill>
-              <a:srgbClr val="17263D"/>
+              <a:srgbClr val="40D39C"/>
             </a:solidFill>
           </a:ln>
         </p:spPr>
@@ -13376,7 +12601,119 @@
       </p:cxnSp>
       <p:sp>
         <p:nvSpPr>
-          <p:cNvPr id="40" name="TextBox 39"/>
+          <p:cNvPr id="20" name="TextBox 19"/>
+          <p:cNvSpPr txBox="1"/>
+          <p:nvPr/>
+        </p:nvSpPr>
+        <p:spPr>
+          <a:xfrm>
+            <a:off x="6601968" y="3639312"/>
+            <a:ext cx="4782312" cy="384048"/>
+          </a:xfrm>
+          <a:prstGeom prst="rect">
+            <a:avLst/>
+          </a:prstGeom>
+          <a:noFill/>
+        </p:spPr>
+        <p:txBody>
+          <a:bodyPr wrap="square" lIns="27432" rIns="27432" tIns="27432" bIns="27432" anchor="t">
+            <a:spAutoFit/>
+          </a:bodyPr>
+          <a:lstStyle/>
+          <a:p>
+            <a:pPr algn="l">
+              <a:defRPr sz="1500" b="1">
+                <a:solidFill>
+                  <a:srgbClr val="40D39C"/>
+                </a:solidFill>
+                <a:latin typeface="Noto Sans CJK SC"/>
+              </a:defRPr>
+            </a:pPr>
+            <a:r>
+              <a:t>我们：工具内部更真实，系统规模更小</a:t>
+            </a:r>
+          </a:p>
+        </p:txBody>
+      </p:sp>
+      <p:sp>
+        <p:nvSpPr>
+          <p:cNvPr id="21" name="TextBox 20"/>
+          <p:cNvSpPr txBox="1"/>
+          <p:nvPr/>
+        </p:nvSpPr>
+        <p:spPr>
+          <a:xfrm>
+            <a:off x="6601968" y="4087368"/>
+            <a:ext cx="4782312" cy="1207008"/>
+          </a:xfrm>
+          <a:prstGeom prst="rect">
+            <a:avLst/>
+          </a:prstGeom>
+          <a:noFill/>
+        </p:spPr>
+        <p:txBody>
+          <a:bodyPr wrap="square" lIns="27432" rIns="27432" tIns="27432" bIns="27432" anchor="t">
+            <a:spAutoFit/>
+          </a:bodyPr>
+          <a:lstStyle/>
+          <a:p>
+            <a:pPr algn="l">
+              <a:defRPr sz="1240" b="0">
+                <a:solidFill>
+                  <a:srgbClr val="A7B6CA"/>
+                </a:solidFill>
+                <a:latin typeface="Noto Sans CJK SC"/>
+              </a:defRPr>
+            </a:pPr>
+            <a:r>
+              <a:t>SQLGlot/PennyLane 保留真实命令、子命令与 CPU/内存/读写计数；SWE/TB 提供广度。但物理 GPU 证据只有单 A100、8 个固定任务的回放。</a:t>
+            </a:r>
+            <a:br/>
+            <a:br/>
+            <a:r>
+              <a:t>我们未覆盖：任务到达流、多副本、多 GPU、强化学习和混合 agent。</a:t>
+            </a:r>
+          </a:p>
+        </p:txBody>
+      </p:sp>
+      <p:cxnSp>
+        <p:nvCxnSpPr>
+          <p:cNvPr id="22" name="Connector 21"/>
+          <p:cNvCxnSpPr/>
+          <p:nvPr/>
+        </p:nvCxnSpPr>
+        <p:spPr>
+          <a:xfrm>
+            <a:off x="566928" y="6455664"/>
+            <a:ext cx="11064240" cy="0"/>
+          </a:xfrm>
+          <a:prstGeom prst="line">
+            <a:avLst/>
+          </a:prstGeom>
+          <a:ln w="10160">
+            <a:solidFill>
+              <a:srgbClr val="17263D"/>
+            </a:solidFill>
+          </a:ln>
+        </p:spPr>
+        <p:style>
+          <a:lnRef idx="2">
+            <a:schemeClr val="accent1"/>
+          </a:lnRef>
+          <a:fillRef idx="0">
+            <a:schemeClr val="accent1"/>
+          </a:fillRef>
+          <a:effectRef idx="1">
+            <a:schemeClr val="accent1"/>
+          </a:effectRef>
+          <a:fontRef idx="minor">
+            <a:schemeClr val="tx1"/>
+          </a:fontRef>
+        </p:style>
+      </p:cxnSp>
+      <p:sp>
+        <p:nvSpPr>
+          <p:cNvPr id="23" name="TextBox 22"/>
           <p:cNvSpPr txBox="1"/>
           <p:nvPr/>
         </p:nvSpPr>
@@ -13405,7 +12742,7 @@
               </a:defRPr>
             </a:pPr>
             <a:r>
-              <a:t>下一步需冻结 cohort、动作、成本和 GO/STOP 标准后再读结果；不启动新的昂贵实验</a:t>
+              <a:t>场景依据：Continuum §6；ThunderAgent §5；Agentix §6；我们的物理边界见 canonical objective</a:t>
             </a:r>
           </a:p>
         </p:txBody>
@@ -13467,7 +12804,7 @@
               </a:defRPr>
             </a:pPr>
             <a:r>
-              <a:t>从预测到系统效果</a:t>
+              <a:t>现实性是多维的</a:t>
             </a:r>
           </a:p>
         </p:txBody>
@@ -13503,7 +12840,7 @@
               </a:defRPr>
             </a:pPr>
             <a:r>
-              <a:t>如果三个环节都成立，论文故事才完整</a:t>
+              <a:t>“更真实”不是一个排名，要看我们想证明什么</a:t>
             </a:r>
           </a:p>
         </p:txBody>
@@ -13581,24 +12918,24 @@
       </p:sp>
       <p:sp>
         <p:nvSpPr>
-          <p:cNvPr id="6" name="Oval 5"/>
+          <p:cNvPr id="6" name="Rounded Rectangle 5"/>
           <p:cNvSpPr/>
           <p:nvPr/>
         </p:nvSpPr>
         <p:spPr>
           <a:xfrm>
-            <a:off x="1545336" y="1417320"/>
-            <a:ext cx="621792" cy="621792"/>
-          </a:xfrm>
-          <a:prstGeom prst="ellipse">
+            <a:off x="694944" y="1298448"/>
+            <a:ext cx="3401568" cy="1847088"/>
+          </a:xfrm>
+          <a:prstGeom prst="roundRect">
             <a:avLst/>
           </a:prstGeom>
           <a:solidFill>
-            <a:srgbClr val="62A8FF"/>
+            <a:srgbClr val="111D30"/>
           </a:solidFill>
-          <a:ln>
+          <a:ln w="12700">
             <a:solidFill>
-              <a:srgbClr val="62A8FF"/>
+              <a:srgbClr val="17263D"/>
             </a:solidFill>
           </a:ln>
         </p:spPr>
@@ -13624,52 +12961,123 @@
           </a:p>
         </p:txBody>
       </p:sp>
-      <p:sp>
-        <p:nvSpPr>
-          <p:cNvPr id="7" name="TextBox 6"/>
-          <p:cNvSpPr txBox="1"/>
-          <p:nvPr/>
-        </p:nvSpPr>
-        <p:spPr>
-          <a:xfrm>
-            <a:off x="1545336" y="1600200"/>
-            <a:ext cx="621792" cy="219456"/>
-          </a:xfrm>
-          <a:prstGeom prst="rect">
-            <a:avLst/>
-          </a:prstGeom>
-          <a:noFill/>
-        </p:spPr>
-        <p:txBody>
-          <a:bodyPr wrap="square" lIns="27432" rIns="27432" tIns="27432" bIns="27432" anchor="t">
-            <a:spAutoFit/>
-          </a:bodyPr>
-          <a:lstStyle/>
-          <a:p>
-            <a:pPr algn="ctr">
-              <a:defRPr sz="1400" b="1">
-                <a:solidFill>
-                  <a:srgbClr val="09111F"/>
-                </a:solidFill>
-                <a:latin typeface="Noto Sans CJK SC"/>
-              </a:defRPr>
-            </a:pPr>
-            <a:r>
-              <a:t>1</a:t>
-            </a:r>
-          </a:p>
-        </p:txBody>
-      </p:sp>
-      <p:sp>
-        <p:nvSpPr>
-          <p:cNvPr id="8" name="Rounded Rectangle 7"/>
+      <p:cxnSp>
+        <p:nvCxnSpPr>
+          <p:cNvPr id="7" name="Connector 6"/>
+          <p:cNvCxnSpPr/>
+          <p:nvPr/>
+        </p:nvCxnSpPr>
+        <p:spPr>
+          <a:xfrm>
+            <a:off x="832104" y="1463039"/>
+            <a:ext cx="0" cy="1517905"/>
+          </a:xfrm>
+          <a:prstGeom prst="line">
+            <a:avLst/>
+          </a:prstGeom>
+          <a:ln w="44450">
+            <a:solidFill>
+              <a:srgbClr val="62A8FF"/>
+            </a:solidFill>
+          </a:ln>
+        </p:spPr>
+        <p:style>
+          <a:lnRef idx="2">
+            <a:schemeClr val="accent1"/>
+          </a:lnRef>
+          <a:fillRef idx="0">
+            <a:schemeClr val="accent1"/>
+          </a:fillRef>
+          <a:effectRef idx="1">
+            <a:schemeClr val="accent1"/>
+          </a:effectRef>
+          <a:fontRef idx="minor">
+            <a:schemeClr val="tx1"/>
+          </a:fontRef>
+        </p:style>
+      </p:cxnSp>
+      <p:sp>
+        <p:nvSpPr>
+          <p:cNvPr id="8" name="TextBox 7"/>
+          <p:cNvSpPr txBox="1"/>
+          <p:nvPr/>
+        </p:nvSpPr>
+        <p:spPr>
+          <a:xfrm>
+            <a:off x="1005840" y="1444751"/>
+            <a:ext cx="2944368" cy="384048"/>
+          </a:xfrm>
+          <a:prstGeom prst="rect">
+            <a:avLst/>
+          </a:prstGeom>
+          <a:noFill/>
+        </p:spPr>
+        <p:txBody>
+          <a:bodyPr wrap="square" lIns="27432" rIns="27432" tIns="27432" bIns="27432" anchor="t">
+            <a:spAutoFit/>
+          </a:bodyPr>
+          <a:lstStyle/>
+          <a:p>
+            <a:pPr algn="l">
+              <a:defRPr sz="1500" b="1">
+                <a:solidFill>
+                  <a:srgbClr val="62A8FF"/>
+                </a:solidFill>
+                <a:latin typeface="Noto Sans CJK SC"/>
+              </a:defRPr>
+            </a:pPr>
+            <a:r>
+              <a:t>证明工具理解</a:t>
+            </a:r>
+          </a:p>
+        </p:txBody>
+      </p:sp>
+      <p:sp>
+        <p:nvSpPr>
+          <p:cNvPr id="9" name="TextBox 8"/>
+          <p:cNvSpPr txBox="1"/>
+          <p:nvPr/>
+        </p:nvSpPr>
+        <p:spPr>
+          <a:xfrm>
+            <a:off x="1005840" y="1892807"/>
+            <a:ext cx="2944368" cy="1133856"/>
+          </a:xfrm>
+          <a:prstGeom prst="rect">
+            <a:avLst/>
+          </a:prstGeom>
+          <a:noFill/>
+        </p:spPr>
+        <p:txBody>
+          <a:bodyPr wrap="square" lIns="27432" rIns="27432" tIns="27432" bIns="27432" anchor="t">
+            <a:spAutoFit/>
+          </a:bodyPr>
+          <a:lstStyle/>
+          <a:p>
+            <a:pPr algn="l">
+              <a:defRPr sz="1220" b="0">
+                <a:solidFill>
+                  <a:srgbClr val="A7B6CA"/>
+                </a:solidFill>
+                <a:latin typeface="Noto Sans CJK SC"/>
+              </a:defRPr>
+            </a:pPr>
+            <a:r>
+              <a:t>最真实：同一大型仓库中的新任务，真实执行测试/安装命令，并刻意覆盖冷缓存、热缓存和不同测试范围。我们更接近，但环境对照还不够。</a:t>
+            </a:r>
+          </a:p>
+        </p:txBody>
+      </p:sp>
+      <p:sp>
+        <p:nvSpPr>
+          <p:cNvPr id="10" name="Rounded Rectangle 9"/>
           <p:cNvSpPr/>
           <p:nvPr/>
         </p:nvSpPr>
         <p:spPr>
           <a:xfrm>
-            <a:off x="713232" y="2304288"/>
-            <a:ext cx="2304288" cy="1508760"/>
+            <a:off x="4389120" y="1298448"/>
+            <a:ext cx="3401568" cy="1847088"/>
           </a:xfrm>
           <a:prstGeom prst="roundRect">
             <a:avLst/>
@@ -13679,7 +13087,7 @@
           </a:solidFill>
           <a:ln w="12700">
             <a:solidFill>
-              <a:srgbClr val="62A8FF"/>
+              <a:srgbClr val="17263D"/>
             </a:solidFill>
           </a:ln>
         </p:spPr>
@@ -13705,65 +13113,100 @@
           </a:p>
         </p:txBody>
       </p:sp>
-      <p:sp>
-        <p:nvSpPr>
-          <p:cNvPr id="9" name="TextBox 8"/>
-          <p:cNvSpPr txBox="1"/>
-          <p:nvPr/>
-        </p:nvSpPr>
-        <p:spPr>
-          <a:xfrm>
-            <a:off x="822960" y="2514600"/>
-            <a:ext cx="2084831" cy="292608"/>
-          </a:xfrm>
-          <a:prstGeom prst="rect">
-            <a:avLst/>
-          </a:prstGeom>
-          <a:noFill/>
-        </p:spPr>
-        <p:txBody>
-          <a:bodyPr wrap="square" lIns="27432" rIns="27432" tIns="27432" bIns="27432" anchor="t">
-            <a:spAutoFit/>
-          </a:bodyPr>
-          <a:lstStyle/>
-          <a:p>
-            <a:pPr algn="ctr">
+      <p:cxnSp>
+        <p:nvCxnSpPr>
+          <p:cNvPr id="11" name="Connector 10"/>
+          <p:cNvCxnSpPr/>
+          <p:nvPr/>
+        </p:nvCxnSpPr>
+        <p:spPr>
+          <a:xfrm>
+            <a:off x="4526280" y="1463039"/>
+            <a:ext cx="0" cy="1517905"/>
+          </a:xfrm>
+          <a:prstGeom prst="line">
+            <a:avLst/>
+          </a:prstGeom>
+          <a:ln w="44450">
+            <a:solidFill>
+              <a:srgbClr val="B69BFF"/>
+            </a:solidFill>
+          </a:ln>
+        </p:spPr>
+        <p:style>
+          <a:lnRef idx="2">
+            <a:schemeClr val="accent1"/>
+          </a:lnRef>
+          <a:fillRef idx="0">
+            <a:schemeClr val="accent1"/>
+          </a:fillRef>
+          <a:effectRef idx="1">
+            <a:schemeClr val="accent1"/>
+          </a:effectRef>
+          <a:fontRef idx="minor">
+            <a:schemeClr val="tx1"/>
+          </a:fontRef>
+        </p:style>
+      </p:cxnSp>
+      <p:sp>
+        <p:nvSpPr>
+          <p:cNvPr id="12" name="TextBox 11"/>
+          <p:cNvSpPr txBox="1"/>
+          <p:nvPr/>
+        </p:nvSpPr>
+        <p:spPr>
+          <a:xfrm>
+            <a:off x="4700016" y="1444751"/>
+            <a:ext cx="2944368" cy="384048"/>
+          </a:xfrm>
+          <a:prstGeom prst="rect">
+            <a:avLst/>
+          </a:prstGeom>
+          <a:noFill/>
+        </p:spPr>
+        <p:txBody>
+          <a:bodyPr wrap="square" lIns="27432" rIns="27432" tIns="27432" bIns="27432" anchor="t">
+            <a:spAutoFit/>
+          </a:bodyPr>
+          <a:lstStyle/>
+          <a:p>
+            <a:pPr algn="l">
               <a:defRPr sz="1500" b="1">
                 <a:solidFill>
-                  <a:srgbClr val="62A8FF"/>
-                </a:solidFill>
-                <a:latin typeface="Noto Sans CJK SC"/>
-              </a:defRPr>
-            </a:pPr>
-            <a:r>
-              <a:t>理解工具</a:t>
-            </a:r>
-          </a:p>
-        </p:txBody>
-      </p:sp>
-      <p:sp>
-        <p:nvSpPr>
-          <p:cNvPr id="10" name="TextBox 9"/>
-          <p:cNvSpPr txBox="1"/>
-          <p:nvPr/>
-        </p:nvSpPr>
-        <p:spPr>
-          <a:xfrm>
-            <a:off x="877824" y="2962656"/>
-            <a:ext cx="1975104" cy="530352"/>
-          </a:xfrm>
-          <a:prstGeom prst="rect">
-            <a:avLst/>
-          </a:prstGeom>
-          <a:noFill/>
-        </p:spPr>
-        <p:txBody>
-          <a:bodyPr wrap="square" lIns="27432" rIns="27432" tIns="27432" bIns="27432" anchor="t">
-            <a:spAutoFit/>
-          </a:bodyPr>
-          <a:lstStyle/>
-          <a:p>
-            <a:pPr algn="ctr">
+                  <a:srgbClr val="B69BFF"/>
+                </a:solidFill>
+                <a:latin typeface="Noto Sans CJK SC"/>
+              </a:defRPr>
+            </a:pPr>
+            <a:r>
+              <a:t>证明 GPU 服务</a:t>
+            </a:r>
+          </a:p>
+        </p:txBody>
+      </p:sp>
+      <p:sp>
+        <p:nvSpPr>
+          <p:cNvPr id="13" name="TextBox 12"/>
+          <p:cNvSpPr txBox="1"/>
+          <p:nvPr/>
+        </p:nvSpPr>
+        <p:spPr>
+          <a:xfrm>
+            <a:off x="4700016" y="1892807"/>
+            <a:ext cx="2944368" cy="1133856"/>
+          </a:xfrm>
+          <a:prstGeom prst="rect">
+            <a:avLst/>
+          </a:prstGeom>
+          <a:noFill/>
+        </p:spPr>
+        <p:txBody>
+          <a:bodyPr wrap="square" lIns="27432" rIns="27432" tIns="27432" bIns="27432" anchor="t">
+            <a:spAutoFit/>
+          </a:bodyPr>
+          <a:lstStyle/>
+          <a:p>
+            <a:pPr algn="l">
               <a:defRPr sz="1220" b="0">
                 <a:solidFill>
                   <a:srgbClr val="A7B6CA"/>
@@ -13772,21 +13215,330 @@
               </a:defRPr>
             </a:pPr>
             <a:r>
-              <a:t>完整命令 → 子命令 → 真实工作</a:t>
-            </a:r>
-          </a:p>
-        </p:txBody>
-      </p:sp>
-      <p:sp>
-        <p:nvSpPr>
-          <p:cNvPr id="11" name="Right Arrow 10"/>
+              <a:t>最真实：不同 agent 混合到达、从低负载扫到饱和、多个模型副本，并报告平均与最慢 1% 延迟。三篇相关工作明显更完整。</a:t>
+            </a:r>
+          </a:p>
+        </p:txBody>
+      </p:sp>
+      <p:sp>
+        <p:nvSpPr>
+          <p:cNvPr id="14" name="Rounded Rectangle 13"/>
           <p:cNvSpPr/>
           <p:nvPr/>
         </p:nvSpPr>
         <p:spPr>
           <a:xfrm>
-            <a:off x="3118104" y="2926080"/>
-            <a:ext cx="256032" cy="164592"/>
+            <a:off x="8083296" y="1298448"/>
+            <a:ext cx="3401568" cy="1847088"/>
+          </a:xfrm>
+          <a:prstGeom prst="roundRect">
+            <a:avLst/>
+          </a:prstGeom>
+          <a:solidFill>
+            <a:srgbClr val="111D30"/>
+          </a:solidFill>
+          <a:ln w="12700">
+            <a:solidFill>
+              <a:srgbClr val="17263D"/>
+            </a:solidFill>
+          </a:ln>
+        </p:spPr>
+        <p:style>
+          <a:lnRef idx="1">
+            <a:schemeClr val="accent1"/>
+          </a:lnRef>
+          <a:fillRef idx="3">
+            <a:schemeClr val="accent1"/>
+          </a:fillRef>
+          <a:effectRef idx="2">
+            <a:schemeClr val="accent1"/>
+          </a:effectRef>
+          <a:fontRef idx="minor">
+            <a:schemeClr val="lt1"/>
+          </a:fontRef>
+        </p:style>
+        <p:txBody>
+          <a:bodyPr rtlCol="0" anchor="ctr"/>
+          <a:lstStyle/>
+          <a:p>
+            <a:pPr algn="ctr"/>
+          </a:p>
+        </p:txBody>
+      </p:sp>
+      <p:cxnSp>
+        <p:nvCxnSpPr>
+          <p:cNvPr id="15" name="Connector 14"/>
+          <p:cNvCxnSpPr/>
+          <p:nvPr/>
+        </p:nvCxnSpPr>
+        <p:spPr>
+          <a:xfrm>
+            <a:off x="8220456" y="1463039"/>
+            <a:ext cx="0" cy="1517905"/>
+          </a:xfrm>
+          <a:prstGeom prst="line">
+            <a:avLst/>
+          </a:prstGeom>
+          <a:ln w="44450">
+            <a:solidFill>
+              <a:srgbClr val="F4C75B"/>
+            </a:solidFill>
+          </a:ln>
+        </p:spPr>
+        <p:style>
+          <a:lnRef idx="2">
+            <a:schemeClr val="accent1"/>
+          </a:lnRef>
+          <a:fillRef idx="0">
+            <a:schemeClr val="accent1"/>
+          </a:fillRef>
+          <a:effectRef idx="1">
+            <a:schemeClr val="accent1"/>
+          </a:effectRef>
+          <a:fontRef idx="minor">
+            <a:schemeClr val="tx1"/>
+          </a:fontRef>
+        </p:style>
+      </p:cxnSp>
+      <p:sp>
+        <p:nvSpPr>
+          <p:cNvPr id="16" name="TextBox 15"/>
+          <p:cNvSpPr txBox="1"/>
+          <p:nvPr/>
+        </p:nvSpPr>
+        <p:spPr>
+          <a:xfrm>
+            <a:off x="8394192" y="1444751"/>
+            <a:ext cx="2944368" cy="384048"/>
+          </a:xfrm>
+          <a:prstGeom prst="rect">
+            <a:avLst/>
+          </a:prstGeom>
+          <a:noFill/>
+        </p:spPr>
+        <p:txBody>
+          <a:bodyPr wrap="square" lIns="27432" rIns="27432" tIns="27432" bIns="27432" anchor="t">
+            <a:spAutoFit/>
+          </a:bodyPr>
+          <a:lstStyle/>
+          <a:p>
+            <a:pPr algn="l">
+              <a:defRPr sz="1500" b="1">
+                <a:solidFill>
+                  <a:srgbClr val="F4C75B"/>
+                </a:solidFill>
+                <a:latin typeface="Noto Sans CJK SC"/>
+              </a:defRPr>
+            </a:pPr>
+            <a:r>
+              <a:t>证明 CPU/GPU 协同</a:t>
+            </a:r>
+          </a:p>
+        </p:txBody>
+      </p:sp>
+      <p:sp>
+        <p:nvSpPr>
+          <p:cNvPr id="17" name="TextBox 16"/>
+          <p:cNvSpPr txBox="1"/>
+          <p:nvPr/>
+        </p:nvSpPr>
+        <p:spPr>
+          <a:xfrm>
+            <a:off x="8394192" y="1892807"/>
+            <a:ext cx="2944368" cy="1133856"/>
+          </a:xfrm>
+          <a:prstGeom prst="rect">
+            <a:avLst/>
+          </a:prstGeom>
+          <a:noFill/>
+        </p:spPr>
+        <p:txBody>
+          <a:bodyPr wrap="square" lIns="27432" rIns="27432" tIns="27432" bIns="27432" anchor="t">
+            <a:spAutoFit/>
+          </a:bodyPr>
+          <a:lstStyle/>
+          <a:p>
+            <a:pPr algn="l">
+              <a:defRPr sz="1220" b="0">
+                <a:solidFill>
+                  <a:srgbClr val="A7B6CA"/>
+                </a:solidFill>
+                <a:latin typeface="Noto Sans CJK SC"/>
+              </a:defRPr>
+            </a:pPr>
+            <a:r>
+              <a:t>最真实：多个 coding agents 共享模型服务，在独立 CPU 节点执行真实工具；全部等待、变慢和状态移动都计入。ThunderAgent 最接近，但不看 shell 内部。</a:t>
+            </a:r>
+          </a:p>
+        </p:txBody>
+      </p:sp>
+      <p:sp>
+        <p:nvSpPr>
+          <p:cNvPr id="18" name="TextBox 17"/>
+          <p:cNvSpPr txBox="1"/>
+          <p:nvPr/>
+        </p:nvSpPr>
+        <p:spPr>
+          <a:xfrm>
+            <a:off x="804672" y="3557016"/>
+            <a:ext cx="5669280" cy="329184"/>
+          </a:xfrm>
+          <a:prstGeom prst="rect">
+            <a:avLst/>
+          </a:prstGeom>
+          <a:noFill/>
+        </p:spPr>
+        <p:txBody>
+          <a:bodyPr wrap="square" lIns="27432" rIns="27432" tIns="27432" bIns="27432" anchor="t">
+            <a:spAutoFit/>
+          </a:bodyPr>
+          <a:lstStyle/>
+          <a:p>
+            <a:pPr algn="l">
+              <a:defRPr sz="1600" b="1">
+                <a:solidFill>
+                  <a:srgbClr val="F4F7FB"/>
+                </a:solidFill>
+                <a:latin typeface="Noto Sans CJK SC"/>
+              </a:defRPr>
+            </a:pPr>
+            <a:r>
+              <a:t>因此不能只选一种数据分布；需要两层互补验证</a:t>
+            </a:r>
+          </a:p>
+        </p:txBody>
+      </p:sp>
+      <p:sp>
+        <p:nvSpPr>
+          <p:cNvPr id="19" name="Rounded Rectangle 18"/>
+          <p:cNvSpPr/>
+          <p:nvPr/>
+        </p:nvSpPr>
+        <p:spPr>
+          <a:xfrm>
+            <a:off x="804672" y="4069080"/>
+            <a:ext cx="4526280" cy="1115568"/>
+          </a:xfrm>
+          <a:prstGeom prst="roundRect">
+            <a:avLst/>
+          </a:prstGeom>
+          <a:solidFill>
+            <a:srgbClr val="111D30"/>
+          </a:solidFill>
+          <a:ln w="12700">
+            <a:solidFill>
+              <a:srgbClr val="32D5C4"/>
+            </a:solidFill>
+          </a:ln>
+        </p:spPr>
+        <p:style>
+          <a:lnRef idx="1">
+            <a:schemeClr val="accent1"/>
+          </a:lnRef>
+          <a:fillRef idx="3">
+            <a:schemeClr val="accent1"/>
+          </a:fillRef>
+          <a:effectRef idx="2">
+            <a:schemeClr val="accent1"/>
+          </a:effectRef>
+          <a:fontRef idx="minor">
+            <a:schemeClr val="lt1"/>
+          </a:fontRef>
+        </p:style>
+        <p:txBody>
+          <a:bodyPr rtlCol="0" anchor="ctr"/>
+          <a:lstStyle/>
+          <a:p>
+            <a:pPr algn="ctr"/>
+          </a:p>
+        </p:txBody>
+      </p:sp>
+      <p:sp>
+        <p:nvSpPr>
+          <p:cNvPr id="20" name="TextBox 19"/>
+          <p:cNvSpPr txBox="1"/>
+          <p:nvPr/>
+        </p:nvSpPr>
+        <p:spPr>
+          <a:xfrm>
+            <a:off x="1005840" y="4279392"/>
+            <a:ext cx="1554480" cy="256032"/>
+          </a:xfrm>
+          <a:prstGeom prst="rect">
+            <a:avLst/>
+          </a:prstGeom>
+          <a:noFill/>
+        </p:spPr>
+        <p:txBody>
+          <a:bodyPr wrap="square" lIns="27432" rIns="27432" tIns="27432" bIns="27432" anchor="t">
+            <a:spAutoFit/>
+          </a:bodyPr>
+          <a:lstStyle/>
+          <a:p>
+            <a:pPr algn="l">
+              <a:defRPr sz="1400" b="1">
+                <a:solidFill>
+                  <a:srgbClr val="32D5C4"/>
+                </a:solidFill>
+                <a:latin typeface="Noto Sans CJK SC"/>
+              </a:defRPr>
+            </a:pPr>
+            <a:r>
+              <a:t>A · 方法是否有效</a:t>
+            </a:r>
+          </a:p>
+        </p:txBody>
+      </p:sp>
+      <p:sp>
+        <p:nvSpPr>
+          <p:cNvPr id="21" name="TextBox 20"/>
+          <p:cNvSpPr txBox="1"/>
+          <p:nvPr/>
+        </p:nvSpPr>
+        <p:spPr>
+          <a:xfrm>
+            <a:off x="2514600" y="4187952"/>
+            <a:ext cx="2542032" cy="530352"/>
+          </a:xfrm>
+          <a:prstGeom prst="rect">
+            <a:avLst/>
+          </a:prstGeom>
+          <a:noFill/>
+        </p:spPr>
+        <p:txBody>
+          <a:bodyPr wrap="square" lIns="27432" rIns="27432" tIns="27432" bIns="27432" anchor="t">
+            <a:spAutoFit/>
+          </a:bodyPr>
+          <a:lstStyle/>
+          <a:p>
+            <a:pPr algn="l">
+              <a:defRPr sz="1220" b="0">
+                <a:solidFill>
+                  <a:srgbClr val="A7B6CA"/>
+                </a:solidFill>
+                <a:latin typeface="Noto Sans CJK SC"/>
+              </a:defRPr>
+            </a:pPr>
+            <a:r>
+              <a:t>新鲜的同仓库任务 + 真实环境状态</a:t>
+            </a:r>
+            <a:br/>
+            <a:r>
+              <a:t>回答：细粒度状态能不能改进动作？</a:t>
+            </a:r>
+          </a:p>
+        </p:txBody>
+      </p:sp>
+      <p:sp>
+        <p:nvSpPr>
+          <p:cNvPr id="22" name="Right Arrow 21"/>
+          <p:cNvSpPr/>
+          <p:nvPr/>
+        </p:nvSpPr>
+        <p:spPr>
+          <a:xfrm>
+            <a:off x="5468112" y="4498848"/>
+            <a:ext cx="640080" cy="182880"/>
           </a:xfrm>
           <a:prstGeom prst="rightArrow">
             <a:avLst/>
@@ -13824,581 +13576,14 @@
       </p:sp>
       <p:sp>
         <p:nvSpPr>
-          <p:cNvPr id="12" name="Oval 11"/>
+          <p:cNvPr id="23" name="Rounded Rectangle 22"/>
           <p:cNvSpPr/>
           <p:nvPr/>
         </p:nvSpPr>
         <p:spPr>
           <a:xfrm>
-            <a:off x="4334256" y="1417320"/>
-            <a:ext cx="621792" cy="621792"/>
-          </a:xfrm>
-          <a:prstGeom prst="ellipse">
-            <a:avLst/>
-          </a:prstGeom>
-          <a:solidFill>
-            <a:srgbClr val="32D5C4"/>
-          </a:solidFill>
-          <a:ln>
-            <a:solidFill>
-              <a:srgbClr val="32D5C4"/>
-            </a:solidFill>
-          </a:ln>
-        </p:spPr>
-        <p:style>
-          <a:lnRef idx="1">
-            <a:schemeClr val="accent1"/>
-          </a:lnRef>
-          <a:fillRef idx="3">
-            <a:schemeClr val="accent1"/>
-          </a:fillRef>
-          <a:effectRef idx="2">
-            <a:schemeClr val="accent1"/>
-          </a:effectRef>
-          <a:fontRef idx="minor">
-            <a:schemeClr val="lt1"/>
-          </a:fontRef>
-        </p:style>
-        <p:txBody>
-          <a:bodyPr rtlCol="0" anchor="ctr"/>
-          <a:lstStyle/>
-          <a:p>
-            <a:pPr algn="ctr"/>
-          </a:p>
-        </p:txBody>
-      </p:sp>
-      <p:sp>
-        <p:nvSpPr>
-          <p:cNvPr id="13" name="TextBox 12"/>
-          <p:cNvSpPr txBox="1"/>
-          <p:nvPr/>
-        </p:nvSpPr>
-        <p:spPr>
-          <a:xfrm>
-            <a:off x="4334256" y="1600200"/>
-            <a:ext cx="621792" cy="219456"/>
-          </a:xfrm>
-          <a:prstGeom prst="rect">
-            <a:avLst/>
-          </a:prstGeom>
-          <a:noFill/>
-        </p:spPr>
-        <p:txBody>
-          <a:bodyPr wrap="square" lIns="27432" rIns="27432" tIns="27432" bIns="27432" anchor="t">
-            <a:spAutoFit/>
-          </a:bodyPr>
-          <a:lstStyle/>
-          <a:p>
-            <a:pPr algn="ctr">
-              <a:defRPr sz="1400" b="1">
-                <a:solidFill>
-                  <a:srgbClr val="09111F"/>
-                </a:solidFill>
-                <a:latin typeface="Noto Sans CJK SC"/>
-              </a:defRPr>
-            </a:pPr>
-            <a:r>
-              <a:t>2</a:t>
-            </a:r>
-          </a:p>
-        </p:txBody>
-      </p:sp>
-      <p:sp>
-        <p:nvSpPr>
-          <p:cNvPr id="14" name="Rounded Rectangle 13"/>
-          <p:cNvSpPr/>
-          <p:nvPr/>
-        </p:nvSpPr>
-        <p:spPr>
-          <a:xfrm>
-            <a:off x="3502152" y="2304288"/>
-            <a:ext cx="2304288" cy="1508760"/>
-          </a:xfrm>
-          <a:prstGeom prst="roundRect">
-            <a:avLst/>
-          </a:prstGeom>
-          <a:solidFill>
-            <a:srgbClr val="111D30"/>
-          </a:solidFill>
-          <a:ln w="12700">
-            <a:solidFill>
-              <a:srgbClr val="32D5C4"/>
-            </a:solidFill>
-          </a:ln>
-        </p:spPr>
-        <p:style>
-          <a:lnRef idx="1">
-            <a:schemeClr val="accent1"/>
-          </a:lnRef>
-          <a:fillRef idx="3">
-            <a:schemeClr val="accent1"/>
-          </a:fillRef>
-          <a:effectRef idx="2">
-            <a:schemeClr val="accent1"/>
-          </a:effectRef>
-          <a:fontRef idx="minor">
-            <a:schemeClr val="lt1"/>
-          </a:fontRef>
-        </p:style>
-        <p:txBody>
-          <a:bodyPr rtlCol="0" anchor="ctr"/>
-          <a:lstStyle/>
-          <a:p>
-            <a:pPr algn="ctr"/>
-          </a:p>
-        </p:txBody>
-      </p:sp>
-      <p:sp>
-        <p:nvSpPr>
-          <p:cNvPr id="15" name="TextBox 14"/>
-          <p:cNvSpPr txBox="1"/>
-          <p:nvPr/>
-        </p:nvSpPr>
-        <p:spPr>
-          <a:xfrm>
-            <a:off x="3611880" y="2514600"/>
-            <a:ext cx="2084831" cy="292608"/>
-          </a:xfrm>
-          <a:prstGeom prst="rect">
-            <a:avLst/>
-          </a:prstGeom>
-          <a:noFill/>
-        </p:spPr>
-        <p:txBody>
-          <a:bodyPr wrap="square" lIns="27432" rIns="27432" tIns="27432" bIns="27432" anchor="t">
-            <a:spAutoFit/>
-          </a:bodyPr>
-          <a:lstStyle/>
-          <a:p>
-            <a:pPr algn="ctr">
-              <a:defRPr sz="1500" b="1">
-                <a:solidFill>
-                  <a:srgbClr val="32D5C4"/>
-                </a:solidFill>
-                <a:latin typeface="Noto Sans CJK SC"/>
-              </a:defRPr>
-            </a:pPr>
-            <a:r>
-              <a:t>预测状态</a:t>
-            </a:r>
-          </a:p>
-        </p:txBody>
-      </p:sp>
-      <p:sp>
-        <p:nvSpPr>
-          <p:cNvPr id="16" name="TextBox 15"/>
-          <p:cNvSpPr txBox="1"/>
-          <p:nvPr/>
-        </p:nvSpPr>
-        <p:spPr>
-          <a:xfrm>
-            <a:off x="3666744" y="2962656"/>
-            <a:ext cx="1975104" cy="530352"/>
-          </a:xfrm>
-          <a:prstGeom prst="rect">
-            <a:avLst/>
-          </a:prstGeom>
-          <a:noFill/>
-        </p:spPr>
-        <p:txBody>
-          <a:bodyPr wrap="square" lIns="27432" rIns="27432" tIns="27432" bIns="27432" anchor="t">
-            <a:spAutoFit/>
-          </a:bodyPr>
-          <a:lstStyle/>
-          <a:p>
-            <a:pPr algn="ctr">
-              <a:defRPr sz="1220" b="0">
-                <a:solidFill>
-                  <a:srgbClr val="A7B6CA"/>
-                </a:solidFill>
-                <a:latin typeface="Noto Sans CJK SC"/>
-              </a:defRPr>
-            </a:pPr>
-            <a:r>
-              <a:t>何时返回、CPU/内存/读写如何变化</a:t>
-            </a:r>
-          </a:p>
-        </p:txBody>
-      </p:sp>
-      <p:sp>
-        <p:nvSpPr>
-          <p:cNvPr id="17" name="Right Arrow 16"/>
-          <p:cNvSpPr/>
-          <p:nvPr/>
-        </p:nvSpPr>
-        <p:spPr>
-          <a:xfrm>
-            <a:off x="5907024" y="2926080"/>
-            <a:ext cx="256032" cy="164592"/>
-          </a:xfrm>
-          <a:prstGeom prst="rightArrow">
-            <a:avLst/>
-          </a:prstGeom>
-          <a:solidFill>
-            <a:srgbClr val="677990"/>
-          </a:solidFill>
-          <a:ln>
-            <a:solidFill>
-              <a:srgbClr val="677990"/>
-            </a:solidFill>
-          </a:ln>
-        </p:spPr>
-        <p:style>
-          <a:lnRef idx="1">
-            <a:schemeClr val="accent1"/>
-          </a:lnRef>
-          <a:fillRef idx="3">
-            <a:schemeClr val="accent1"/>
-          </a:fillRef>
-          <a:effectRef idx="2">
-            <a:schemeClr val="accent1"/>
-          </a:effectRef>
-          <a:fontRef idx="minor">
-            <a:schemeClr val="lt1"/>
-          </a:fontRef>
-        </p:style>
-        <p:txBody>
-          <a:bodyPr rtlCol="0" anchor="ctr"/>
-          <a:lstStyle/>
-          <a:p>
-            <a:pPr algn="ctr"/>
-          </a:p>
-        </p:txBody>
-      </p:sp>
-      <p:sp>
-        <p:nvSpPr>
-          <p:cNvPr id="18" name="Oval 17"/>
-          <p:cNvSpPr/>
-          <p:nvPr/>
-        </p:nvSpPr>
-        <p:spPr>
-          <a:xfrm>
-            <a:off x="7123176" y="1417320"/>
-            <a:ext cx="621792" cy="621792"/>
-          </a:xfrm>
-          <a:prstGeom prst="ellipse">
-            <a:avLst/>
-          </a:prstGeom>
-          <a:solidFill>
-            <a:srgbClr val="F4C75B"/>
-          </a:solidFill>
-          <a:ln>
-            <a:solidFill>
-              <a:srgbClr val="F4C75B"/>
-            </a:solidFill>
-          </a:ln>
-        </p:spPr>
-        <p:style>
-          <a:lnRef idx="1">
-            <a:schemeClr val="accent1"/>
-          </a:lnRef>
-          <a:fillRef idx="3">
-            <a:schemeClr val="accent1"/>
-          </a:fillRef>
-          <a:effectRef idx="2">
-            <a:schemeClr val="accent1"/>
-          </a:effectRef>
-          <a:fontRef idx="minor">
-            <a:schemeClr val="lt1"/>
-          </a:fontRef>
-        </p:style>
-        <p:txBody>
-          <a:bodyPr rtlCol="0" anchor="ctr"/>
-          <a:lstStyle/>
-          <a:p>
-            <a:pPr algn="ctr"/>
-          </a:p>
-        </p:txBody>
-      </p:sp>
-      <p:sp>
-        <p:nvSpPr>
-          <p:cNvPr id="19" name="TextBox 18"/>
-          <p:cNvSpPr txBox="1"/>
-          <p:nvPr/>
-        </p:nvSpPr>
-        <p:spPr>
-          <a:xfrm>
-            <a:off x="7123176" y="1600200"/>
-            <a:ext cx="621792" cy="219456"/>
-          </a:xfrm>
-          <a:prstGeom prst="rect">
-            <a:avLst/>
-          </a:prstGeom>
-          <a:noFill/>
-        </p:spPr>
-        <p:txBody>
-          <a:bodyPr wrap="square" lIns="27432" rIns="27432" tIns="27432" bIns="27432" anchor="t">
-            <a:spAutoFit/>
-          </a:bodyPr>
-          <a:lstStyle/>
-          <a:p>
-            <a:pPr algn="ctr">
-              <a:defRPr sz="1400" b="1">
-                <a:solidFill>
-                  <a:srgbClr val="09111F"/>
-                </a:solidFill>
-                <a:latin typeface="Noto Sans CJK SC"/>
-              </a:defRPr>
-            </a:pPr>
-            <a:r>
-              <a:t>3</a:t>
-            </a:r>
-          </a:p>
-        </p:txBody>
-      </p:sp>
-      <p:sp>
-        <p:nvSpPr>
-          <p:cNvPr id="20" name="Rounded Rectangle 19"/>
-          <p:cNvSpPr/>
-          <p:nvPr/>
-        </p:nvSpPr>
-        <p:spPr>
-          <a:xfrm>
-            <a:off x="6291072" y="2304288"/>
-            <a:ext cx="2304288" cy="1508760"/>
-          </a:xfrm>
-          <a:prstGeom prst="roundRect">
-            <a:avLst/>
-          </a:prstGeom>
-          <a:solidFill>
-            <a:srgbClr val="111D30"/>
-          </a:solidFill>
-          <a:ln w="12700">
-            <a:solidFill>
-              <a:srgbClr val="F4C75B"/>
-            </a:solidFill>
-          </a:ln>
-        </p:spPr>
-        <p:style>
-          <a:lnRef idx="1">
-            <a:schemeClr val="accent1"/>
-          </a:lnRef>
-          <a:fillRef idx="3">
-            <a:schemeClr val="accent1"/>
-          </a:fillRef>
-          <a:effectRef idx="2">
-            <a:schemeClr val="accent1"/>
-          </a:effectRef>
-          <a:fontRef idx="minor">
-            <a:schemeClr val="lt1"/>
-          </a:fontRef>
-        </p:style>
-        <p:txBody>
-          <a:bodyPr rtlCol="0" anchor="ctr"/>
-          <a:lstStyle/>
-          <a:p>
-            <a:pPr algn="ctr"/>
-          </a:p>
-        </p:txBody>
-      </p:sp>
-      <p:sp>
-        <p:nvSpPr>
-          <p:cNvPr id="21" name="TextBox 20"/>
-          <p:cNvSpPr txBox="1"/>
-          <p:nvPr/>
-        </p:nvSpPr>
-        <p:spPr>
-          <a:xfrm>
-            <a:off x="6400800" y="2514600"/>
-            <a:ext cx="2084831" cy="292608"/>
-          </a:xfrm>
-          <a:prstGeom prst="rect">
-            <a:avLst/>
-          </a:prstGeom>
-          <a:noFill/>
-        </p:spPr>
-        <p:txBody>
-          <a:bodyPr wrap="square" lIns="27432" rIns="27432" tIns="27432" bIns="27432" anchor="t">
-            <a:spAutoFit/>
-          </a:bodyPr>
-          <a:lstStyle/>
-          <a:p>
-            <a:pPr algn="ctr">
-              <a:defRPr sz="1500" b="1">
-                <a:solidFill>
-                  <a:srgbClr val="F4C75B"/>
-                </a:solidFill>
-                <a:latin typeface="Noto Sans CJK SC"/>
-              </a:defRPr>
-            </a:pPr>
-            <a:r>
-              <a:t>连接动作</a:t>
-            </a:r>
-          </a:p>
-        </p:txBody>
-      </p:sp>
-      <p:sp>
-        <p:nvSpPr>
-          <p:cNvPr id="22" name="TextBox 21"/>
-          <p:cNvSpPr txBox="1"/>
-          <p:nvPr/>
-        </p:nvSpPr>
-        <p:spPr>
-          <a:xfrm>
-            <a:off x="6455664" y="2962656"/>
-            <a:ext cx="1975104" cy="530352"/>
-          </a:xfrm>
-          <a:prstGeom prst="rect">
-            <a:avLst/>
-          </a:prstGeom>
-          <a:noFill/>
-        </p:spPr>
-        <p:txBody>
-          <a:bodyPr wrap="square" lIns="27432" rIns="27432" tIns="27432" bIns="27432" anchor="t">
-            <a:spAutoFit/>
-          </a:bodyPr>
-          <a:lstStyle/>
-          <a:p>
-            <a:pPr algn="ctr">
-              <a:defRPr sz="1220" b="0">
-                <a:solidFill>
-                  <a:srgbClr val="A7B6CA"/>
-                </a:solidFill>
-                <a:latin typeface="Noto Sans CJK SC"/>
-              </a:defRPr>
-            </a:pPr>
-            <a:r>
-              <a:t>借入、返回优先、KV 保留、工具进程放置</a:t>
-            </a:r>
-          </a:p>
-        </p:txBody>
-      </p:sp>
-      <p:sp>
-        <p:nvSpPr>
-          <p:cNvPr id="23" name="Right Arrow 22"/>
-          <p:cNvSpPr/>
-          <p:nvPr/>
-        </p:nvSpPr>
-        <p:spPr>
-          <a:xfrm>
-            <a:off x="8695944" y="2926080"/>
-            <a:ext cx="256032" cy="164592"/>
-          </a:xfrm>
-          <a:prstGeom prst="rightArrow">
-            <a:avLst/>
-          </a:prstGeom>
-          <a:solidFill>
-            <a:srgbClr val="677990"/>
-          </a:solidFill>
-          <a:ln>
-            <a:solidFill>
-              <a:srgbClr val="677990"/>
-            </a:solidFill>
-          </a:ln>
-        </p:spPr>
-        <p:style>
-          <a:lnRef idx="1">
-            <a:schemeClr val="accent1"/>
-          </a:lnRef>
-          <a:fillRef idx="3">
-            <a:schemeClr val="accent1"/>
-          </a:fillRef>
-          <a:effectRef idx="2">
-            <a:schemeClr val="accent1"/>
-          </a:effectRef>
-          <a:fontRef idx="minor">
-            <a:schemeClr val="lt1"/>
-          </a:fontRef>
-        </p:style>
-        <p:txBody>
-          <a:bodyPr rtlCol="0" anchor="ctr"/>
-          <a:lstStyle/>
-          <a:p>
-            <a:pPr algn="ctr"/>
-          </a:p>
-        </p:txBody>
-      </p:sp>
-      <p:sp>
-        <p:nvSpPr>
-          <p:cNvPr id="24" name="Oval 23"/>
-          <p:cNvSpPr/>
-          <p:nvPr/>
-        </p:nvSpPr>
-        <p:spPr>
-          <a:xfrm>
-            <a:off x="9912095" y="1417320"/>
-            <a:ext cx="621792" cy="621792"/>
-          </a:xfrm>
-          <a:prstGeom prst="ellipse">
-            <a:avLst/>
-          </a:prstGeom>
-          <a:solidFill>
-            <a:srgbClr val="40D39C"/>
-          </a:solidFill>
-          <a:ln>
-            <a:solidFill>
-              <a:srgbClr val="40D39C"/>
-            </a:solidFill>
-          </a:ln>
-        </p:spPr>
-        <p:style>
-          <a:lnRef idx="1">
-            <a:schemeClr val="accent1"/>
-          </a:lnRef>
-          <a:fillRef idx="3">
-            <a:schemeClr val="accent1"/>
-          </a:fillRef>
-          <a:effectRef idx="2">
-            <a:schemeClr val="accent1"/>
-          </a:effectRef>
-          <a:fontRef idx="minor">
-            <a:schemeClr val="lt1"/>
-          </a:fontRef>
-        </p:style>
-        <p:txBody>
-          <a:bodyPr rtlCol="0" anchor="ctr"/>
-          <a:lstStyle/>
-          <a:p>
-            <a:pPr algn="ctr"/>
-          </a:p>
-        </p:txBody>
-      </p:sp>
-      <p:sp>
-        <p:nvSpPr>
-          <p:cNvPr id="25" name="TextBox 24"/>
-          <p:cNvSpPr txBox="1"/>
-          <p:nvPr/>
-        </p:nvSpPr>
-        <p:spPr>
-          <a:xfrm>
-            <a:off x="9912095" y="1600200"/>
-            <a:ext cx="621792" cy="219456"/>
-          </a:xfrm>
-          <a:prstGeom prst="rect">
-            <a:avLst/>
-          </a:prstGeom>
-          <a:noFill/>
-        </p:spPr>
-        <p:txBody>
-          <a:bodyPr wrap="square" lIns="27432" rIns="27432" tIns="27432" bIns="27432" anchor="t">
-            <a:spAutoFit/>
-          </a:bodyPr>
-          <a:lstStyle/>
-          <a:p>
-            <a:pPr algn="ctr">
-              <a:defRPr sz="1400" b="1">
-                <a:solidFill>
-                  <a:srgbClr val="09111F"/>
-                </a:solidFill>
-                <a:latin typeface="Noto Sans CJK SC"/>
-              </a:defRPr>
-            </a:pPr>
-            <a:r>
-              <a:t>4</a:t>
-            </a:r>
-          </a:p>
-        </p:txBody>
-      </p:sp>
-      <p:sp>
-        <p:nvSpPr>
-          <p:cNvPr id="26" name="Rounded Rectangle 25"/>
-          <p:cNvSpPr/>
-          <p:nvPr/>
-        </p:nvSpPr>
-        <p:spPr>
-          <a:xfrm>
-            <a:off x="9079991" y="2304288"/>
-            <a:ext cx="2304288" cy="1508760"/>
+            <a:off x="6309360" y="4069080"/>
+            <a:ext cx="4526280" cy="1115568"/>
           </a:xfrm>
           <a:prstGeom prst="roundRect">
             <a:avLst/>
@@ -14436,28 +13621,28 @@
       </p:sp>
       <p:sp>
         <p:nvSpPr>
-          <p:cNvPr id="27" name="TextBox 26"/>
-          <p:cNvSpPr txBox="1"/>
-          <p:nvPr/>
-        </p:nvSpPr>
-        <p:spPr>
-          <a:xfrm>
-            <a:off x="9189719" y="2514600"/>
-            <a:ext cx="2084831" cy="292608"/>
-          </a:xfrm>
-          <a:prstGeom prst="rect">
-            <a:avLst/>
-          </a:prstGeom>
-          <a:noFill/>
-        </p:spPr>
-        <p:txBody>
-          <a:bodyPr wrap="square" lIns="27432" rIns="27432" tIns="27432" bIns="27432" anchor="t">
-            <a:spAutoFit/>
-          </a:bodyPr>
-          <a:lstStyle/>
-          <a:p>
-            <a:pPr algn="ctr">
-              <a:defRPr sz="1500" b="1">
+          <p:cNvPr id="24" name="TextBox 23"/>
+          <p:cNvSpPr txBox="1"/>
+          <p:nvPr/>
+        </p:nvSpPr>
+        <p:spPr>
+          <a:xfrm>
+            <a:off x="6510528" y="4279392"/>
+            <a:ext cx="1554480" cy="256032"/>
+          </a:xfrm>
+          <a:prstGeom prst="rect">
+            <a:avLst/>
+          </a:prstGeom>
+          <a:noFill/>
+        </p:spPr>
+        <p:txBody>
+          <a:bodyPr wrap="square" lIns="27432" rIns="27432" tIns="27432" bIns="27432" anchor="t">
+            <a:spAutoFit/>
+          </a:bodyPr>
+          <a:lstStyle/>
+          <a:p>
+            <a:pPr algn="l">
+              <a:defRPr sz="1400" b="1">
                 <a:solidFill>
                   <a:srgbClr val="40D39C"/>
                 </a:solidFill>
@@ -14465,34 +13650,34 @@
               </a:defRPr>
             </a:pPr>
             <a:r>
-              <a:t>证明收益</a:t>
-            </a:r>
-          </a:p>
-        </p:txBody>
-      </p:sp>
-      <p:sp>
-        <p:nvSpPr>
-          <p:cNvPr id="28" name="TextBox 27"/>
-          <p:cNvSpPr txBox="1"/>
-          <p:nvPr/>
-        </p:nvSpPr>
-        <p:spPr>
-          <a:xfrm>
-            <a:off x="9244583" y="2962656"/>
-            <a:ext cx="1975104" cy="530352"/>
-          </a:xfrm>
-          <a:prstGeom prst="rect">
-            <a:avLst/>
-          </a:prstGeom>
-          <a:noFill/>
-        </p:spPr>
-        <p:txBody>
-          <a:bodyPr wrap="square" lIns="27432" rIns="27432" tIns="27432" bIns="27432" anchor="t">
-            <a:spAutoFit/>
-          </a:bodyPr>
-          <a:lstStyle/>
-          <a:p>
-            <a:pPr algn="ctr">
+              <a:t>B · 系统是否实用</a:t>
+            </a:r>
+          </a:p>
+        </p:txBody>
+      </p:sp>
+      <p:sp>
+        <p:nvSpPr>
+          <p:cNvPr id="25" name="TextBox 24"/>
+          <p:cNvSpPr txBox="1"/>
+          <p:nvPr/>
+        </p:nvSpPr>
+        <p:spPr>
+          <a:xfrm>
+            <a:off x="8028431" y="4187952"/>
+            <a:ext cx="2542032" cy="603504"/>
+          </a:xfrm>
+          <a:prstGeom prst="rect">
+            <a:avLst/>
+          </a:prstGeom>
+          <a:noFill/>
+        </p:spPr>
+        <p:txBody>
+          <a:bodyPr wrap="square" lIns="27432" rIns="27432" tIns="27432" bIns="27432" anchor="t">
+            <a:spAutoFit/>
+          </a:bodyPr>
+          <a:lstStyle/>
+          <a:p>
+            <a:pPr algn="l">
               <a:defRPr sz="1220" b="0">
                 <a:solidFill>
                   <a:srgbClr val="A7B6CA"/>
@@ -14501,470 +13686,18 @@
               </a:defRPr>
             </a:pPr>
             <a:r>
-              <a:t>任务更快、尾部不坏、移动成本全计入</a:t>
-            </a:r>
-          </a:p>
-        </p:txBody>
-      </p:sp>
-      <p:sp>
-        <p:nvSpPr>
-          <p:cNvPr id="29" name="Rounded Rectangle 28"/>
-          <p:cNvSpPr/>
-          <p:nvPr/>
-        </p:nvSpPr>
-        <p:spPr>
-          <a:xfrm>
-            <a:off x="749808" y="4315968"/>
-            <a:ext cx="3246120" cy="1051560"/>
-          </a:xfrm>
-          <a:prstGeom prst="roundRect">
-            <a:avLst/>
-          </a:prstGeom>
-          <a:solidFill>
-            <a:srgbClr val="111D30"/>
-          </a:solidFill>
-          <a:ln w="12700">
-            <a:solidFill>
-              <a:srgbClr val="17263D"/>
-            </a:solidFill>
-          </a:ln>
-        </p:spPr>
-        <p:style>
-          <a:lnRef idx="1">
-            <a:schemeClr val="accent1"/>
-          </a:lnRef>
-          <a:fillRef idx="3">
-            <a:schemeClr val="accent1"/>
-          </a:fillRef>
-          <a:effectRef idx="2">
-            <a:schemeClr val="accent1"/>
-          </a:effectRef>
-          <a:fontRef idx="minor">
-            <a:schemeClr val="lt1"/>
-          </a:fontRef>
-        </p:style>
-        <p:txBody>
-          <a:bodyPr rtlCol="0" anchor="ctr"/>
-          <a:lstStyle/>
-          <a:p>
-            <a:pPr algn="ctr"/>
-          </a:p>
-        </p:txBody>
-      </p:sp>
-      <p:cxnSp>
-        <p:nvCxnSpPr>
-          <p:cNvPr id="30" name="Connector 29"/>
-          <p:cNvCxnSpPr/>
-          <p:nvPr/>
-        </p:nvCxnSpPr>
-        <p:spPr>
-          <a:xfrm>
-            <a:off x="886968" y="4480559"/>
-            <a:ext cx="0" cy="722377"/>
-          </a:xfrm>
-          <a:prstGeom prst="line">
-            <a:avLst/>
-          </a:prstGeom>
-          <a:ln w="44450">
-            <a:solidFill>
-              <a:srgbClr val="62A8FF"/>
-            </a:solidFill>
-          </a:ln>
-        </p:spPr>
-        <p:style>
-          <a:lnRef idx="2">
-            <a:schemeClr val="accent1"/>
-          </a:lnRef>
-          <a:fillRef idx="0">
-            <a:schemeClr val="accent1"/>
-          </a:fillRef>
-          <a:effectRef idx="1">
-            <a:schemeClr val="accent1"/>
-          </a:effectRef>
-          <a:fontRef idx="minor">
-            <a:schemeClr val="tx1"/>
-          </a:fontRef>
-        </p:style>
-      </p:cxnSp>
-      <p:sp>
-        <p:nvSpPr>
-          <p:cNvPr id="31" name="TextBox 30"/>
-          <p:cNvSpPr txBox="1"/>
-          <p:nvPr/>
-        </p:nvSpPr>
-        <p:spPr>
-          <a:xfrm>
-            <a:off x="1060704" y="4462272"/>
-            <a:ext cx="2788920" cy="384048"/>
-          </a:xfrm>
-          <a:prstGeom prst="rect">
-            <a:avLst/>
-          </a:prstGeom>
-          <a:noFill/>
-        </p:spPr>
-        <p:txBody>
-          <a:bodyPr wrap="square" lIns="27432" rIns="27432" tIns="27432" bIns="27432" anchor="t">
-            <a:spAutoFit/>
-          </a:bodyPr>
-          <a:lstStyle/>
-          <a:p>
-            <a:pPr algn="l">
-              <a:defRPr sz="1500" b="1">
-                <a:solidFill>
-                  <a:srgbClr val="62A8FF"/>
-                </a:solidFill>
-                <a:latin typeface="Noto Sans CJK SC"/>
-              </a:defRPr>
-            </a:pPr>
-            <a:r>
-              <a:t>可能贡献 A</a:t>
-            </a:r>
-          </a:p>
-        </p:txBody>
-      </p:sp>
-      <p:sp>
-        <p:nvSpPr>
-          <p:cNvPr id="32" name="TextBox 31"/>
-          <p:cNvSpPr txBox="1"/>
-          <p:nvPr/>
-        </p:nvSpPr>
-        <p:spPr>
-          <a:xfrm>
-            <a:off x="1060704" y="4910328"/>
-            <a:ext cx="2788920" cy="338327"/>
-          </a:xfrm>
-          <a:prstGeom prst="rect">
-            <a:avLst/>
-          </a:prstGeom>
-          <a:noFill/>
-        </p:spPr>
-        <p:txBody>
-          <a:bodyPr wrap="square" lIns="27432" rIns="27432" tIns="27432" bIns="27432" anchor="t">
-            <a:spAutoFit/>
-          </a:bodyPr>
-          <a:lstStyle/>
-          <a:p>
-            <a:pPr algn="l">
-              <a:defRPr sz="1280" b="0">
-                <a:solidFill>
-                  <a:srgbClr val="A7B6CA"/>
-                </a:solidFill>
-                <a:latin typeface="Noto Sans CJK SC"/>
-              </a:defRPr>
-            </a:pPr>
-            <a:r>
-              <a:t>普通黑盒 agent trace 也能得到完整命令/子命令级资源状态。</a:t>
-            </a:r>
-          </a:p>
-        </p:txBody>
-      </p:sp>
-      <p:sp>
-        <p:nvSpPr>
-          <p:cNvPr id="33" name="Rounded Rectangle 32"/>
-          <p:cNvSpPr/>
-          <p:nvPr/>
-        </p:nvSpPr>
-        <p:spPr>
-          <a:xfrm>
-            <a:off x="4462272" y="4315968"/>
-            <a:ext cx="3246120" cy="1051560"/>
-          </a:xfrm>
-          <a:prstGeom prst="roundRect">
-            <a:avLst/>
-          </a:prstGeom>
-          <a:solidFill>
-            <a:srgbClr val="111D30"/>
-          </a:solidFill>
-          <a:ln w="12700">
-            <a:solidFill>
-              <a:srgbClr val="17263D"/>
-            </a:solidFill>
-          </a:ln>
-        </p:spPr>
-        <p:style>
-          <a:lnRef idx="1">
-            <a:schemeClr val="accent1"/>
-          </a:lnRef>
-          <a:fillRef idx="3">
-            <a:schemeClr val="accent1"/>
-          </a:fillRef>
-          <a:effectRef idx="2">
-            <a:schemeClr val="accent1"/>
-          </a:effectRef>
-          <a:fontRef idx="minor">
-            <a:schemeClr val="lt1"/>
-          </a:fontRef>
-        </p:style>
-        <p:txBody>
-          <a:bodyPr rtlCol="0" anchor="ctr"/>
-          <a:lstStyle/>
-          <a:p>
-            <a:pPr algn="ctr"/>
-          </a:p>
-        </p:txBody>
-      </p:sp>
-      <p:cxnSp>
-        <p:nvCxnSpPr>
-          <p:cNvPr id="34" name="Connector 33"/>
-          <p:cNvCxnSpPr/>
-          <p:nvPr/>
-        </p:nvCxnSpPr>
-        <p:spPr>
-          <a:xfrm>
-            <a:off x="4599432" y="4480559"/>
-            <a:ext cx="0" cy="722377"/>
-          </a:xfrm>
-          <a:prstGeom prst="line">
-            <a:avLst/>
-          </a:prstGeom>
-          <a:ln w="44450">
-            <a:solidFill>
-              <a:srgbClr val="32D5C4"/>
-            </a:solidFill>
-          </a:ln>
-        </p:spPr>
-        <p:style>
-          <a:lnRef idx="2">
-            <a:schemeClr val="accent1"/>
-          </a:lnRef>
-          <a:fillRef idx="0">
-            <a:schemeClr val="accent1"/>
-          </a:fillRef>
-          <a:effectRef idx="1">
-            <a:schemeClr val="accent1"/>
-          </a:effectRef>
-          <a:fontRef idx="minor">
-            <a:schemeClr val="tx1"/>
-          </a:fontRef>
-        </p:style>
-      </p:cxnSp>
-      <p:sp>
-        <p:nvSpPr>
-          <p:cNvPr id="35" name="TextBox 34"/>
-          <p:cNvSpPr txBox="1"/>
-          <p:nvPr/>
-        </p:nvSpPr>
-        <p:spPr>
-          <a:xfrm>
-            <a:off x="4773168" y="4462272"/>
-            <a:ext cx="2788920" cy="384048"/>
-          </a:xfrm>
-          <a:prstGeom prst="rect">
-            <a:avLst/>
-          </a:prstGeom>
-          <a:noFill/>
-        </p:spPr>
-        <p:txBody>
-          <a:bodyPr wrap="square" lIns="27432" rIns="27432" tIns="27432" bIns="27432" anchor="t">
-            <a:spAutoFit/>
-          </a:bodyPr>
-          <a:lstStyle/>
-          <a:p>
-            <a:pPr algn="l">
-              <a:defRPr sz="1500" b="1">
-                <a:solidFill>
-                  <a:srgbClr val="32D5C4"/>
-                </a:solidFill>
-                <a:latin typeface="Noto Sans CJK SC"/>
-              </a:defRPr>
-            </a:pPr>
-            <a:r>
-              <a:t>可能贡献 B</a:t>
-            </a:r>
-          </a:p>
-        </p:txBody>
-      </p:sp>
-      <p:sp>
-        <p:nvSpPr>
-          <p:cNvPr id="36" name="TextBox 35"/>
-          <p:cNvSpPr txBox="1"/>
-          <p:nvPr/>
-        </p:nvSpPr>
-        <p:spPr>
-          <a:xfrm>
-            <a:off x="4773168" y="4910328"/>
-            <a:ext cx="2788920" cy="338327"/>
-          </a:xfrm>
-          <a:prstGeom prst="rect">
-            <a:avLst/>
-          </a:prstGeom>
-          <a:noFill/>
-        </p:spPr>
-        <p:txBody>
-          <a:bodyPr wrap="square" lIns="27432" rIns="27432" tIns="27432" bIns="27432" anchor="t">
-            <a:spAutoFit/>
-          </a:bodyPr>
-          <a:lstStyle/>
-          <a:p>
-            <a:pPr algn="l">
-              <a:defRPr sz="1280" b="0">
-                <a:solidFill>
-                  <a:srgbClr val="A7B6CA"/>
-                </a:solidFill>
-                <a:latin typeface="Noto Sans CJK SC"/>
-              </a:defRPr>
-            </a:pPr>
-            <a:r>
-              <a:t>细粒度状态改善跨 CPU/GPU 的实际调度动作。</a:t>
-            </a:r>
-          </a:p>
-        </p:txBody>
-      </p:sp>
-      <p:sp>
-        <p:nvSpPr>
-          <p:cNvPr id="37" name="Rounded Rectangle 36"/>
-          <p:cNvSpPr/>
-          <p:nvPr/>
-        </p:nvSpPr>
-        <p:spPr>
-          <a:xfrm>
-            <a:off x="8174736" y="4315968"/>
-            <a:ext cx="3246120" cy="1051560"/>
-          </a:xfrm>
-          <a:prstGeom prst="roundRect">
-            <a:avLst/>
-          </a:prstGeom>
-          <a:solidFill>
-            <a:srgbClr val="111D30"/>
-          </a:solidFill>
-          <a:ln w="12700">
-            <a:solidFill>
-              <a:srgbClr val="17263D"/>
-            </a:solidFill>
-          </a:ln>
-        </p:spPr>
-        <p:style>
-          <a:lnRef idx="1">
-            <a:schemeClr val="accent1"/>
-          </a:lnRef>
-          <a:fillRef idx="3">
-            <a:schemeClr val="accent1"/>
-          </a:fillRef>
-          <a:effectRef idx="2">
-            <a:schemeClr val="accent1"/>
-          </a:effectRef>
-          <a:fontRef idx="minor">
-            <a:schemeClr val="lt1"/>
-          </a:fontRef>
-        </p:style>
-        <p:txBody>
-          <a:bodyPr rtlCol="0" anchor="ctr"/>
-          <a:lstStyle/>
-          <a:p>
-            <a:pPr algn="ctr"/>
-          </a:p>
-        </p:txBody>
-      </p:sp>
-      <p:cxnSp>
-        <p:nvCxnSpPr>
-          <p:cNvPr id="38" name="Connector 37"/>
-          <p:cNvCxnSpPr/>
-          <p:nvPr/>
-        </p:nvCxnSpPr>
-        <p:spPr>
-          <a:xfrm>
-            <a:off x="8311896" y="4480559"/>
-            <a:ext cx="0" cy="722377"/>
-          </a:xfrm>
-          <a:prstGeom prst="line">
-            <a:avLst/>
-          </a:prstGeom>
-          <a:ln w="44450">
-            <a:solidFill>
-              <a:srgbClr val="40D39C"/>
-            </a:solidFill>
-          </a:ln>
-        </p:spPr>
-        <p:style>
-          <a:lnRef idx="2">
-            <a:schemeClr val="accent1"/>
-          </a:lnRef>
-          <a:fillRef idx="0">
-            <a:schemeClr val="accent1"/>
-          </a:fillRef>
-          <a:effectRef idx="1">
-            <a:schemeClr val="accent1"/>
-          </a:effectRef>
-          <a:fontRef idx="minor">
-            <a:schemeClr val="tx1"/>
-          </a:fontRef>
-        </p:style>
-      </p:cxnSp>
-      <p:sp>
-        <p:nvSpPr>
-          <p:cNvPr id="39" name="TextBox 38"/>
-          <p:cNvSpPr txBox="1"/>
-          <p:nvPr/>
-        </p:nvSpPr>
-        <p:spPr>
-          <a:xfrm>
-            <a:off x="8485632" y="4462272"/>
-            <a:ext cx="2788920" cy="384048"/>
-          </a:xfrm>
-          <a:prstGeom prst="rect">
-            <a:avLst/>
-          </a:prstGeom>
-          <a:noFill/>
-        </p:spPr>
-        <p:txBody>
-          <a:bodyPr wrap="square" lIns="27432" rIns="27432" tIns="27432" bIns="27432" anchor="t">
-            <a:spAutoFit/>
-          </a:bodyPr>
-          <a:lstStyle/>
-          <a:p>
-            <a:pPr algn="l">
-              <a:defRPr sz="1500" b="1">
-                <a:solidFill>
-                  <a:srgbClr val="40D39C"/>
-                </a:solidFill>
-                <a:latin typeface="Noto Sans CJK SC"/>
-              </a:defRPr>
-            </a:pPr>
-            <a:r>
-              <a:t>可能贡献 C</a:t>
-            </a:r>
-          </a:p>
-        </p:txBody>
-      </p:sp>
-      <p:sp>
-        <p:nvSpPr>
-          <p:cNvPr id="40" name="TextBox 39"/>
-          <p:cNvSpPr txBox="1"/>
-          <p:nvPr/>
-        </p:nvSpPr>
-        <p:spPr>
-          <a:xfrm>
-            <a:off x="8485632" y="4910328"/>
-            <a:ext cx="2788920" cy="338327"/>
-          </a:xfrm>
-          <a:prstGeom prst="rect">
-            <a:avLst/>
-          </a:prstGeom>
-          <a:noFill/>
-        </p:spPr>
-        <p:txBody>
-          <a:bodyPr wrap="square" lIns="27432" rIns="27432" tIns="27432" bIns="27432" anchor="t">
-            <a:spAutoFit/>
-          </a:bodyPr>
-          <a:lstStyle/>
-          <a:p>
-            <a:pPr algn="l">
-              <a:defRPr sz="1280" b="0">
-                <a:solidFill>
-                  <a:srgbClr val="A7B6CA"/>
-                </a:solidFill>
-                <a:latin typeface="Noto Sans CJK SC"/>
-              </a:defRPr>
-            </a:pPr>
-            <a:r>
-              <a:t>在真实 agent 负载上同时改善完成时间与尾部。</a:t>
-            </a:r>
-          </a:p>
-        </p:txBody>
-      </p:sp>
-      <p:sp>
-        <p:nvSpPr>
-          <p:cNvPr id="41" name="Rounded Rectangle 40"/>
+              <a:t>同仓库与跨仓库混合 + 批量突发与到达流</a:t>
+            </a:r>
+            <a:br/>
+            <a:r>
+              <a:t>回答：在真实竞争下是否仍改善完成时间和尾部？</a:t>
+            </a:r>
+          </a:p>
+        </p:txBody>
+      </p:sp>
+      <p:sp>
+        <p:nvSpPr>
+          <p:cNvPr id="26" name="Rounded Rectangle 25"/>
           <p:cNvSpPr/>
           <p:nvPr/>
         </p:nvSpPr>
@@ -15009,7 +13742,7 @@
       </p:sp>
       <p:sp>
         <p:nvSpPr>
-          <p:cNvPr id="42" name="TextBox 41"/>
+          <p:cNvPr id="27" name="TextBox 26"/>
           <p:cNvSpPr txBox="1"/>
           <p:nvPr/>
         </p:nvSpPr>
@@ -15045,7 +13778,7 @@
       </p:sp>
       <p:sp>
         <p:nvSpPr>
-          <p:cNvPr id="43" name="TextBox 42"/>
+          <p:cNvPr id="28" name="TextBox 27"/>
           <p:cNvSpPr txBox="1"/>
           <p:nvPr/>
         </p:nvSpPr>
@@ -15074,14 +13807,14 @@
               </a:defRPr>
             </a:pPr>
             <a:r>
-              <a:t>单独的预测准确率不够；系统贡献必须落在完整任务完成时间、尾部与资源成本上。</a:t>
+              <a:t>下一套实验应保留我们的真实工具粒度，同时补上相关工作的并发、到达流和多副本场景。</a:t>
             </a:r>
           </a:p>
         </p:txBody>
       </p:sp>
       <p:cxnSp>
         <p:nvCxnSpPr>
-          <p:cNvPr id="44" name="Connector 43"/>
+          <p:cNvPr id="29" name="Connector 28"/>
           <p:cNvCxnSpPr/>
           <p:nvPr/>
         </p:nvCxnSpPr>
@@ -15116,7 +13849,7 @@
       </p:cxnSp>
       <p:sp>
         <p:nvSpPr>
-          <p:cNvPr id="45" name="TextBox 44"/>
+          <p:cNvPr id="30" name="TextBox 29"/>
           <p:cNvSpPr txBox="1"/>
           <p:nvPr/>
         </p:nvSpPr>
@@ -15145,7 +13878,7 @@
               </a:defRPr>
             </a:pPr>
             <a:r>
-              <a:t>当前 A 有成熟基础；B 有 trace 回放上界与物理反馈信号；C 尚未成立</a:t>
+              <a:t>判断：系统规模上 related work 更真实；shell 内部工作上我们的 trace 更真实；两者都不能替代另一方</a:t>
             </a:r>
           </a:p>
         </p:txBody>
@@ -15207,7 +13940,7 @@
               </a:defRPr>
             </a:pPr>
             <a:r>
-              <a:t>Takeaways</a:t>
+              <a:t>把候选差异变成可证伪问题</a:t>
             </a:r>
           </a:p>
         </p:txBody>
@@ -15243,7 +13976,7 @@
               </a:defRPr>
             </a:pPr>
             <a:r>
-              <a:t>带走四句话，然后继续问一个更尖锐的问题</a:t>
+              <a:t>下一步先做一个最小因果实验，不先造新系统</a:t>
             </a:r>
           </a:p>
         </p:txBody>
@@ -15315,6 +14048,3279 @@
             </a:pPr>
             <a:r>
               <a:t>17</a:t>
+            </a:r>
+          </a:p>
+        </p:txBody>
+      </p:sp>
+      <p:sp>
+        <p:nvSpPr>
+          <p:cNvPr id="6" name="TextBox 5"/>
+          <p:cNvSpPr txBox="1"/>
+          <p:nvPr/>
+        </p:nvSpPr>
+        <p:spPr>
+          <a:xfrm>
+            <a:off x="749808" y="1335024"/>
+            <a:ext cx="6583680" cy="347472"/>
+          </a:xfrm>
+          <a:prstGeom prst="rect">
+            <a:avLst/>
+          </a:prstGeom>
+          <a:noFill/>
+        </p:spPr>
+        <p:txBody>
+          <a:bodyPr wrap="square" lIns="27432" rIns="27432" tIns="27432" bIns="27432" anchor="t">
+            <a:spAutoFit/>
+          </a:bodyPr>
+          <a:lstStyle/>
+          <a:p>
+            <a:pPr algn="l">
+              <a:defRPr sz="1600" b="1">
+                <a:solidFill>
+                  <a:srgbClr val="F4F7FB"/>
+                </a:solidFill>
+                <a:latin typeface="Noto Sans CJK SC"/>
+              </a:defRPr>
+            </a:pPr>
+            <a:r>
+              <a:t>同一批真实 trace，比较三层信息是否真的改变动作</a:t>
+            </a:r>
+          </a:p>
+        </p:txBody>
+      </p:sp>
+      <p:sp>
+        <p:nvSpPr>
+          <p:cNvPr id="7" name="Oval 6"/>
+          <p:cNvSpPr/>
+          <p:nvPr/>
+        </p:nvSpPr>
+        <p:spPr>
+          <a:xfrm>
+            <a:off x="822960" y="1920239"/>
+            <a:ext cx="475488" cy="475488"/>
+          </a:xfrm>
+          <a:prstGeom prst="ellipse">
+            <a:avLst/>
+          </a:prstGeom>
+          <a:solidFill>
+            <a:srgbClr val="677990"/>
+          </a:solidFill>
+          <a:ln>
+            <a:solidFill>
+              <a:srgbClr val="677990"/>
+            </a:solidFill>
+          </a:ln>
+        </p:spPr>
+        <p:style>
+          <a:lnRef idx="1">
+            <a:schemeClr val="accent1"/>
+          </a:lnRef>
+          <a:fillRef idx="3">
+            <a:schemeClr val="accent1"/>
+          </a:fillRef>
+          <a:effectRef idx="2">
+            <a:schemeClr val="accent1"/>
+          </a:effectRef>
+          <a:fontRef idx="minor">
+            <a:schemeClr val="lt1"/>
+          </a:fontRef>
+        </p:style>
+        <p:txBody>
+          <a:bodyPr rtlCol="0" anchor="ctr"/>
+          <a:lstStyle/>
+          <a:p>
+            <a:pPr algn="ctr"/>
+          </a:p>
+        </p:txBody>
+      </p:sp>
+      <p:sp>
+        <p:nvSpPr>
+          <p:cNvPr id="8" name="TextBox 7"/>
+          <p:cNvSpPr txBox="1"/>
+          <p:nvPr/>
+        </p:nvSpPr>
+        <p:spPr>
+          <a:xfrm>
+            <a:off x="822960" y="2011679"/>
+            <a:ext cx="475488" cy="201168"/>
+          </a:xfrm>
+          <a:prstGeom prst="rect">
+            <a:avLst/>
+          </a:prstGeom>
+          <a:noFill/>
+        </p:spPr>
+        <p:txBody>
+          <a:bodyPr wrap="square" lIns="27432" rIns="27432" tIns="27432" bIns="27432" anchor="t">
+            <a:spAutoFit/>
+          </a:bodyPr>
+          <a:lstStyle/>
+          <a:p>
+            <a:pPr algn="ctr">
+              <a:defRPr sz="1200" b="1">
+                <a:solidFill>
+                  <a:srgbClr val="09111F"/>
+                </a:solidFill>
+                <a:latin typeface="Noto Sans CJK SC"/>
+              </a:defRPr>
+            </a:pPr>
+            <a:r>
+              <a:t>A</a:t>
+            </a:r>
+          </a:p>
+        </p:txBody>
+      </p:sp>
+      <p:sp>
+        <p:nvSpPr>
+          <p:cNvPr id="9" name="Rounded Rectangle 8"/>
+          <p:cNvSpPr/>
+          <p:nvPr/>
+        </p:nvSpPr>
+        <p:spPr>
+          <a:xfrm>
+            <a:off x="1508760" y="1874519"/>
+            <a:ext cx="5074920" cy="640080"/>
+          </a:xfrm>
+          <a:prstGeom prst="roundRect">
+            <a:avLst/>
+          </a:prstGeom>
+          <a:solidFill>
+            <a:srgbClr val="111D30"/>
+          </a:solidFill>
+          <a:ln w="12700">
+            <a:solidFill>
+              <a:srgbClr val="677990"/>
+            </a:solidFill>
+          </a:ln>
+        </p:spPr>
+        <p:style>
+          <a:lnRef idx="1">
+            <a:schemeClr val="accent1"/>
+          </a:lnRef>
+          <a:fillRef idx="3">
+            <a:schemeClr val="accent1"/>
+          </a:fillRef>
+          <a:effectRef idx="2">
+            <a:schemeClr val="accent1"/>
+          </a:effectRef>
+          <a:fontRef idx="minor">
+            <a:schemeClr val="lt1"/>
+          </a:fontRef>
+        </p:style>
+        <p:txBody>
+          <a:bodyPr rtlCol="0" anchor="ctr"/>
+          <a:lstStyle/>
+          <a:p>
+            <a:pPr algn="ctr"/>
+          </a:p>
+        </p:txBody>
+      </p:sp>
+      <p:sp>
+        <p:nvSpPr>
+          <p:cNvPr id="10" name="TextBox 9"/>
+          <p:cNvSpPr txBox="1"/>
+          <p:nvPr/>
+        </p:nvSpPr>
+        <p:spPr>
+          <a:xfrm>
+            <a:off x="1691640" y="2029967"/>
+            <a:ext cx="1645920" cy="256032"/>
+          </a:xfrm>
+          <a:prstGeom prst="rect">
+            <a:avLst/>
+          </a:prstGeom>
+          <a:noFill/>
+        </p:spPr>
+        <p:txBody>
+          <a:bodyPr wrap="square" lIns="27432" rIns="27432" tIns="27432" bIns="27432" anchor="t">
+            <a:spAutoFit/>
+          </a:bodyPr>
+          <a:lstStyle/>
+          <a:p>
+            <a:pPr algn="l">
+              <a:defRPr sz="1400" b="1">
+                <a:solidFill>
+                  <a:srgbClr val="677990"/>
+                </a:solidFill>
+                <a:latin typeface="Noto Sans CJK SC"/>
+              </a:defRPr>
+            </a:pPr>
+            <a:r>
+              <a:t>阶段反馈</a:t>
+            </a:r>
+          </a:p>
+        </p:txBody>
+      </p:sp>
+      <p:sp>
+        <p:nvSpPr>
+          <p:cNvPr id="11" name="TextBox 10"/>
+          <p:cNvSpPr txBox="1"/>
+          <p:nvPr/>
+        </p:nvSpPr>
+        <p:spPr>
+          <a:xfrm>
+            <a:off x="3291840" y="2029967"/>
+            <a:ext cx="3063240" cy="274320"/>
+          </a:xfrm>
+          <a:prstGeom prst="rect">
+            <a:avLst/>
+          </a:prstGeom>
+          <a:noFill/>
+        </p:spPr>
+        <p:txBody>
+          <a:bodyPr wrap="square" lIns="27432" rIns="27432" tIns="27432" bIns="27432" anchor="t">
+            <a:spAutoFit/>
+          </a:bodyPr>
+          <a:lstStyle/>
+          <a:p>
+            <a:pPr algn="l">
+              <a:defRPr sz="1220" b="0">
+                <a:solidFill>
+                  <a:srgbClr val="A7B6CA"/>
+                </a:solidFill>
+                <a:latin typeface="Noto Sans CJK SC"/>
+              </a:defRPr>
+            </a:pPr>
+            <a:r>
+              <a:t>只知道：现在在 LLM 还是工具阶段</a:t>
+            </a:r>
+          </a:p>
+        </p:txBody>
+      </p:sp>
+      <p:sp>
+        <p:nvSpPr>
+          <p:cNvPr id="12" name="Right Arrow 11"/>
+          <p:cNvSpPr/>
+          <p:nvPr/>
+        </p:nvSpPr>
+        <p:spPr>
+          <a:xfrm>
+            <a:off x="969264" y="2624327"/>
+            <a:ext cx="164592" cy="182880"/>
+          </a:xfrm>
+          <a:prstGeom prst="rightArrow">
+            <a:avLst/>
+          </a:prstGeom>
+          <a:solidFill>
+            <a:srgbClr val="677990"/>
+          </a:solidFill>
+          <a:ln>
+            <a:solidFill>
+              <a:srgbClr val="677990"/>
+            </a:solidFill>
+          </a:ln>
+        </p:spPr>
+        <p:style>
+          <a:lnRef idx="1">
+            <a:schemeClr val="accent1"/>
+          </a:lnRef>
+          <a:fillRef idx="3">
+            <a:schemeClr val="accent1"/>
+          </a:fillRef>
+          <a:effectRef idx="2">
+            <a:schemeClr val="accent1"/>
+          </a:effectRef>
+          <a:fontRef idx="minor">
+            <a:schemeClr val="lt1"/>
+          </a:fontRef>
+        </p:style>
+        <p:txBody>
+          <a:bodyPr rtlCol="0" anchor="ctr"/>
+          <a:lstStyle/>
+          <a:p>
+            <a:pPr algn="ctr"/>
+          </a:p>
+        </p:txBody>
+      </p:sp>
+      <p:sp>
+        <p:nvSpPr>
+          <p:cNvPr id="13" name="Oval 12"/>
+          <p:cNvSpPr/>
+          <p:nvPr/>
+        </p:nvSpPr>
+        <p:spPr>
+          <a:xfrm>
+            <a:off x="822960" y="2926079"/>
+            <a:ext cx="475488" cy="475488"/>
+          </a:xfrm>
+          <a:prstGeom prst="ellipse">
+            <a:avLst/>
+          </a:prstGeom>
+          <a:solidFill>
+            <a:srgbClr val="F4C75B"/>
+          </a:solidFill>
+          <a:ln>
+            <a:solidFill>
+              <a:srgbClr val="F4C75B"/>
+            </a:solidFill>
+          </a:ln>
+        </p:spPr>
+        <p:style>
+          <a:lnRef idx="1">
+            <a:schemeClr val="accent1"/>
+          </a:lnRef>
+          <a:fillRef idx="3">
+            <a:schemeClr val="accent1"/>
+          </a:fillRef>
+          <a:effectRef idx="2">
+            <a:schemeClr val="accent1"/>
+          </a:effectRef>
+          <a:fontRef idx="minor">
+            <a:schemeClr val="lt1"/>
+          </a:fontRef>
+        </p:style>
+        <p:txBody>
+          <a:bodyPr rtlCol="0" anchor="ctr"/>
+          <a:lstStyle/>
+          <a:p>
+            <a:pPr algn="ctr"/>
+          </a:p>
+        </p:txBody>
+      </p:sp>
+      <p:sp>
+        <p:nvSpPr>
+          <p:cNvPr id="14" name="TextBox 13"/>
+          <p:cNvSpPr txBox="1"/>
+          <p:nvPr/>
+        </p:nvSpPr>
+        <p:spPr>
+          <a:xfrm>
+            <a:off x="822960" y="3017520"/>
+            <a:ext cx="475488" cy="201168"/>
+          </a:xfrm>
+          <a:prstGeom prst="rect">
+            <a:avLst/>
+          </a:prstGeom>
+          <a:noFill/>
+        </p:spPr>
+        <p:txBody>
+          <a:bodyPr wrap="square" lIns="27432" rIns="27432" tIns="27432" bIns="27432" anchor="t">
+            <a:spAutoFit/>
+          </a:bodyPr>
+          <a:lstStyle/>
+          <a:p>
+            <a:pPr algn="ctr">
+              <a:defRPr sz="1200" b="1">
+                <a:solidFill>
+                  <a:srgbClr val="09111F"/>
+                </a:solidFill>
+                <a:latin typeface="Noto Sans CJK SC"/>
+              </a:defRPr>
+            </a:pPr>
+            <a:r>
+              <a:t>B</a:t>
+            </a:r>
+          </a:p>
+        </p:txBody>
+      </p:sp>
+      <p:sp>
+        <p:nvSpPr>
+          <p:cNvPr id="15" name="Rounded Rectangle 14"/>
+          <p:cNvSpPr/>
+          <p:nvPr/>
+        </p:nvSpPr>
+        <p:spPr>
+          <a:xfrm>
+            <a:off x="1508760" y="2880360"/>
+            <a:ext cx="5074920" cy="640080"/>
+          </a:xfrm>
+          <a:prstGeom prst="roundRect">
+            <a:avLst/>
+          </a:prstGeom>
+          <a:solidFill>
+            <a:srgbClr val="111D30"/>
+          </a:solidFill>
+          <a:ln w="12700">
+            <a:solidFill>
+              <a:srgbClr val="F4C75B"/>
+            </a:solidFill>
+          </a:ln>
+        </p:spPr>
+        <p:style>
+          <a:lnRef idx="1">
+            <a:schemeClr val="accent1"/>
+          </a:lnRef>
+          <a:fillRef idx="3">
+            <a:schemeClr val="accent1"/>
+          </a:fillRef>
+          <a:effectRef idx="2">
+            <a:schemeClr val="accent1"/>
+          </a:effectRef>
+          <a:fontRef idx="minor">
+            <a:schemeClr val="lt1"/>
+          </a:fontRef>
+        </p:style>
+        <p:txBody>
+          <a:bodyPr rtlCol="0" anchor="ctr"/>
+          <a:lstStyle/>
+          <a:p>
+            <a:pPr algn="ctr"/>
+          </a:p>
+        </p:txBody>
+      </p:sp>
+      <p:sp>
+        <p:nvSpPr>
+          <p:cNvPr id="16" name="TextBox 15"/>
+          <p:cNvSpPr txBox="1"/>
+          <p:nvPr/>
+        </p:nvSpPr>
+        <p:spPr>
+          <a:xfrm>
+            <a:off x="1691640" y="3035808"/>
+            <a:ext cx="1645920" cy="256032"/>
+          </a:xfrm>
+          <a:prstGeom prst="rect">
+            <a:avLst/>
+          </a:prstGeom>
+          <a:noFill/>
+        </p:spPr>
+        <p:txBody>
+          <a:bodyPr wrap="square" lIns="27432" rIns="27432" tIns="27432" bIns="27432" anchor="t">
+            <a:spAutoFit/>
+          </a:bodyPr>
+          <a:lstStyle/>
+          <a:p>
+            <a:pPr algn="l">
+              <a:defRPr sz="1400" b="1">
+                <a:solidFill>
+                  <a:srgbClr val="F4C75B"/>
+                </a:solidFill>
+                <a:latin typeface="Noto Sans CJK SC"/>
+              </a:defRPr>
+            </a:pPr>
+            <a:r>
+              <a:t>ThunderAgent 风格</a:t>
+            </a:r>
+          </a:p>
+        </p:txBody>
+      </p:sp>
+      <p:sp>
+        <p:nvSpPr>
+          <p:cNvPr id="17" name="TextBox 16"/>
+          <p:cNvSpPr txBox="1"/>
+          <p:nvPr/>
+        </p:nvSpPr>
+        <p:spPr>
+          <a:xfrm>
+            <a:off x="3291840" y="3035808"/>
+            <a:ext cx="3063240" cy="274320"/>
+          </a:xfrm>
+          <a:prstGeom prst="rect">
+            <a:avLst/>
+          </a:prstGeom>
+          <a:noFill/>
+        </p:spPr>
+        <p:txBody>
+          <a:bodyPr wrap="square" lIns="27432" rIns="27432" tIns="27432" bIns="27432" anchor="t">
+            <a:spAutoFit/>
+          </a:bodyPr>
+          <a:lstStyle/>
+          <a:p>
+            <a:pPr algn="l">
+              <a:defRPr sz="1220" b="0">
+                <a:solidFill>
+                  <a:srgbClr val="A7B6CA"/>
+                </a:solidFill>
+                <a:latin typeface="Noto Sans CJK SC"/>
+              </a:defRPr>
+            </a:pPr>
+            <a:r>
+              <a:t>再加：工具已运行多久、GPU 状态位置</a:t>
+            </a:r>
+          </a:p>
+        </p:txBody>
+      </p:sp>
+      <p:sp>
+        <p:nvSpPr>
+          <p:cNvPr id="18" name="Right Arrow 17"/>
+          <p:cNvSpPr/>
+          <p:nvPr/>
+        </p:nvSpPr>
+        <p:spPr>
+          <a:xfrm>
+            <a:off x="969264" y="3630168"/>
+            <a:ext cx="164592" cy="182880"/>
+          </a:xfrm>
+          <a:prstGeom prst="rightArrow">
+            <a:avLst/>
+          </a:prstGeom>
+          <a:solidFill>
+            <a:srgbClr val="677990"/>
+          </a:solidFill>
+          <a:ln>
+            <a:solidFill>
+              <a:srgbClr val="677990"/>
+            </a:solidFill>
+          </a:ln>
+        </p:spPr>
+        <p:style>
+          <a:lnRef idx="1">
+            <a:schemeClr val="accent1"/>
+          </a:lnRef>
+          <a:fillRef idx="3">
+            <a:schemeClr val="accent1"/>
+          </a:fillRef>
+          <a:effectRef idx="2">
+            <a:schemeClr val="accent1"/>
+          </a:effectRef>
+          <a:fontRef idx="minor">
+            <a:schemeClr val="lt1"/>
+          </a:fontRef>
+        </p:style>
+        <p:txBody>
+          <a:bodyPr rtlCol="0" anchor="ctr"/>
+          <a:lstStyle/>
+          <a:p>
+            <a:pPr algn="ctr"/>
+          </a:p>
+        </p:txBody>
+      </p:sp>
+      <p:sp>
+        <p:nvSpPr>
+          <p:cNvPr id="19" name="Oval 18"/>
+          <p:cNvSpPr/>
+          <p:nvPr/>
+        </p:nvSpPr>
+        <p:spPr>
+          <a:xfrm>
+            <a:off x="822960" y="3931920"/>
+            <a:ext cx="475488" cy="475488"/>
+          </a:xfrm>
+          <a:prstGeom prst="ellipse">
+            <a:avLst/>
+          </a:prstGeom>
+          <a:solidFill>
+            <a:srgbClr val="32D5C4"/>
+          </a:solidFill>
+          <a:ln>
+            <a:solidFill>
+              <a:srgbClr val="32D5C4"/>
+            </a:solidFill>
+          </a:ln>
+        </p:spPr>
+        <p:style>
+          <a:lnRef idx="1">
+            <a:schemeClr val="accent1"/>
+          </a:lnRef>
+          <a:fillRef idx="3">
+            <a:schemeClr val="accent1"/>
+          </a:fillRef>
+          <a:effectRef idx="2">
+            <a:schemeClr val="accent1"/>
+          </a:effectRef>
+          <a:fontRef idx="minor">
+            <a:schemeClr val="lt1"/>
+          </a:fontRef>
+        </p:style>
+        <p:txBody>
+          <a:bodyPr rtlCol="0" anchor="ctr"/>
+          <a:lstStyle/>
+          <a:p>
+            <a:pPr algn="ctr"/>
+          </a:p>
+        </p:txBody>
+      </p:sp>
+      <p:sp>
+        <p:nvSpPr>
+          <p:cNvPr id="20" name="TextBox 19"/>
+          <p:cNvSpPr txBox="1"/>
+          <p:nvPr/>
+        </p:nvSpPr>
+        <p:spPr>
+          <a:xfrm>
+            <a:off x="822960" y="4023360"/>
+            <a:ext cx="475488" cy="201168"/>
+          </a:xfrm>
+          <a:prstGeom prst="rect">
+            <a:avLst/>
+          </a:prstGeom>
+          <a:noFill/>
+        </p:spPr>
+        <p:txBody>
+          <a:bodyPr wrap="square" lIns="27432" rIns="27432" tIns="27432" bIns="27432" anchor="t">
+            <a:spAutoFit/>
+          </a:bodyPr>
+          <a:lstStyle/>
+          <a:p>
+            <a:pPr algn="ctr">
+              <a:defRPr sz="1200" b="1">
+                <a:solidFill>
+                  <a:srgbClr val="09111F"/>
+                </a:solidFill>
+                <a:latin typeface="Noto Sans CJK SC"/>
+              </a:defRPr>
+            </a:pPr>
+            <a:r>
+              <a:t>C</a:t>
+            </a:r>
+          </a:p>
+        </p:txBody>
+      </p:sp>
+      <p:sp>
+        <p:nvSpPr>
+          <p:cNvPr id="21" name="Rounded Rectangle 20"/>
+          <p:cNvSpPr/>
+          <p:nvPr/>
+        </p:nvSpPr>
+        <p:spPr>
+          <a:xfrm>
+            <a:off x="1508760" y="3886200"/>
+            <a:ext cx="5074920" cy="640080"/>
+          </a:xfrm>
+          <a:prstGeom prst="roundRect">
+            <a:avLst/>
+          </a:prstGeom>
+          <a:solidFill>
+            <a:srgbClr val="111D30"/>
+          </a:solidFill>
+          <a:ln w="12700">
+            <a:solidFill>
+              <a:srgbClr val="32D5C4"/>
+            </a:solidFill>
+          </a:ln>
+        </p:spPr>
+        <p:style>
+          <a:lnRef idx="1">
+            <a:schemeClr val="accent1"/>
+          </a:lnRef>
+          <a:fillRef idx="3">
+            <a:schemeClr val="accent1"/>
+          </a:fillRef>
+          <a:effectRef idx="2">
+            <a:schemeClr val="accent1"/>
+          </a:effectRef>
+          <a:fontRef idx="minor">
+            <a:schemeClr val="lt1"/>
+          </a:fontRef>
+        </p:style>
+        <p:txBody>
+          <a:bodyPr rtlCol="0" anchor="ctr"/>
+          <a:lstStyle/>
+          <a:p>
+            <a:pPr algn="ctr"/>
+          </a:p>
+        </p:txBody>
+      </p:sp>
+      <p:sp>
+        <p:nvSpPr>
+          <p:cNvPr id="22" name="TextBox 21"/>
+          <p:cNvSpPr txBox="1"/>
+          <p:nvPr/>
+        </p:nvSpPr>
+        <p:spPr>
+          <a:xfrm>
+            <a:off x="1691640" y="4041648"/>
+            <a:ext cx="1645920" cy="256032"/>
+          </a:xfrm>
+          <a:prstGeom prst="rect">
+            <a:avLst/>
+          </a:prstGeom>
+          <a:noFill/>
+        </p:spPr>
+        <p:txBody>
+          <a:bodyPr wrap="square" lIns="27432" rIns="27432" tIns="27432" bIns="27432" anchor="t">
+            <a:spAutoFit/>
+          </a:bodyPr>
+          <a:lstStyle/>
+          <a:p>
+            <a:pPr algn="l">
+              <a:defRPr sz="1400" b="1">
+                <a:solidFill>
+                  <a:srgbClr val="32D5C4"/>
+                </a:solidFill>
+                <a:latin typeface="Noto Sans CJK SC"/>
+              </a:defRPr>
+            </a:pPr>
+            <a:r>
+              <a:t>工具内部状态</a:t>
+            </a:r>
+          </a:p>
+        </p:txBody>
+      </p:sp>
+      <p:sp>
+        <p:nvSpPr>
+          <p:cNvPr id="23" name="TextBox 22"/>
+          <p:cNvSpPr txBox="1"/>
+          <p:nvPr/>
+        </p:nvSpPr>
+        <p:spPr>
+          <a:xfrm>
+            <a:off x="3291840" y="4041648"/>
+            <a:ext cx="3063240" cy="274320"/>
+          </a:xfrm>
+          <a:prstGeom prst="rect">
+            <a:avLst/>
+          </a:prstGeom>
+          <a:noFill/>
+        </p:spPr>
+        <p:txBody>
+          <a:bodyPr wrap="square" lIns="27432" rIns="27432" tIns="27432" bIns="27432" anchor="t">
+            <a:spAutoFit/>
+          </a:bodyPr>
+          <a:lstStyle/>
+          <a:p>
+            <a:pPr algn="l">
+              <a:defRPr sz="1220" b="0">
+                <a:solidFill>
+                  <a:srgbClr val="A7B6CA"/>
+                </a:solidFill>
+                <a:latin typeface="Noto Sans CJK SC"/>
+              </a:defRPr>
+            </a:pPr>
+            <a:r>
+              <a:t>再加：子命令进度与 CPU/内存/读写反馈</a:t>
+            </a:r>
+          </a:p>
+        </p:txBody>
+      </p:sp>
+      <p:sp>
+        <p:nvSpPr>
+          <p:cNvPr id="24" name="Rounded Rectangle 23"/>
+          <p:cNvSpPr/>
+          <p:nvPr/>
+        </p:nvSpPr>
+        <p:spPr>
+          <a:xfrm>
+            <a:off x="7059168" y="1417320"/>
+            <a:ext cx="4069080" cy="1280160"/>
+          </a:xfrm>
+          <a:prstGeom prst="roundRect">
+            <a:avLst/>
+          </a:prstGeom>
+          <a:solidFill>
+            <a:srgbClr val="111D30"/>
+          </a:solidFill>
+          <a:ln w="12700">
+            <a:solidFill>
+              <a:srgbClr val="17263D"/>
+            </a:solidFill>
+          </a:ln>
+        </p:spPr>
+        <p:style>
+          <a:lnRef idx="1">
+            <a:schemeClr val="accent1"/>
+          </a:lnRef>
+          <a:fillRef idx="3">
+            <a:schemeClr val="accent1"/>
+          </a:fillRef>
+          <a:effectRef idx="2">
+            <a:schemeClr val="accent1"/>
+          </a:effectRef>
+          <a:fontRef idx="minor">
+            <a:schemeClr val="lt1"/>
+          </a:fontRef>
+        </p:style>
+        <p:txBody>
+          <a:bodyPr rtlCol="0" anchor="ctr"/>
+          <a:lstStyle/>
+          <a:p>
+            <a:pPr algn="ctr"/>
+          </a:p>
+        </p:txBody>
+      </p:sp>
+      <p:cxnSp>
+        <p:nvCxnSpPr>
+          <p:cNvPr id="25" name="Connector 24"/>
+          <p:cNvCxnSpPr/>
+          <p:nvPr/>
+        </p:nvCxnSpPr>
+        <p:spPr>
+          <a:xfrm>
+            <a:off x="7196328" y="1581912"/>
+            <a:ext cx="0" cy="950976"/>
+          </a:xfrm>
+          <a:prstGeom prst="line">
+            <a:avLst/>
+          </a:prstGeom>
+          <a:ln w="44450">
+            <a:solidFill>
+              <a:srgbClr val="40D39C"/>
+            </a:solidFill>
+          </a:ln>
+        </p:spPr>
+        <p:style>
+          <a:lnRef idx="2">
+            <a:schemeClr val="accent1"/>
+          </a:lnRef>
+          <a:fillRef idx="0">
+            <a:schemeClr val="accent1"/>
+          </a:fillRef>
+          <a:effectRef idx="1">
+            <a:schemeClr val="accent1"/>
+          </a:effectRef>
+          <a:fontRef idx="minor">
+            <a:schemeClr val="tx1"/>
+          </a:fontRef>
+        </p:style>
+      </p:cxnSp>
+      <p:sp>
+        <p:nvSpPr>
+          <p:cNvPr id="26" name="TextBox 25"/>
+          <p:cNvSpPr txBox="1"/>
+          <p:nvPr/>
+        </p:nvSpPr>
+        <p:spPr>
+          <a:xfrm>
+            <a:off x="7370064" y="1563624"/>
+            <a:ext cx="3611880" cy="384048"/>
+          </a:xfrm>
+          <a:prstGeom prst="rect">
+            <a:avLst/>
+          </a:prstGeom>
+          <a:noFill/>
+        </p:spPr>
+        <p:txBody>
+          <a:bodyPr wrap="square" lIns="27432" rIns="27432" tIns="27432" bIns="27432" anchor="t">
+            <a:spAutoFit/>
+          </a:bodyPr>
+          <a:lstStyle/>
+          <a:p>
+            <a:pPr algn="l">
+              <a:defRPr sz="1500" b="1">
+                <a:solidFill>
+                  <a:srgbClr val="40D39C"/>
+                </a:solidFill>
+                <a:latin typeface="Noto Sans CJK SC"/>
+              </a:defRPr>
+            </a:pPr>
+            <a:r>
+              <a:t>先在现有 trace 上做</a:t>
+            </a:r>
+          </a:p>
+        </p:txBody>
+      </p:sp>
+      <p:sp>
+        <p:nvSpPr>
+          <p:cNvPr id="27" name="TextBox 26"/>
+          <p:cNvSpPr txBox="1"/>
+          <p:nvPr/>
+        </p:nvSpPr>
+        <p:spPr>
+          <a:xfrm>
+            <a:off x="7370064" y="2011680"/>
+            <a:ext cx="3611880" cy="566927"/>
+          </a:xfrm>
+          <a:prstGeom prst="rect">
+            <a:avLst/>
+          </a:prstGeom>
+          <a:noFill/>
+        </p:spPr>
+        <p:txBody>
+          <a:bodyPr wrap="square" lIns="27432" rIns="27432" tIns="27432" bIns="27432" anchor="t">
+            <a:spAutoFit/>
+          </a:bodyPr>
+          <a:lstStyle/>
+          <a:p>
+            <a:pPr algn="l">
+              <a:defRPr sz="1320" b="0">
+                <a:solidFill>
+                  <a:srgbClr val="A7B6CA"/>
+                </a:solidFill>
+                <a:latin typeface="Noto Sans CJK SC"/>
+              </a:defRPr>
+            </a:pPr>
+            <a:r>
+              <a:t>问 C 是否比 B 改变了借入、返回保护或 KV 保留决策；不需要 GPU。</a:t>
+            </a:r>
+          </a:p>
+        </p:txBody>
+      </p:sp>
+      <p:sp>
+        <p:nvSpPr>
+          <p:cNvPr id="28" name="Rounded Rectangle 27"/>
+          <p:cNvSpPr/>
+          <p:nvPr/>
+        </p:nvSpPr>
+        <p:spPr>
+          <a:xfrm>
+            <a:off x="7059168" y="2907792"/>
+            <a:ext cx="4069080" cy="1280160"/>
+          </a:xfrm>
+          <a:prstGeom prst="roundRect">
+            <a:avLst/>
+          </a:prstGeom>
+          <a:solidFill>
+            <a:srgbClr val="111D30"/>
+          </a:solidFill>
+          <a:ln w="12700">
+            <a:solidFill>
+              <a:srgbClr val="17263D"/>
+            </a:solidFill>
+          </a:ln>
+        </p:spPr>
+        <p:style>
+          <a:lnRef idx="1">
+            <a:schemeClr val="accent1"/>
+          </a:lnRef>
+          <a:fillRef idx="3">
+            <a:schemeClr val="accent1"/>
+          </a:fillRef>
+          <a:effectRef idx="2">
+            <a:schemeClr val="accent1"/>
+          </a:effectRef>
+          <a:fontRef idx="minor">
+            <a:schemeClr val="lt1"/>
+          </a:fontRef>
+        </p:style>
+        <p:txBody>
+          <a:bodyPr rtlCol="0" anchor="ctr"/>
+          <a:lstStyle/>
+          <a:p>
+            <a:pPr algn="ctr"/>
+          </a:p>
+        </p:txBody>
+      </p:sp>
+      <p:cxnSp>
+        <p:nvCxnSpPr>
+          <p:cNvPr id="29" name="Connector 28"/>
+          <p:cNvCxnSpPr/>
+          <p:nvPr/>
+        </p:nvCxnSpPr>
+        <p:spPr>
+          <a:xfrm>
+            <a:off x="7196328" y="3072384"/>
+            <a:ext cx="0" cy="950976"/>
+          </a:xfrm>
+          <a:prstGeom prst="line">
+            <a:avLst/>
+          </a:prstGeom>
+          <a:ln w="44450">
+            <a:solidFill>
+              <a:srgbClr val="F4C75B"/>
+            </a:solidFill>
+          </a:ln>
+        </p:spPr>
+        <p:style>
+          <a:lnRef idx="2">
+            <a:schemeClr val="accent1"/>
+          </a:lnRef>
+          <a:fillRef idx="0">
+            <a:schemeClr val="accent1"/>
+          </a:fillRef>
+          <a:effectRef idx="1">
+            <a:schemeClr val="accent1"/>
+          </a:effectRef>
+          <a:fontRef idx="minor">
+            <a:schemeClr val="tx1"/>
+          </a:fontRef>
+        </p:style>
+      </p:cxnSp>
+      <p:sp>
+        <p:nvSpPr>
+          <p:cNvPr id="30" name="TextBox 29"/>
+          <p:cNvSpPr txBox="1"/>
+          <p:nvPr/>
+        </p:nvSpPr>
+        <p:spPr>
+          <a:xfrm>
+            <a:off x="7370064" y="3054096"/>
+            <a:ext cx="3611880" cy="384048"/>
+          </a:xfrm>
+          <a:prstGeom prst="rect">
+            <a:avLst/>
+          </a:prstGeom>
+          <a:noFill/>
+        </p:spPr>
+        <p:txBody>
+          <a:bodyPr wrap="square" lIns="27432" rIns="27432" tIns="27432" bIns="27432" anchor="t">
+            <a:spAutoFit/>
+          </a:bodyPr>
+          <a:lstStyle/>
+          <a:p>
+            <a:pPr algn="l">
+              <a:defRPr sz="1500" b="1">
+                <a:solidFill>
+                  <a:srgbClr val="F4C75B"/>
+                </a:solidFill>
+                <a:latin typeface="Noto Sans CJK SC"/>
+              </a:defRPr>
+            </a:pPr>
+            <a:r>
+              <a:t>只有过门槛才上实机</a:t>
+            </a:r>
+          </a:p>
+        </p:txBody>
+      </p:sp>
+      <p:sp>
+        <p:nvSpPr>
+          <p:cNvPr id="31" name="TextBox 30"/>
+          <p:cNvSpPr txBox="1"/>
+          <p:nvPr/>
+        </p:nvSpPr>
+        <p:spPr>
+          <a:xfrm>
+            <a:off x="7370064" y="3502152"/>
+            <a:ext cx="3611880" cy="566927"/>
+          </a:xfrm>
+          <a:prstGeom prst="rect">
+            <a:avLst/>
+          </a:prstGeom>
+          <a:noFill/>
+        </p:spPr>
+        <p:txBody>
+          <a:bodyPr wrap="square" lIns="27432" rIns="27432" tIns="27432" bIns="27432" anchor="t">
+            <a:spAutoFit/>
+          </a:bodyPr>
+          <a:lstStyle/>
+          <a:p>
+            <a:pPr algn="l">
+              <a:defRPr sz="1320" b="0">
+                <a:solidFill>
+                  <a:srgbClr val="A7B6CA"/>
+                </a:solidFill>
+                <a:latin typeface="Noto Sans CJK SC"/>
+              </a:defRPr>
+            </a:pPr>
+            <a:r>
+              <a:t>至少改变足够多独立任务的动作，并在 trace 回放中同时改善完成时间与返回重叠。</a:t>
+            </a:r>
+          </a:p>
+        </p:txBody>
+      </p:sp>
+      <p:sp>
+        <p:nvSpPr>
+          <p:cNvPr id="32" name="Rounded Rectangle 31"/>
+          <p:cNvSpPr/>
+          <p:nvPr/>
+        </p:nvSpPr>
+        <p:spPr>
+          <a:xfrm>
+            <a:off x="7059168" y="4398264"/>
+            <a:ext cx="4069080" cy="1005840"/>
+          </a:xfrm>
+          <a:prstGeom prst="roundRect">
+            <a:avLst/>
+          </a:prstGeom>
+          <a:solidFill>
+            <a:srgbClr val="111D30"/>
+          </a:solidFill>
+          <a:ln w="12700">
+            <a:solidFill>
+              <a:srgbClr val="17263D"/>
+            </a:solidFill>
+          </a:ln>
+        </p:spPr>
+        <p:style>
+          <a:lnRef idx="1">
+            <a:schemeClr val="accent1"/>
+          </a:lnRef>
+          <a:fillRef idx="3">
+            <a:schemeClr val="accent1"/>
+          </a:fillRef>
+          <a:effectRef idx="2">
+            <a:schemeClr val="accent1"/>
+          </a:effectRef>
+          <a:fontRef idx="minor">
+            <a:schemeClr val="lt1"/>
+          </a:fontRef>
+        </p:style>
+        <p:txBody>
+          <a:bodyPr rtlCol="0" anchor="ctr"/>
+          <a:lstStyle/>
+          <a:p>
+            <a:pPr algn="ctr"/>
+          </a:p>
+        </p:txBody>
+      </p:sp>
+      <p:cxnSp>
+        <p:nvCxnSpPr>
+          <p:cNvPr id="33" name="Connector 32"/>
+          <p:cNvCxnSpPr/>
+          <p:nvPr/>
+        </p:nvCxnSpPr>
+        <p:spPr>
+          <a:xfrm>
+            <a:off x="7196328" y="4562855"/>
+            <a:ext cx="0" cy="676657"/>
+          </a:xfrm>
+          <a:prstGeom prst="line">
+            <a:avLst/>
+          </a:prstGeom>
+          <a:ln w="44450">
+            <a:solidFill>
+              <a:srgbClr val="B69BFF"/>
+            </a:solidFill>
+          </a:ln>
+        </p:spPr>
+        <p:style>
+          <a:lnRef idx="2">
+            <a:schemeClr val="accent1"/>
+          </a:lnRef>
+          <a:fillRef idx="0">
+            <a:schemeClr val="accent1"/>
+          </a:fillRef>
+          <a:effectRef idx="1">
+            <a:schemeClr val="accent1"/>
+          </a:effectRef>
+          <a:fontRef idx="minor">
+            <a:schemeClr val="tx1"/>
+          </a:fontRef>
+        </p:style>
+      </p:cxnSp>
+      <p:sp>
+        <p:nvSpPr>
+          <p:cNvPr id="34" name="TextBox 33"/>
+          <p:cNvSpPr txBox="1"/>
+          <p:nvPr/>
+        </p:nvSpPr>
+        <p:spPr>
+          <a:xfrm>
+            <a:off x="7370064" y="4544568"/>
+            <a:ext cx="3611880" cy="384048"/>
+          </a:xfrm>
+          <a:prstGeom prst="rect">
+            <a:avLst/>
+          </a:prstGeom>
+          <a:noFill/>
+        </p:spPr>
+        <p:txBody>
+          <a:bodyPr wrap="square" lIns="27432" rIns="27432" tIns="27432" bIns="27432" anchor="t">
+            <a:spAutoFit/>
+          </a:bodyPr>
+          <a:lstStyle/>
+          <a:p>
+            <a:pPr algn="l">
+              <a:defRPr sz="1500" b="1">
+                <a:solidFill>
+                  <a:srgbClr val="B69BFF"/>
+                </a:solidFill>
+                <a:latin typeface="Noto Sans CJK SC"/>
+              </a:defRPr>
+            </a:pPr>
+            <a:r>
+              <a:t>实机对照不能缺</a:t>
+            </a:r>
+          </a:p>
+        </p:txBody>
+      </p:sp>
+      <p:sp>
+        <p:nvSpPr>
+          <p:cNvPr id="35" name="TextBox 34"/>
+          <p:cNvSpPr txBox="1"/>
+          <p:nvPr/>
+        </p:nvSpPr>
+        <p:spPr>
+          <a:xfrm>
+            <a:off x="7370064" y="4992624"/>
+            <a:ext cx="3611880" cy="292608"/>
+          </a:xfrm>
+          <a:prstGeom prst="rect">
+            <a:avLst/>
+          </a:prstGeom>
+          <a:noFill/>
+        </p:spPr>
+        <p:txBody>
+          <a:bodyPr wrap="square" lIns="27432" rIns="27432" tIns="27432" bIns="27432" anchor="t">
+            <a:spAutoFit/>
+          </a:bodyPr>
+          <a:lstStyle/>
+          <a:p>
+            <a:pPr algn="l">
+              <a:defRPr sz="1250" b="0">
+                <a:solidFill>
+                  <a:srgbClr val="A7B6CA"/>
+                </a:solidFill>
+                <a:latin typeface="Noto Sans CJK SC"/>
+              </a:defRPr>
+            </a:pPr>
+            <a:r>
+              <a:t>Continuum 式保留期限、ThunderAgent 式时间衰减、Agentix 式到达后优先级。</a:t>
+            </a:r>
+          </a:p>
+        </p:txBody>
+      </p:sp>
+      <p:sp>
+        <p:nvSpPr>
+          <p:cNvPr id="36" name="Rounded Rectangle 35"/>
+          <p:cNvSpPr/>
+          <p:nvPr/>
+        </p:nvSpPr>
+        <p:spPr>
+          <a:xfrm>
+            <a:off x="658368" y="5733288"/>
+            <a:ext cx="10881360" cy="530352"/>
+          </a:xfrm>
+          <a:prstGeom prst="roundRect">
+            <a:avLst/>
+          </a:prstGeom>
+          <a:solidFill>
+            <a:srgbClr val="17263D"/>
+          </a:solidFill>
+          <a:ln w="12700">
+            <a:solidFill>
+              <a:srgbClr val="F4C75B"/>
+            </a:solidFill>
+          </a:ln>
+        </p:spPr>
+        <p:style>
+          <a:lnRef idx="1">
+            <a:schemeClr val="accent1"/>
+          </a:lnRef>
+          <a:fillRef idx="3">
+            <a:schemeClr val="accent1"/>
+          </a:fillRef>
+          <a:effectRef idx="2">
+            <a:schemeClr val="accent1"/>
+          </a:effectRef>
+          <a:fontRef idx="minor">
+            <a:schemeClr val="lt1"/>
+          </a:fontRef>
+        </p:style>
+        <p:txBody>
+          <a:bodyPr rtlCol="0" anchor="ctr"/>
+          <a:lstStyle/>
+          <a:p>
+            <a:pPr algn="ctr"/>
+          </a:p>
+        </p:txBody>
+      </p:sp>
+      <p:sp>
+        <p:nvSpPr>
+          <p:cNvPr id="37" name="TextBox 36"/>
+          <p:cNvSpPr txBox="1"/>
+          <p:nvPr/>
+        </p:nvSpPr>
+        <p:spPr>
+          <a:xfrm>
+            <a:off x="841248" y="5879592"/>
+            <a:ext cx="1325880" cy="201168"/>
+          </a:xfrm>
+          <a:prstGeom prst="rect">
+            <a:avLst/>
+          </a:prstGeom>
+          <a:noFill/>
+        </p:spPr>
+        <p:txBody>
+          <a:bodyPr wrap="square" lIns="27432" rIns="27432" tIns="27432" bIns="27432" anchor="t">
+            <a:spAutoFit/>
+          </a:bodyPr>
+          <a:lstStyle/>
+          <a:p>
+            <a:pPr algn="l">
+              <a:defRPr sz="1050" b="1">
+                <a:solidFill>
+                  <a:srgbClr val="F4C75B"/>
+                </a:solidFill>
+                <a:latin typeface="Noto Sans CJK SC"/>
+              </a:defRPr>
+            </a:pPr>
+            <a:r>
+              <a:t>这一阶段学到</a:t>
+            </a:r>
+          </a:p>
+        </p:txBody>
+      </p:sp>
+      <p:sp>
+        <p:nvSpPr>
+          <p:cNvPr id="38" name="TextBox 37"/>
+          <p:cNvSpPr txBox="1"/>
+          <p:nvPr/>
+        </p:nvSpPr>
+        <p:spPr>
+          <a:xfrm>
+            <a:off x="2066543" y="5833872"/>
+            <a:ext cx="9144000" cy="274320"/>
+          </a:xfrm>
+          <a:prstGeom prst="rect">
+            <a:avLst/>
+          </a:prstGeom>
+          <a:noFill/>
+        </p:spPr>
+        <p:txBody>
+          <a:bodyPr wrap="square" lIns="27432" rIns="27432" tIns="27432" bIns="27432" anchor="t">
+            <a:spAutoFit/>
+          </a:bodyPr>
+          <a:lstStyle/>
+          <a:p>
+            <a:pPr algn="l">
+              <a:defRPr sz="1420" b="1">
+                <a:solidFill>
+                  <a:srgbClr val="F4F7FB"/>
+                </a:solidFill>
+                <a:latin typeface="Noto Sans CJK SC"/>
+              </a:defRPr>
+            </a:pPr>
+            <a:r>
+              <a:t>贡献不是“我们看得更细”，而是这份细粒度状态在相同成本下改变了更好的动作。</a:t>
+            </a:r>
+          </a:p>
+        </p:txBody>
+      </p:sp>
+      <p:cxnSp>
+        <p:nvCxnSpPr>
+          <p:cNvPr id="39" name="Connector 38"/>
+          <p:cNvCxnSpPr/>
+          <p:nvPr/>
+        </p:nvCxnSpPr>
+        <p:spPr>
+          <a:xfrm>
+            <a:off x="566928" y="6455664"/>
+            <a:ext cx="11064240" cy="0"/>
+          </a:xfrm>
+          <a:prstGeom prst="line">
+            <a:avLst/>
+          </a:prstGeom>
+          <a:ln w="10160">
+            <a:solidFill>
+              <a:srgbClr val="17263D"/>
+            </a:solidFill>
+          </a:ln>
+        </p:spPr>
+        <p:style>
+          <a:lnRef idx="2">
+            <a:schemeClr val="accent1"/>
+          </a:lnRef>
+          <a:fillRef idx="0">
+            <a:schemeClr val="accent1"/>
+          </a:fillRef>
+          <a:effectRef idx="1">
+            <a:schemeClr val="accent1"/>
+          </a:effectRef>
+          <a:fontRef idx="minor">
+            <a:schemeClr val="tx1"/>
+          </a:fontRef>
+        </p:style>
+      </p:cxnSp>
+      <p:sp>
+        <p:nvSpPr>
+          <p:cNvPr id="40" name="TextBox 39"/>
+          <p:cNvSpPr txBox="1"/>
+          <p:nvPr/>
+        </p:nvSpPr>
+        <p:spPr>
+          <a:xfrm>
+            <a:off x="566928" y="6492240"/>
+            <a:ext cx="10972800" cy="182880"/>
+          </a:xfrm>
+          <a:prstGeom prst="rect">
+            <a:avLst/>
+          </a:prstGeom>
+          <a:noFill/>
+        </p:spPr>
+        <p:txBody>
+          <a:bodyPr wrap="square" lIns="27432" rIns="27432" tIns="27432" bIns="27432" anchor="t">
+            <a:spAutoFit/>
+          </a:bodyPr>
+          <a:lstStyle/>
+          <a:p>
+            <a:pPr algn="l">
+              <a:defRPr sz="780" b="0">
+                <a:solidFill>
+                  <a:srgbClr val="677990"/>
+                </a:solidFill>
+                <a:latin typeface="Noto Sans CJK SC"/>
+              </a:defRPr>
+            </a:pPr>
+            <a:r>
+              <a:t>下一步需冻结 cohort、动作、成本和 GO/STOP 标准后再读结果；不启动新的昂贵实验</a:t>
+            </a:r>
+          </a:p>
+        </p:txBody>
+      </p:sp>
+    </p:spTree>
+  </p:cSld>
+  <p:clrMapOvr>
+    <a:masterClrMapping/>
+  </p:clrMapOvr>
+</p:sld>
+</file>
+
+<file path=ppt/slides/slide18.xml><?xml version="1.0" encoding="utf-8"?>
+<p:sld xmlns:a="http://schemas.openxmlformats.org/drawingml/2006/main" xmlns:p="http://schemas.openxmlformats.org/presentationml/2006/main" xmlns:r="http://schemas.openxmlformats.org/officeDocument/2006/relationships">
+  <p:cSld>
+    <p:bg>
+      <p:bgPr>
+        <a:solidFill>
+          <a:srgbClr val="09111F"/>
+        </a:solidFill>
+        <a:effectLst/>
+      </p:bgPr>
+    </p:bg>
+    <p:spTree>
+      <p:nvGrpSpPr>
+        <p:cNvPr id="1" name=""/>
+        <p:cNvGrpSpPr/>
+        <p:nvPr/>
+      </p:nvGrpSpPr>
+      <p:grpSpPr/>
+      <p:sp>
+        <p:nvSpPr>
+          <p:cNvPr id="2" name="TextBox 1"/>
+          <p:cNvSpPr txBox="1"/>
+          <p:nvPr/>
+        </p:nvSpPr>
+        <p:spPr>
+          <a:xfrm>
+            <a:off x="566928" y="201168"/>
+            <a:ext cx="6400800" cy="219456"/>
+          </a:xfrm>
+          <a:prstGeom prst="rect">
+            <a:avLst/>
+          </a:prstGeom>
+          <a:noFill/>
+        </p:spPr>
+        <p:txBody>
+          <a:bodyPr wrap="square" lIns="27432" rIns="27432" tIns="27432" bIns="27432" anchor="t">
+            <a:spAutoFit/>
+          </a:bodyPr>
+          <a:lstStyle/>
+          <a:p>
+            <a:pPr algn="l">
+              <a:defRPr sz="950" b="1">
+                <a:solidFill>
+                  <a:srgbClr val="32D5C4"/>
+                </a:solidFill>
+                <a:latin typeface="Noto Sans CJK SC"/>
+              </a:defRPr>
+            </a:pPr>
+            <a:r>
+              <a:t>从预测到系统效果</a:t>
+            </a:r>
+          </a:p>
+        </p:txBody>
+      </p:sp>
+      <p:sp>
+        <p:nvSpPr>
+          <p:cNvPr id="3" name="TextBox 2"/>
+          <p:cNvSpPr txBox="1"/>
+          <p:nvPr/>
+        </p:nvSpPr>
+        <p:spPr>
+          <a:xfrm>
+            <a:off x="548640" y="438912"/>
+            <a:ext cx="10972800" cy="603504"/>
+          </a:xfrm>
+          <a:prstGeom prst="rect">
+            <a:avLst/>
+          </a:prstGeom>
+          <a:noFill/>
+        </p:spPr>
+        <p:txBody>
+          <a:bodyPr wrap="square" lIns="27432" rIns="27432" tIns="27432" bIns="27432" anchor="t">
+            <a:spAutoFit/>
+          </a:bodyPr>
+          <a:lstStyle/>
+          <a:p>
+            <a:pPr algn="l">
+              <a:defRPr sz="2600" b="1">
+                <a:solidFill>
+                  <a:srgbClr val="F4F7FB"/>
+                </a:solidFill>
+                <a:latin typeface="Noto Sans CJK SC"/>
+              </a:defRPr>
+            </a:pPr>
+            <a:r>
+              <a:t>如果四个环节都成立，论文故事才完整</a:t>
+            </a:r>
+          </a:p>
+        </p:txBody>
+      </p:sp>
+      <p:cxnSp>
+        <p:nvCxnSpPr>
+          <p:cNvPr id="4" name="Connector 3"/>
+          <p:cNvCxnSpPr/>
+          <p:nvPr/>
+        </p:nvCxnSpPr>
+        <p:spPr>
+          <a:xfrm>
+            <a:off x="566928" y="1051560"/>
+            <a:ext cx="11064240" cy="0"/>
+          </a:xfrm>
+          <a:prstGeom prst="line">
+            <a:avLst/>
+          </a:prstGeom>
+          <a:ln w="12700">
+            <a:solidFill>
+              <a:srgbClr val="17263D"/>
+            </a:solidFill>
+          </a:ln>
+        </p:spPr>
+        <p:style>
+          <a:lnRef idx="2">
+            <a:schemeClr val="accent1"/>
+          </a:lnRef>
+          <a:fillRef idx="0">
+            <a:schemeClr val="accent1"/>
+          </a:fillRef>
+          <a:effectRef idx="1">
+            <a:schemeClr val="accent1"/>
+          </a:effectRef>
+          <a:fontRef idx="minor">
+            <a:schemeClr val="tx1"/>
+          </a:fontRef>
+        </p:style>
+      </p:cxnSp>
+      <p:sp>
+        <p:nvSpPr>
+          <p:cNvPr id="5" name="TextBox 4"/>
+          <p:cNvSpPr txBox="1"/>
+          <p:nvPr/>
+        </p:nvSpPr>
+        <p:spPr>
+          <a:xfrm>
+            <a:off x="11320272" y="201168"/>
+            <a:ext cx="320040" cy="219456"/>
+          </a:xfrm>
+          <a:prstGeom prst="rect">
+            <a:avLst/>
+          </a:prstGeom>
+          <a:noFill/>
+        </p:spPr>
+        <p:txBody>
+          <a:bodyPr wrap="square" lIns="27432" rIns="27432" tIns="27432" bIns="27432" anchor="t">
+            <a:spAutoFit/>
+          </a:bodyPr>
+          <a:lstStyle/>
+          <a:p>
+            <a:pPr algn="r">
+              <a:defRPr sz="950" b="1">
+                <a:solidFill>
+                  <a:srgbClr val="677990"/>
+                </a:solidFill>
+                <a:latin typeface="Noto Sans CJK SC"/>
+              </a:defRPr>
+            </a:pPr>
+            <a:r>
+              <a:t>18</a:t>
+            </a:r>
+          </a:p>
+        </p:txBody>
+      </p:sp>
+      <p:sp>
+        <p:nvSpPr>
+          <p:cNvPr id="6" name="Oval 5"/>
+          <p:cNvSpPr/>
+          <p:nvPr/>
+        </p:nvSpPr>
+        <p:spPr>
+          <a:xfrm>
+            <a:off x="1545336" y="1417320"/>
+            <a:ext cx="621792" cy="621792"/>
+          </a:xfrm>
+          <a:prstGeom prst="ellipse">
+            <a:avLst/>
+          </a:prstGeom>
+          <a:solidFill>
+            <a:srgbClr val="62A8FF"/>
+          </a:solidFill>
+          <a:ln>
+            <a:solidFill>
+              <a:srgbClr val="62A8FF"/>
+            </a:solidFill>
+          </a:ln>
+        </p:spPr>
+        <p:style>
+          <a:lnRef idx="1">
+            <a:schemeClr val="accent1"/>
+          </a:lnRef>
+          <a:fillRef idx="3">
+            <a:schemeClr val="accent1"/>
+          </a:fillRef>
+          <a:effectRef idx="2">
+            <a:schemeClr val="accent1"/>
+          </a:effectRef>
+          <a:fontRef idx="minor">
+            <a:schemeClr val="lt1"/>
+          </a:fontRef>
+        </p:style>
+        <p:txBody>
+          <a:bodyPr rtlCol="0" anchor="ctr"/>
+          <a:lstStyle/>
+          <a:p>
+            <a:pPr algn="ctr"/>
+          </a:p>
+        </p:txBody>
+      </p:sp>
+      <p:sp>
+        <p:nvSpPr>
+          <p:cNvPr id="7" name="TextBox 6"/>
+          <p:cNvSpPr txBox="1"/>
+          <p:nvPr/>
+        </p:nvSpPr>
+        <p:spPr>
+          <a:xfrm>
+            <a:off x="1545336" y="1600200"/>
+            <a:ext cx="621792" cy="219456"/>
+          </a:xfrm>
+          <a:prstGeom prst="rect">
+            <a:avLst/>
+          </a:prstGeom>
+          <a:noFill/>
+        </p:spPr>
+        <p:txBody>
+          <a:bodyPr wrap="square" lIns="27432" rIns="27432" tIns="27432" bIns="27432" anchor="t">
+            <a:spAutoFit/>
+          </a:bodyPr>
+          <a:lstStyle/>
+          <a:p>
+            <a:pPr algn="ctr">
+              <a:defRPr sz="1400" b="1">
+                <a:solidFill>
+                  <a:srgbClr val="09111F"/>
+                </a:solidFill>
+                <a:latin typeface="Noto Sans CJK SC"/>
+              </a:defRPr>
+            </a:pPr>
+            <a:r>
+              <a:t>1</a:t>
+            </a:r>
+          </a:p>
+        </p:txBody>
+      </p:sp>
+      <p:sp>
+        <p:nvSpPr>
+          <p:cNvPr id="8" name="Rounded Rectangle 7"/>
+          <p:cNvSpPr/>
+          <p:nvPr/>
+        </p:nvSpPr>
+        <p:spPr>
+          <a:xfrm>
+            <a:off x="713232" y="2304288"/>
+            <a:ext cx="2304288" cy="1508760"/>
+          </a:xfrm>
+          <a:prstGeom prst="roundRect">
+            <a:avLst/>
+          </a:prstGeom>
+          <a:solidFill>
+            <a:srgbClr val="111D30"/>
+          </a:solidFill>
+          <a:ln w="12700">
+            <a:solidFill>
+              <a:srgbClr val="62A8FF"/>
+            </a:solidFill>
+          </a:ln>
+        </p:spPr>
+        <p:style>
+          <a:lnRef idx="1">
+            <a:schemeClr val="accent1"/>
+          </a:lnRef>
+          <a:fillRef idx="3">
+            <a:schemeClr val="accent1"/>
+          </a:fillRef>
+          <a:effectRef idx="2">
+            <a:schemeClr val="accent1"/>
+          </a:effectRef>
+          <a:fontRef idx="minor">
+            <a:schemeClr val="lt1"/>
+          </a:fontRef>
+        </p:style>
+        <p:txBody>
+          <a:bodyPr rtlCol="0" anchor="ctr"/>
+          <a:lstStyle/>
+          <a:p>
+            <a:pPr algn="ctr"/>
+          </a:p>
+        </p:txBody>
+      </p:sp>
+      <p:sp>
+        <p:nvSpPr>
+          <p:cNvPr id="9" name="TextBox 8"/>
+          <p:cNvSpPr txBox="1"/>
+          <p:nvPr/>
+        </p:nvSpPr>
+        <p:spPr>
+          <a:xfrm>
+            <a:off x="822960" y="2514600"/>
+            <a:ext cx="2084831" cy="292608"/>
+          </a:xfrm>
+          <a:prstGeom prst="rect">
+            <a:avLst/>
+          </a:prstGeom>
+          <a:noFill/>
+        </p:spPr>
+        <p:txBody>
+          <a:bodyPr wrap="square" lIns="27432" rIns="27432" tIns="27432" bIns="27432" anchor="t">
+            <a:spAutoFit/>
+          </a:bodyPr>
+          <a:lstStyle/>
+          <a:p>
+            <a:pPr algn="ctr">
+              <a:defRPr sz="1500" b="1">
+                <a:solidFill>
+                  <a:srgbClr val="62A8FF"/>
+                </a:solidFill>
+                <a:latin typeface="Noto Sans CJK SC"/>
+              </a:defRPr>
+            </a:pPr>
+            <a:r>
+              <a:t>理解工具</a:t>
+            </a:r>
+          </a:p>
+        </p:txBody>
+      </p:sp>
+      <p:sp>
+        <p:nvSpPr>
+          <p:cNvPr id="10" name="TextBox 9"/>
+          <p:cNvSpPr txBox="1"/>
+          <p:nvPr/>
+        </p:nvSpPr>
+        <p:spPr>
+          <a:xfrm>
+            <a:off x="877824" y="2962656"/>
+            <a:ext cx="1975104" cy="530352"/>
+          </a:xfrm>
+          <a:prstGeom prst="rect">
+            <a:avLst/>
+          </a:prstGeom>
+          <a:noFill/>
+        </p:spPr>
+        <p:txBody>
+          <a:bodyPr wrap="square" lIns="27432" rIns="27432" tIns="27432" bIns="27432" anchor="t">
+            <a:spAutoFit/>
+          </a:bodyPr>
+          <a:lstStyle/>
+          <a:p>
+            <a:pPr algn="ctr">
+              <a:defRPr sz="1220" b="0">
+                <a:solidFill>
+                  <a:srgbClr val="A7B6CA"/>
+                </a:solidFill>
+                <a:latin typeface="Noto Sans CJK SC"/>
+              </a:defRPr>
+            </a:pPr>
+            <a:r>
+              <a:t>完整命令 → 子命令 → 真实工作</a:t>
+            </a:r>
+          </a:p>
+        </p:txBody>
+      </p:sp>
+      <p:sp>
+        <p:nvSpPr>
+          <p:cNvPr id="11" name="Right Arrow 10"/>
+          <p:cNvSpPr/>
+          <p:nvPr/>
+        </p:nvSpPr>
+        <p:spPr>
+          <a:xfrm>
+            <a:off x="3118104" y="2926080"/>
+            <a:ext cx="256032" cy="164592"/>
+          </a:xfrm>
+          <a:prstGeom prst="rightArrow">
+            <a:avLst/>
+          </a:prstGeom>
+          <a:solidFill>
+            <a:srgbClr val="677990"/>
+          </a:solidFill>
+          <a:ln>
+            <a:solidFill>
+              <a:srgbClr val="677990"/>
+            </a:solidFill>
+          </a:ln>
+        </p:spPr>
+        <p:style>
+          <a:lnRef idx="1">
+            <a:schemeClr val="accent1"/>
+          </a:lnRef>
+          <a:fillRef idx="3">
+            <a:schemeClr val="accent1"/>
+          </a:fillRef>
+          <a:effectRef idx="2">
+            <a:schemeClr val="accent1"/>
+          </a:effectRef>
+          <a:fontRef idx="minor">
+            <a:schemeClr val="lt1"/>
+          </a:fontRef>
+        </p:style>
+        <p:txBody>
+          <a:bodyPr rtlCol="0" anchor="ctr"/>
+          <a:lstStyle/>
+          <a:p>
+            <a:pPr algn="ctr"/>
+          </a:p>
+        </p:txBody>
+      </p:sp>
+      <p:sp>
+        <p:nvSpPr>
+          <p:cNvPr id="12" name="Oval 11"/>
+          <p:cNvSpPr/>
+          <p:nvPr/>
+        </p:nvSpPr>
+        <p:spPr>
+          <a:xfrm>
+            <a:off x="4334256" y="1417320"/>
+            <a:ext cx="621792" cy="621792"/>
+          </a:xfrm>
+          <a:prstGeom prst="ellipse">
+            <a:avLst/>
+          </a:prstGeom>
+          <a:solidFill>
+            <a:srgbClr val="32D5C4"/>
+          </a:solidFill>
+          <a:ln>
+            <a:solidFill>
+              <a:srgbClr val="32D5C4"/>
+            </a:solidFill>
+          </a:ln>
+        </p:spPr>
+        <p:style>
+          <a:lnRef idx="1">
+            <a:schemeClr val="accent1"/>
+          </a:lnRef>
+          <a:fillRef idx="3">
+            <a:schemeClr val="accent1"/>
+          </a:fillRef>
+          <a:effectRef idx="2">
+            <a:schemeClr val="accent1"/>
+          </a:effectRef>
+          <a:fontRef idx="minor">
+            <a:schemeClr val="lt1"/>
+          </a:fontRef>
+        </p:style>
+        <p:txBody>
+          <a:bodyPr rtlCol="0" anchor="ctr"/>
+          <a:lstStyle/>
+          <a:p>
+            <a:pPr algn="ctr"/>
+          </a:p>
+        </p:txBody>
+      </p:sp>
+      <p:sp>
+        <p:nvSpPr>
+          <p:cNvPr id="13" name="TextBox 12"/>
+          <p:cNvSpPr txBox="1"/>
+          <p:nvPr/>
+        </p:nvSpPr>
+        <p:spPr>
+          <a:xfrm>
+            <a:off x="4334256" y="1600200"/>
+            <a:ext cx="621792" cy="219456"/>
+          </a:xfrm>
+          <a:prstGeom prst="rect">
+            <a:avLst/>
+          </a:prstGeom>
+          <a:noFill/>
+        </p:spPr>
+        <p:txBody>
+          <a:bodyPr wrap="square" lIns="27432" rIns="27432" tIns="27432" bIns="27432" anchor="t">
+            <a:spAutoFit/>
+          </a:bodyPr>
+          <a:lstStyle/>
+          <a:p>
+            <a:pPr algn="ctr">
+              <a:defRPr sz="1400" b="1">
+                <a:solidFill>
+                  <a:srgbClr val="09111F"/>
+                </a:solidFill>
+                <a:latin typeface="Noto Sans CJK SC"/>
+              </a:defRPr>
+            </a:pPr>
+            <a:r>
+              <a:t>2</a:t>
+            </a:r>
+          </a:p>
+        </p:txBody>
+      </p:sp>
+      <p:sp>
+        <p:nvSpPr>
+          <p:cNvPr id="14" name="Rounded Rectangle 13"/>
+          <p:cNvSpPr/>
+          <p:nvPr/>
+        </p:nvSpPr>
+        <p:spPr>
+          <a:xfrm>
+            <a:off x="3502152" y="2304288"/>
+            <a:ext cx="2304288" cy="1508760"/>
+          </a:xfrm>
+          <a:prstGeom prst="roundRect">
+            <a:avLst/>
+          </a:prstGeom>
+          <a:solidFill>
+            <a:srgbClr val="111D30"/>
+          </a:solidFill>
+          <a:ln w="12700">
+            <a:solidFill>
+              <a:srgbClr val="32D5C4"/>
+            </a:solidFill>
+          </a:ln>
+        </p:spPr>
+        <p:style>
+          <a:lnRef idx="1">
+            <a:schemeClr val="accent1"/>
+          </a:lnRef>
+          <a:fillRef idx="3">
+            <a:schemeClr val="accent1"/>
+          </a:fillRef>
+          <a:effectRef idx="2">
+            <a:schemeClr val="accent1"/>
+          </a:effectRef>
+          <a:fontRef idx="minor">
+            <a:schemeClr val="lt1"/>
+          </a:fontRef>
+        </p:style>
+        <p:txBody>
+          <a:bodyPr rtlCol="0" anchor="ctr"/>
+          <a:lstStyle/>
+          <a:p>
+            <a:pPr algn="ctr"/>
+          </a:p>
+        </p:txBody>
+      </p:sp>
+      <p:sp>
+        <p:nvSpPr>
+          <p:cNvPr id="15" name="TextBox 14"/>
+          <p:cNvSpPr txBox="1"/>
+          <p:nvPr/>
+        </p:nvSpPr>
+        <p:spPr>
+          <a:xfrm>
+            <a:off x="3611880" y="2514600"/>
+            <a:ext cx="2084831" cy="292608"/>
+          </a:xfrm>
+          <a:prstGeom prst="rect">
+            <a:avLst/>
+          </a:prstGeom>
+          <a:noFill/>
+        </p:spPr>
+        <p:txBody>
+          <a:bodyPr wrap="square" lIns="27432" rIns="27432" tIns="27432" bIns="27432" anchor="t">
+            <a:spAutoFit/>
+          </a:bodyPr>
+          <a:lstStyle/>
+          <a:p>
+            <a:pPr algn="ctr">
+              <a:defRPr sz="1500" b="1">
+                <a:solidFill>
+                  <a:srgbClr val="32D5C4"/>
+                </a:solidFill>
+                <a:latin typeface="Noto Sans CJK SC"/>
+              </a:defRPr>
+            </a:pPr>
+            <a:r>
+              <a:t>预测状态</a:t>
+            </a:r>
+          </a:p>
+        </p:txBody>
+      </p:sp>
+      <p:sp>
+        <p:nvSpPr>
+          <p:cNvPr id="16" name="TextBox 15"/>
+          <p:cNvSpPr txBox="1"/>
+          <p:nvPr/>
+        </p:nvSpPr>
+        <p:spPr>
+          <a:xfrm>
+            <a:off x="3666744" y="2962656"/>
+            <a:ext cx="1975104" cy="530352"/>
+          </a:xfrm>
+          <a:prstGeom prst="rect">
+            <a:avLst/>
+          </a:prstGeom>
+          <a:noFill/>
+        </p:spPr>
+        <p:txBody>
+          <a:bodyPr wrap="square" lIns="27432" rIns="27432" tIns="27432" bIns="27432" anchor="t">
+            <a:spAutoFit/>
+          </a:bodyPr>
+          <a:lstStyle/>
+          <a:p>
+            <a:pPr algn="ctr">
+              <a:defRPr sz="1220" b="0">
+                <a:solidFill>
+                  <a:srgbClr val="A7B6CA"/>
+                </a:solidFill>
+                <a:latin typeface="Noto Sans CJK SC"/>
+              </a:defRPr>
+            </a:pPr>
+            <a:r>
+              <a:t>何时返回、CPU/内存/读写如何变化</a:t>
+            </a:r>
+          </a:p>
+        </p:txBody>
+      </p:sp>
+      <p:sp>
+        <p:nvSpPr>
+          <p:cNvPr id="17" name="Right Arrow 16"/>
+          <p:cNvSpPr/>
+          <p:nvPr/>
+        </p:nvSpPr>
+        <p:spPr>
+          <a:xfrm>
+            <a:off x="5907024" y="2926080"/>
+            <a:ext cx="256032" cy="164592"/>
+          </a:xfrm>
+          <a:prstGeom prst="rightArrow">
+            <a:avLst/>
+          </a:prstGeom>
+          <a:solidFill>
+            <a:srgbClr val="677990"/>
+          </a:solidFill>
+          <a:ln>
+            <a:solidFill>
+              <a:srgbClr val="677990"/>
+            </a:solidFill>
+          </a:ln>
+        </p:spPr>
+        <p:style>
+          <a:lnRef idx="1">
+            <a:schemeClr val="accent1"/>
+          </a:lnRef>
+          <a:fillRef idx="3">
+            <a:schemeClr val="accent1"/>
+          </a:fillRef>
+          <a:effectRef idx="2">
+            <a:schemeClr val="accent1"/>
+          </a:effectRef>
+          <a:fontRef idx="minor">
+            <a:schemeClr val="lt1"/>
+          </a:fontRef>
+        </p:style>
+        <p:txBody>
+          <a:bodyPr rtlCol="0" anchor="ctr"/>
+          <a:lstStyle/>
+          <a:p>
+            <a:pPr algn="ctr"/>
+          </a:p>
+        </p:txBody>
+      </p:sp>
+      <p:sp>
+        <p:nvSpPr>
+          <p:cNvPr id="18" name="Oval 17"/>
+          <p:cNvSpPr/>
+          <p:nvPr/>
+        </p:nvSpPr>
+        <p:spPr>
+          <a:xfrm>
+            <a:off x="7123176" y="1417320"/>
+            <a:ext cx="621792" cy="621792"/>
+          </a:xfrm>
+          <a:prstGeom prst="ellipse">
+            <a:avLst/>
+          </a:prstGeom>
+          <a:solidFill>
+            <a:srgbClr val="F4C75B"/>
+          </a:solidFill>
+          <a:ln>
+            <a:solidFill>
+              <a:srgbClr val="F4C75B"/>
+            </a:solidFill>
+          </a:ln>
+        </p:spPr>
+        <p:style>
+          <a:lnRef idx="1">
+            <a:schemeClr val="accent1"/>
+          </a:lnRef>
+          <a:fillRef idx="3">
+            <a:schemeClr val="accent1"/>
+          </a:fillRef>
+          <a:effectRef idx="2">
+            <a:schemeClr val="accent1"/>
+          </a:effectRef>
+          <a:fontRef idx="minor">
+            <a:schemeClr val="lt1"/>
+          </a:fontRef>
+        </p:style>
+        <p:txBody>
+          <a:bodyPr rtlCol="0" anchor="ctr"/>
+          <a:lstStyle/>
+          <a:p>
+            <a:pPr algn="ctr"/>
+          </a:p>
+        </p:txBody>
+      </p:sp>
+      <p:sp>
+        <p:nvSpPr>
+          <p:cNvPr id="19" name="TextBox 18"/>
+          <p:cNvSpPr txBox="1"/>
+          <p:nvPr/>
+        </p:nvSpPr>
+        <p:spPr>
+          <a:xfrm>
+            <a:off x="7123176" y="1600200"/>
+            <a:ext cx="621792" cy="219456"/>
+          </a:xfrm>
+          <a:prstGeom prst="rect">
+            <a:avLst/>
+          </a:prstGeom>
+          <a:noFill/>
+        </p:spPr>
+        <p:txBody>
+          <a:bodyPr wrap="square" lIns="27432" rIns="27432" tIns="27432" bIns="27432" anchor="t">
+            <a:spAutoFit/>
+          </a:bodyPr>
+          <a:lstStyle/>
+          <a:p>
+            <a:pPr algn="ctr">
+              <a:defRPr sz="1400" b="1">
+                <a:solidFill>
+                  <a:srgbClr val="09111F"/>
+                </a:solidFill>
+                <a:latin typeface="Noto Sans CJK SC"/>
+              </a:defRPr>
+            </a:pPr>
+            <a:r>
+              <a:t>3</a:t>
+            </a:r>
+          </a:p>
+        </p:txBody>
+      </p:sp>
+      <p:sp>
+        <p:nvSpPr>
+          <p:cNvPr id="20" name="Rounded Rectangle 19"/>
+          <p:cNvSpPr/>
+          <p:nvPr/>
+        </p:nvSpPr>
+        <p:spPr>
+          <a:xfrm>
+            <a:off x="6291072" y="2304288"/>
+            <a:ext cx="2304288" cy="1508760"/>
+          </a:xfrm>
+          <a:prstGeom prst="roundRect">
+            <a:avLst/>
+          </a:prstGeom>
+          <a:solidFill>
+            <a:srgbClr val="111D30"/>
+          </a:solidFill>
+          <a:ln w="12700">
+            <a:solidFill>
+              <a:srgbClr val="F4C75B"/>
+            </a:solidFill>
+          </a:ln>
+        </p:spPr>
+        <p:style>
+          <a:lnRef idx="1">
+            <a:schemeClr val="accent1"/>
+          </a:lnRef>
+          <a:fillRef idx="3">
+            <a:schemeClr val="accent1"/>
+          </a:fillRef>
+          <a:effectRef idx="2">
+            <a:schemeClr val="accent1"/>
+          </a:effectRef>
+          <a:fontRef idx="minor">
+            <a:schemeClr val="lt1"/>
+          </a:fontRef>
+        </p:style>
+        <p:txBody>
+          <a:bodyPr rtlCol="0" anchor="ctr"/>
+          <a:lstStyle/>
+          <a:p>
+            <a:pPr algn="ctr"/>
+          </a:p>
+        </p:txBody>
+      </p:sp>
+      <p:sp>
+        <p:nvSpPr>
+          <p:cNvPr id="21" name="TextBox 20"/>
+          <p:cNvSpPr txBox="1"/>
+          <p:nvPr/>
+        </p:nvSpPr>
+        <p:spPr>
+          <a:xfrm>
+            <a:off x="6400800" y="2514600"/>
+            <a:ext cx="2084831" cy="292608"/>
+          </a:xfrm>
+          <a:prstGeom prst="rect">
+            <a:avLst/>
+          </a:prstGeom>
+          <a:noFill/>
+        </p:spPr>
+        <p:txBody>
+          <a:bodyPr wrap="square" lIns="27432" rIns="27432" tIns="27432" bIns="27432" anchor="t">
+            <a:spAutoFit/>
+          </a:bodyPr>
+          <a:lstStyle/>
+          <a:p>
+            <a:pPr algn="ctr">
+              <a:defRPr sz="1500" b="1">
+                <a:solidFill>
+                  <a:srgbClr val="F4C75B"/>
+                </a:solidFill>
+                <a:latin typeface="Noto Sans CJK SC"/>
+              </a:defRPr>
+            </a:pPr>
+            <a:r>
+              <a:t>连接动作</a:t>
+            </a:r>
+          </a:p>
+        </p:txBody>
+      </p:sp>
+      <p:sp>
+        <p:nvSpPr>
+          <p:cNvPr id="22" name="TextBox 21"/>
+          <p:cNvSpPr txBox="1"/>
+          <p:nvPr/>
+        </p:nvSpPr>
+        <p:spPr>
+          <a:xfrm>
+            <a:off x="6455664" y="2962656"/>
+            <a:ext cx="1975104" cy="530352"/>
+          </a:xfrm>
+          <a:prstGeom prst="rect">
+            <a:avLst/>
+          </a:prstGeom>
+          <a:noFill/>
+        </p:spPr>
+        <p:txBody>
+          <a:bodyPr wrap="square" lIns="27432" rIns="27432" tIns="27432" bIns="27432" anchor="t">
+            <a:spAutoFit/>
+          </a:bodyPr>
+          <a:lstStyle/>
+          <a:p>
+            <a:pPr algn="ctr">
+              <a:defRPr sz="1220" b="0">
+                <a:solidFill>
+                  <a:srgbClr val="A7B6CA"/>
+                </a:solidFill>
+                <a:latin typeface="Noto Sans CJK SC"/>
+              </a:defRPr>
+            </a:pPr>
+            <a:r>
+              <a:t>借入、返回优先、KV 保留、工具进程放置</a:t>
+            </a:r>
+          </a:p>
+        </p:txBody>
+      </p:sp>
+      <p:sp>
+        <p:nvSpPr>
+          <p:cNvPr id="23" name="Right Arrow 22"/>
+          <p:cNvSpPr/>
+          <p:nvPr/>
+        </p:nvSpPr>
+        <p:spPr>
+          <a:xfrm>
+            <a:off x="8695944" y="2926080"/>
+            <a:ext cx="256032" cy="164592"/>
+          </a:xfrm>
+          <a:prstGeom prst="rightArrow">
+            <a:avLst/>
+          </a:prstGeom>
+          <a:solidFill>
+            <a:srgbClr val="677990"/>
+          </a:solidFill>
+          <a:ln>
+            <a:solidFill>
+              <a:srgbClr val="677990"/>
+            </a:solidFill>
+          </a:ln>
+        </p:spPr>
+        <p:style>
+          <a:lnRef idx="1">
+            <a:schemeClr val="accent1"/>
+          </a:lnRef>
+          <a:fillRef idx="3">
+            <a:schemeClr val="accent1"/>
+          </a:fillRef>
+          <a:effectRef idx="2">
+            <a:schemeClr val="accent1"/>
+          </a:effectRef>
+          <a:fontRef idx="minor">
+            <a:schemeClr val="lt1"/>
+          </a:fontRef>
+        </p:style>
+        <p:txBody>
+          <a:bodyPr rtlCol="0" anchor="ctr"/>
+          <a:lstStyle/>
+          <a:p>
+            <a:pPr algn="ctr"/>
+          </a:p>
+        </p:txBody>
+      </p:sp>
+      <p:sp>
+        <p:nvSpPr>
+          <p:cNvPr id="24" name="Oval 23"/>
+          <p:cNvSpPr/>
+          <p:nvPr/>
+        </p:nvSpPr>
+        <p:spPr>
+          <a:xfrm>
+            <a:off x="9912095" y="1417320"/>
+            <a:ext cx="621792" cy="621792"/>
+          </a:xfrm>
+          <a:prstGeom prst="ellipse">
+            <a:avLst/>
+          </a:prstGeom>
+          <a:solidFill>
+            <a:srgbClr val="40D39C"/>
+          </a:solidFill>
+          <a:ln>
+            <a:solidFill>
+              <a:srgbClr val="40D39C"/>
+            </a:solidFill>
+          </a:ln>
+        </p:spPr>
+        <p:style>
+          <a:lnRef idx="1">
+            <a:schemeClr val="accent1"/>
+          </a:lnRef>
+          <a:fillRef idx="3">
+            <a:schemeClr val="accent1"/>
+          </a:fillRef>
+          <a:effectRef idx="2">
+            <a:schemeClr val="accent1"/>
+          </a:effectRef>
+          <a:fontRef idx="minor">
+            <a:schemeClr val="lt1"/>
+          </a:fontRef>
+        </p:style>
+        <p:txBody>
+          <a:bodyPr rtlCol="0" anchor="ctr"/>
+          <a:lstStyle/>
+          <a:p>
+            <a:pPr algn="ctr"/>
+          </a:p>
+        </p:txBody>
+      </p:sp>
+      <p:sp>
+        <p:nvSpPr>
+          <p:cNvPr id="25" name="TextBox 24"/>
+          <p:cNvSpPr txBox="1"/>
+          <p:nvPr/>
+        </p:nvSpPr>
+        <p:spPr>
+          <a:xfrm>
+            <a:off x="9912095" y="1600200"/>
+            <a:ext cx="621792" cy="219456"/>
+          </a:xfrm>
+          <a:prstGeom prst="rect">
+            <a:avLst/>
+          </a:prstGeom>
+          <a:noFill/>
+        </p:spPr>
+        <p:txBody>
+          <a:bodyPr wrap="square" lIns="27432" rIns="27432" tIns="27432" bIns="27432" anchor="t">
+            <a:spAutoFit/>
+          </a:bodyPr>
+          <a:lstStyle/>
+          <a:p>
+            <a:pPr algn="ctr">
+              <a:defRPr sz="1400" b="1">
+                <a:solidFill>
+                  <a:srgbClr val="09111F"/>
+                </a:solidFill>
+                <a:latin typeface="Noto Sans CJK SC"/>
+              </a:defRPr>
+            </a:pPr>
+            <a:r>
+              <a:t>4</a:t>
+            </a:r>
+          </a:p>
+        </p:txBody>
+      </p:sp>
+      <p:sp>
+        <p:nvSpPr>
+          <p:cNvPr id="26" name="Rounded Rectangle 25"/>
+          <p:cNvSpPr/>
+          <p:nvPr/>
+        </p:nvSpPr>
+        <p:spPr>
+          <a:xfrm>
+            <a:off x="9079991" y="2304288"/>
+            <a:ext cx="2304288" cy="1508760"/>
+          </a:xfrm>
+          <a:prstGeom prst="roundRect">
+            <a:avLst/>
+          </a:prstGeom>
+          <a:solidFill>
+            <a:srgbClr val="111D30"/>
+          </a:solidFill>
+          <a:ln w="12700">
+            <a:solidFill>
+              <a:srgbClr val="40D39C"/>
+            </a:solidFill>
+          </a:ln>
+        </p:spPr>
+        <p:style>
+          <a:lnRef idx="1">
+            <a:schemeClr val="accent1"/>
+          </a:lnRef>
+          <a:fillRef idx="3">
+            <a:schemeClr val="accent1"/>
+          </a:fillRef>
+          <a:effectRef idx="2">
+            <a:schemeClr val="accent1"/>
+          </a:effectRef>
+          <a:fontRef idx="minor">
+            <a:schemeClr val="lt1"/>
+          </a:fontRef>
+        </p:style>
+        <p:txBody>
+          <a:bodyPr rtlCol="0" anchor="ctr"/>
+          <a:lstStyle/>
+          <a:p>
+            <a:pPr algn="ctr"/>
+          </a:p>
+        </p:txBody>
+      </p:sp>
+      <p:sp>
+        <p:nvSpPr>
+          <p:cNvPr id="27" name="TextBox 26"/>
+          <p:cNvSpPr txBox="1"/>
+          <p:nvPr/>
+        </p:nvSpPr>
+        <p:spPr>
+          <a:xfrm>
+            <a:off x="9189719" y="2514600"/>
+            <a:ext cx="2084831" cy="292608"/>
+          </a:xfrm>
+          <a:prstGeom prst="rect">
+            <a:avLst/>
+          </a:prstGeom>
+          <a:noFill/>
+        </p:spPr>
+        <p:txBody>
+          <a:bodyPr wrap="square" lIns="27432" rIns="27432" tIns="27432" bIns="27432" anchor="t">
+            <a:spAutoFit/>
+          </a:bodyPr>
+          <a:lstStyle/>
+          <a:p>
+            <a:pPr algn="ctr">
+              <a:defRPr sz="1500" b="1">
+                <a:solidFill>
+                  <a:srgbClr val="40D39C"/>
+                </a:solidFill>
+                <a:latin typeface="Noto Sans CJK SC"/>
+              </a:defRPr>
+            </a:pPr>
+            <a:r>
+              <a:t>证明收益</a:t>
+            </a:r>
+          </a:p>
+        </p:txBody>
+      </p:sp>
+      <p:sp>
+        <p:nvSpPr>
+          <p:cNvPr id="28" name="TextBox 27"/>
+          <p:cNvSpPr txBox="1"/>
+          <p:nvPr/>
+        </p:nvSpPr>
+        <p:spPr>
+          <a:xfrm>
+            <a:off x="9244583" y="2962656"/>
+            <a:ext cx="1975104" cy="530352"/>
+          </a:xfrm>
+          <a:prstGeom prst="rect">
+            <a:avLst/>
+          </a:prstGeom>
+          <a:noFill/>
+        </p:spPr>
+        <p:txBody>
+          <a:bodyPr wrap="square" lIns="27432" rIns="27432" tIns="27432" bIns="27432" anchor="t">
+            <a:spAutoFit/>
+          </a:bodyPr>
+          <a:lstStyle/>
+          <a:p>
+            <a:pPr algn="ctr">
+              <a:defRPr sz="1220" b="0">
+                <a:solidFill>
+                  <a:srgbClr val="A7B6CA"/>
+                </a:solidFill>
+                <a:latin typeface="Noto Sans CJK SC"/>
+              </a:defRPr>
+            </a:pPr>
+            <a:r>
+              <a:t>任务更快、尾部不坏、移动成本全计入</a:t>
+            </a:r>
+          </a:p>
+        </p:txBody>
+      </p:sp>
+      <p:sp>
+        <p:nvSpPr>
+          <p:cNvPr id="29" name="Rounded Rectangle 28"/>
+          <p:cNvSpPr/>
+          <p:nvPr/>
+        </p:nvSpPr>
+        <p:spPr>
+          <a:xfrm>
+            <a:off x="749808" y="4315968"/>
+            <a:ext cx="3246120" cy="1051560"/>
+          </a:xfrm>
+          <a:prstGeom prst="roundRect">
+            <a:avLst/>
+          </a:prstGeom>
+          <a:solidFill>
+            <a:srgbClr val="111D30"/>
+          </a:solidFill>
+          <a:ln w="12700">
+            <a:solidFill>
+              <a:srgbClr val="17263D"/>
+            </a:solidFill>
+          </a:ln>
+        </p:spPr>
+        <p:style>
+          <a:lnRef idx="1">
+            <a:schemeClr val="accent1"/>
+          </a:lnRef>
+          <a:fillRef idx="3">
+            <a:schemeClr val="accent1"/>
+          </a:fillRef>
+          <a:effectRef idx="2">
+            <a:schemeClr val="accent1"/>
+          </a:effectRef>
+          <a:fontRef idx="minor">
+            <a:schemeClr val="lt1"/>
+          </a:fontRef>
+        </p:style>
+        <p:txBody>
+          <a:bodyPr rtlCol="0" anchor="ctr"/>
+          <a:lstStyle/>
+          <a:p>
+            <a:pPr algn="ctr"/>
+          </a:p>
+        </p:txBody>
+      </p:sp>
+      <p:cxnSp>
+        <p:nvCxnSpPr>
+          <p:cNvPr id="30" name="Connector 29"/>
+          <p:cNvCxnSpPr/>
+          <p:nvPr/>
+        </p:nvCxnSpPr>
+        <p:spPr>
+          <a:xfrm>
+            <a:off x="886968" y="4480559"/>
+            <a:ext cx="0" cy="722377"/>
+          </a:xfrm>
+          <a:prstGeom prst="line">
+            <a:avLst/>
+          </a:prstGeom>
+          <a:ln w="44450">
+            <a:solidFill>
+              <a:srgbClr val="62A8FF"/>
+            </a:solidFill>
+          </a:ln>
+        </p:spPr>
+        <p:style>
+          <a:lnRef idx="2">
+            <a:schemeClr val="accent1"/>
+          </a:lnRef>
+          <a:fillRef idx="0">
+            <a:schemeClr val="accent1"/>
+          </a:fillRef>
+          <a:effectRef idx="1">
+            <a:schemeClr val="accent1"/>
+          </a:effectRef>
+          <a:fontRef idx="minor">
+            <a:schemeClr val="tx1"/>
+          </a:fontRef>
+        </p:style>
+      </p:cxnSp>
+      <p:sp>
+        <p:nvSpPr>
+          <p:cNvPr id="31" name="TextBox 30"/>
+          <p:cNvSpPr txBox="1"/>
+          <p:nvPr/>
+        </p:nvSpPr>
+        <p:spPr>
+          <a:xfrm>
+            <a:off x="1060704" y="4462272"/>
+            <a:ext cx="2788920" cy="384048"/>
+          </a:xfrm>
+          <a:prstGeom prst="rect">
+            <a:avLst/>
+          </a:prstGeom>
+          <a:noFill/>
+        </p:spPr>
+        <p:txBody>
+          <a:bodyPr wrap="square" lIns="27432" rIns="27432" tIns="27432" bIns="27432" anchor="t">
+            <a:spAutoFit/>
+          </a:bodyPr>
+          <a:lstStyle/>
+          <a:p>
+            <a:pPr algn="l">
+              <a:defRPr sz="1500" b="1">
+                <a:solidFill>
+                  <a:srgbClr val="62A8FF"/>
+                </a:solidFill>
+                <a:latin typeface="Noto Sans CJK SC"/>
+              </a:defRPr>
+            </a:pPr>
+            <a:r>
+              <a:t>可能贡献 A</a:t>
+            </a:r>
+          </a:p>
+        </p:txBody>
+      </p:sp>
+      <p:sp>
+        <p:nvSpPr>
+          <p:cNvPr id="32" name="TextBox 31"/>
+          <p:cNvSpPr txBox="1"/>
+          <p:nvPr/>
+        </p:nvSpPr>
+        <p:spPr>
+          <a:xfrm>
+            <a:off x="1060704" y="4910328"/>
+            <a:ext cx="2788920" cy="338327"/>
+          </a:xfrm>
+          <a:prstGeom prst="rect">
+            <a:avLst/>
+          </a:prstGeom>
+          <a:noFill/>
+        </p:spPr>
+        <p:txBody>
+          <a:bodyPr wrap="square" lIns="27432" rIns="27432" tIns="27432" bIns="27432" anchor="t">
+            <a:spAutoFit/>
+          </a:bodyPr>
+          <a:lstStyle/>
+          <a:p>
+            <a:pPr algn="l">
+              <a:defRPr sz="1280" b="0">
+                <a:solidFill>
+                  <a:srgbClr val="A7B6CA"/>
+                </a:solidFill>
+                <a:latin typeface="Noto Sans CJK SC"/>
+              </a:defRPr>
+            </a:pPr>
+            <a:r>
+              <a:t>普通黑盒 agent trace 也能得到完整命令/子命令级资源状态。</a:t>
+            </a:r>
+          </a:p>
+        </p:txBody>
+      </p:sp>
+      <p:sp>
+        <p:nvSpPr>
+          <p:cNvPr id="33" name="Rounded Rectangle 32"/>
+          <p:cNvSpPr/>
+          <p:nvPr/>
+        </p:nvSpPr>
+        <p:spPr>
+          <a:xfrm>
+            <a:off x="4462272" y="4315968"/>
+            <a:ext cx="3246120" cy="1051560"/>
+          </a:xfrm>
+          <a:prstGeom prst="roundRect">
+            <a:avLst/>
+          </a:prstGeom>
+          <a:solidFill>
+            <a:srgbClr val="111D30"/>
+          </a:solidFill>
+          <a:ln w="12700">
+            <a:solidFill>
+              <a:srgbClr val="17263D"/>
+            </a:solidFill>
+          </a:ln>
+        </p:spPr>
+        <p:style>
+          <a:lnRef idx="1">
+            <a:schemeClr val="accent1"/>
+          </a:lnRef>
+          <a:fillRef idx="3">
+            <a:schemeClr val="accent1"/>
+          </a:fillRef>
+          <a:effectRef idx="2">
+            <a:schemeClr val="accent1"/>
+          </a:effectRef>
+          <a:fontRef idx="minor">
+            <a:schemeClr val="lt1"/>
+          </a:fontRef>
+        </p:style>
+        <p:txBody>
+          <a:bodyPr rtlCol="0" anchor="ctr"/>
+          <a:lstStyle/>
+          <a:p>
+            <a:pPr algn="ctr"/>
+          </a:p>
+        </p:txBody>
+      </p:sp>
+      <p:cxnSp>
+        <p:nvCxnSpPr>
+          <p:cNvPr id="34" name="Connector 33"/>
+          <p:cNvCxnSpPr/>
+          <p:nvPr/>
+        </p:nvCxnSpPr>
+        <p:spPr>
+          <a:xfrm>
+            <a:off x="4599432" y="4480559"/>
+            <a:ext cx="0" cy="722377"/>
+          </a:xfrm>
+          <a:prstGeom prst="line">
+            <a:avLst/>
+          </a:prstGeom>
+          <a:ln w="44450">
+            <a:solidFill>
+              <a:srgbClr val="32D5C4"/>
+            </a:solidFill>
+          </a:ln>
+        </p:spPr>
+        <p:style>
+          <a:lnRef idx="2">
+            <a:schemeClr val="accent1"/>
+          </a:lnRef>
+          <a:fillRef idx="0">
+            <a:schemeClr val="accent1"/>
+          </a:fillRef>
+          <a:effectRef idx="1">
+            <a:schemeClr val="accent1"/>
+          </a:effectRef>
+          <a:fontRef idx="minor">
+            <a:schemeClr val="tx1"/>
+          </a:fontRef>
+        </p:style>
+      </p:cxnSp>
+      <p:sp>
+        <p:nvSpPr>
+          <p:cNvPr id="35" name="TextBox 34"/>
+          <p:cNvSpPr txBox="1"/>
+          <p:nvPr/>
+        </p:nvSpPr>
+        <p:spPr>
+          <a:xfrm>
+            <a:off x="4773168" y="4462272"/>
+            <a:ext cx="2788920" cy="384048"/>
+          </a:xfrm>
+          <a:prstGeom prst="rect">
+            <a:avLst/>
+          </a:prstGeom>
+          <a:noFill/>
+        </p:spPr>
+        <p:txBody>
+          <a:bodyPr wrap="square" lIns="27432" rIns="27432" tIns="27432" bIns="27432" anchor="t">
+            <a:spAutoFit/>
+          </a:bodyPr>
+          <a:lstStyle/>
+          <a:p>
+            <a:pPr algn="l">
+              <a:defRPr sz="1500" b="1">
+                <a:solidFill>
+                  <a:srgbClr val="32D5C4"/>
+                </a:solidFill>
+                <a:latin typeface="Noto Sans CJK SC"/>
+              </a:defRPr>
+            </a:pPr>
+            <a:r>
+              <a:t>可能贡献 B</a:t>
+            </a:r>
+          </a:p>
+        </p:txBody>
+      </p:sp>
+      <p:sp>
+        <p:nvSpPr>
+          <p:cNvPr id="36" name="TextBox 35"/>
+          <p:cNvSpPr txBox="1"/>
+          <p:nvPr/>
+        </p:nvSpPr>
+        <p:spPr>
+          <a:xfrm>
+            <a:off x="4773168" y="4910328"/>
+            <a:ext cx="2788920" cy="338327"/>
+          </a:xfrm>
+          <a:prstGeom prst="rect">
+            <a:avLst/>
+          </a:prstGeom>
+          <a:noFill/>
+        </p:spPr>
+        <p:txBody>
+          <a:bodyPr wrap="square" lIns="27432" rIns="27432" tIns="27432" bIns="27432" anchor="t">
+            <a:spAutoFit/>
+          </a:bodyPr>
+          <a:lstStyle/>
+          <a:p>
+            <a:pPr algn="l">
+              <a:defRPr sz="1280" b="0">
+                <a:solidFill>
+                  <a:srgbClr val="A7B6CA"/>
+                </a:solidFill>
+                <a:latin typeface="Noto Sans CJK SC"/>
+              </a:defRPr>
+            </a:pPr>
+            <a:r>
+              <a:t>细粒度状态改善跨 CPU/GPU 的实际调度动作。</a:t>
+            </a:r>
+          </a:p>
+        </p:txBody>
+      </p:sp>
+      <p:sp>
+        <p:nvSpPr>
+          <p:cNvPr id="37" name="Rounded Rectangle 36"/>
+          <p:cNvSpPr/>
+          <p:nvPr/>
+        </p:nvSpPr>
+        <p:spPr>
+          <a:xfrm>
+            <a:off x="8174736" y="4315968"/>
+            <a:ext cx="3246120" cy="1051560"/>
+          </a:xfrm>
+          <a:prstGeom prst="roundRect">
+            <a:avLst/>
+          </a:prstGeom>
+          <a:solidFill>
+            <a:srgbClr val="111D30"/>
+          </a:solidFill>
+          <a:ln w="12700">
+            <a:solidFill>
+              <a:srgbClr val="17263D"/>
+            </a:solidFill>
+          </a:ln>
+        </p:spPr>
+        <p:style>
+          <a:lnRef idx="1">
+            <a:schemeClr val="accent1"/>
+          </a:lnRef>
+          <a:fillRef idx="3">
+            <a:schemeClr val="accent1"/>
+          </a:fillRef>
+          <a:effectRef idx="2">
+            <a:schemeClr val="accent1"/>
+          </a:effectRef>
+          <a:fontRef idx="minor">
+            <a:schemeClr val="lt1"/>
+          </a:fontRef>
+        </p:style>
+        <p:txBody>
+          <a:bodyPr rtlCol="0" anchor="ctr"/>
+          <a:lstStyle/>
+          <a:p>
+            <a:pPr algn="ctr"/>
+          </a:p>
+        </p:txBody>
+      </p:sp>
+      <p:cxnSp>
+        <p:nvCxnSpPr>
+          <p:cNvPr id="38" name="Connector 37"/>
+          <p:cNvCxnSpPr/>
+          <p:nvPr/>
+        </p:nvCxnSpPr>
+        <p:spPr>
+          <a:xfrm>
+            <a:off x="8311896" y="4480559"/>
+            <a:ext cx="0" cy="722377"/>
+          </a:xfrm>
+          <a:prstGeom prst="line">
+            <a:avLst/>
+          </a:prstGeom>
+          <a:ln w="44450">
+            <a:solidFill>
+              <a:srgbClr val="40D39C"/>
+            </a:solidFill>
+          </a:ln>
+        </p:spPr>
+        <p:style>
+          <a:lnRef idx="2">
+            <a:schemeClr val="accent1"/>
+          </a:lnRef>
+          <a:fillRef idx="0">
+            <a:schemeClr val="accent1"/>
+          </a:fillRef>
+          <a:effectRef idx="1">
+            <a:schemeClr val="accent1"/>
+          </a:effectRef>
+          <a:fontRef idx="minor">
+            <a:schemeClr val="tx1"/>
+          </a:fontRef>
+        </p:style>
+      </p:cxnSp>
+      <p:sp>
+        <p:nvSpPr>
+          <p:cNvPr id="39" name="TextBox 38"/>
+          <p:cNvSpPr txBox="1"/>
+          <p:nvPr/>
+        </p:nvSpPr>
+        <p:spPr>
+          <a:xfrm>
+            <a:off x="8485632" y="4462272"/>
+            <a:ext cx="2788920" cy="384048"/>
+          </a:xfrm>
+          <a:prstGeom prst="rect">
+            <a:avLst/>
+          </a:prstGeom>
+          <a:noFill/>
+        </p:spPr>
+        <p:txBody>
+          <a:bodyPr wrap="square" lIns="27432" rIns="27432" tIns="27432" bIns="27432" anchor="t">
+            <a:spAutoFit/>
+          </a:bodyPr>
+          <a:lstStyle/>
+          <a:p>
+            <a:pPr algn="l">
+              <a:defRPr sz="1500" b="1">
+                <a:solidFill>
+                  <a:srgbClr val="40D39C"/>
+                </a:solidFill>
+                <a:latin typeface="Noto Sans CJK SC"/>
+              </a:defRPr>
+            </a:pPr>
+            <a:r>
+              <a:t>可能贡献 C</a:t>
+            </a:r>
+          </a:p>
+        </p:txBody>
+      </p:sp>
+      <p:sp>
+        <p:nvSpPr>
+          <p:cNvPr id="40" name="TextBox 39"/>
+          <p:cNvSpPr txBox="1"/>
+          <p:nvPr/>
+        </p:nvSpPr>
+        <p:spPr>
+          <a:xfrm>
+            <a:off x="8485632" y="4910328"/>
+            <a:ext cx="2788920" cy="338327"/>
+          </a:xfrm>
+          <a:prstGeom prst="rect">
+            <a:avLst/>
+          </a:prstGeom>
+          <a:noFill/>
+        </p:spPr>
+        <p:txBody>
+          <a:bodyPr wrap="square" lIns="27432" rIns="27432" tIns="27432" bIns="27432" anchor="t">
+            <a:spAutoFit/>
+          </a:bodyPr>
+          <a:lstStyle/>
+          <a:p>
+            <a:pPr algn="l">
+              <a:defRPr sz="1280" b="0">
+                <a:solidFill>
+                  <a:srgbClr val="A7B6CA"/>
+                </a:solidFill>
+                <a:latin typeface="Noto Sans CJK SC"/>
+              </a:defRPr>
+            </a:pPr>
+            <a:r>
+              <a:t>在真实 agent 负载上同时改善完成时间与尾部。</a:t>
+            </a:r>
+          </a:p>
+        </p:txBody>
+      </p:sp>
+      <p:sp>
+        <p:nvSpPr>
+          <p:cNvPr id="41" name="Rounded Rectangle 40"/>
+          <p:cNvSpPr/>
+          <p:nvPr/>
+        </p:nvSpPr>
+        <p:spPr>
+          <a:xfrm>
+            <a:off x="658368" y="5733288"/>
+            <a:ext cx="10881360" cy="530352"/>
+          </a:xfrm>
+          <a:prstGeom prst="roundRect">
+            <a:avLst/>
+          </a:prstGeom>
+          <a:solidFill>
+            <a:srgbClr val="17263D"/>
+          </a:solidFill>
+          <a:ln w="12700">
+            <a:solidFill>
+              <a:srgbClr val="F4C75B"/>
+            </a:solidFill>
+          </a:ln>
+        </p:spPr>
+        <p:style>
+          <a:lnRef idx="1">
+            <a:schemeClr val="accent1"/>
+          </a:lnRef>
+          <a:fillRef idx="3">
+            <a:schemeClr val="accent1"/>
+          </a:fillRef>
+          <a:effectRef idx="2">
+            <a:schemeClr val="accent1"/>
+          </a:effectRef>
+          <a:fontRef idx="minor">
+            <a:schemeClr val="lt1"/>
+          </a:fontRef>
+        </p:style>
+        <p:txBody>
+          <a:bodyPr rtlCol="0" anchor="ctr"/>
+          <a:lstStyle/>
+          <a:p>
+            <a:pPr algn="ctr"/>
+          </a:p>
+        </p:txBody>
+      </p:sp>
+      <p:sp>
+        <p:nvSpPr>
+          <p:cNvPr id="42" name="TextBox 41"/>
+          <p:cNvSpPr txBox="1"/>
+          <p:nvPr/>
+        </p:nvSpPr>
+        <p:spPr>
+          <a:xfrm>
+            <a:off x="841248" y="5879592"/>
+            <a:ext cx="1325880" cy="201168"/>
+          </a:xfrm>
+          <a:prstGeom prst="rect">
+            <a:avLst/>
+          </a:prstGeom>
+          <a:noFill/>
+        </p:spPr>
+        <p:txBody>
+          <a:bodyPr wrap="square" lIns="27432" rIns="27432" tIns="27432" bIns="27432" anchor="t">
+            <a:spAutoFit/>
+          </a:bodyPr>
+          <a:lstStyle/>
+          <a:p>
+            <a:pPr algn="l">
+              <a:defRPr sz="1050" b="1">
+                <a:solidFill>
+                  <a:srgbClr val="F4C75B"/>
+                </a:solidFill>
+                <a:latin typeface="Noto Sans CJK SC"/>
+              </a:defRPr>
+            </a:pPr>
+            <a:r>
+              <a:t>这一阶段学到</a:t>
+            </a:r>
+          </a:p>
+        </p:txBody>
+      </p:sp>
+      <p:sp>
+        <p:nvSpPr>
+          <p:cNvPr id="43" name="TextBox 42"/>
+          <p:cNvSpPr txBox="1"/>
+          <p:nvPr/>
+        </p:nvSpPr>
+        <p:spPr>
+          <a:xfrm>
+            <a:off x="2066543" y="5833872"/>
+            <a:ext cx="9144000" cy="274320"/>
+          </a:xfrm>
+          <a:prstGeom prst="rect">
+            <a:avLst/>
+          </a:prstGeom>
+          <a:noFill/>
+        </p:spPr>
+        <p:txBody>
+          <a:bodyPr wrap="square" lIns="27432" rIns="27432" tIns="27432" bIns="27432" anchor="t">
+            <a:spAutoFit/>
+          </a:bodyPr>
+          <a:lstStyle/>
+          <a:p>
+            <a:pPr algn="l">
+              <a:defRPr sz="1420" b="1">
+                <a:solidFill>
+                  <a:srgbClr val="F4F7FB"/>
+                </a:solidFill>
+                <a:latin typeface="Noto Sans CJK SC"/>
+              </a:defRPr>
+            </a:pPr>
+            <a:r>
+              <a:t>单独的预测准确率不够；系统贡献必须落在完整任务完成时间、尾部与资源成本上。</a:t>
+            </a:r>
+          </a:p>
+        </p:txBody>
+      </p:sp>
+      <p:cxnSp>
+        <p:nvCxnSpPr>
+          <p:cNvPr id="44" name="Connector 43"/>
+          <p:cNvCxnSpPr/>
+          <p:nvPr/>
+        </p:nvCxnSpPr>
+        <p:spPr>
+          <a:xfrm>
+            <a:off x="566928" y="6455664"/>
+            <a:ext cx="11064240" cy="0"/>
+          </a:xfrm>
+          <a:prstGeom prst="line">
+            <a:avLst/>
+          </a:prstGeom>
+          <a:ln w="10160">
+            <a:solidFill>
+              <a:srgbClr val="17263D"/>
+            </a:solidFill>
+          </a:ln>
+        </p:spPr>
+        <p:style>
+          <a:lnRef idx="2">
+            <a:schemeClr val="accent1"/>
+          </a:lnRef>
+          <a:fillRef idx="0">
+            <a:schemeClr val="accent1"/>
+          </a:fillRef>
+          <a:effectRef idx="1">
+            <a:schemeClr val="accent1"/>
+          </a:effectRef>
+          <a:fontRef idx="minor">
+            <a:schemeClr val="tx1"/>
+          </a:fontRef>
+        </p:style>
+      </p:cxnSp>
+      <p:sp>
+        <p:nvSpPr>
+          <p:cNvPr id="45" name="TextBox 44"/>
+          <p:cNvSpPr txBox="1"/>
+          <p:nvPr/>
+        </p:nvSpPr>
+        <p:spPr>
+          <a:xfrm>
+            <a:off x="566928" y="6492240"/>
+            <a:ext cx="10972800" cy="182880"/>
+          </a:xfrm>
+          <a:prstGeom prst="rect">
+            <a:avLst/>
+          </a:prstGeom>
+          <a:noFill/>
+        </p:spPr>
+        <p:txBody>
+          <a:bodyPr wrap="square" lIns="27432" rIns="27432" tIns="27432" bIns="27432" anchor="t">
+            <a:spAutoFit/>
+          </a:bodyPr>
+          <a:lstStyle/>
+          <a:p>
+            <a:pPr algn="l">
+              <a:defRPr sz="780" b="0">
+                <a:solidFill>
+                  <a:srgbClr val="677990"/>
+                </a:solidFill>
+                <a:latin typeface="Noto Sans CJK SC"/>
+              </a:defRPr>
+            </a:pPr>
+            <a:r>
+              <a:t>当前 A 有成熟基础；B 有 trace 回放上界与物理反馈信号；C 尚未成立</a:t>
+            </a:r>
+          </a:p>
+        </p:txBody>
+      </p:sp>
+    </p:spTree>
+  </p:cSld>
+  <p:clrMapOvr>
+    <a:masterClrMapping/>
+  </p:clrMapOvr>
+</p:sld>
+</file>
+
+<file path=ppt/slides/slide19.xml><?xml version="1.0" encoding="utf-8"?>
+<p:sld xmlns:a="http://schemas.openxmlformats.org/drawingml/2006/main" xmlns:p="http://schemas.openxmlformats.org/presentationml/2006/main" xmlns:r="http://schemas.openxmlformats.org/officeDocument/2006/relationships">
+  <p:cSld>
+    <p:bg>
+      <p:bgPr>
+        <a:solidFill>
+          <a:srgbClr val="09111F"/>
+        </a:solidFill>
+        <a:effectLst/>
+      </p:bgPr>
+    </p:bg>
+    <p:spTree>
+      <p:nvGrpSpPr>
+        <p:cNvPr id="1" name=""/>
+        <p:cNvGrpSpPr/>
+        <p:nvPr/>
+      </p:nvGrpSpPr>
+      <p:grpSpPr/>
+      <p:sp>
+        <p:nvSpPr>
+          <p:cNvPr id="2" name="TextBox 1"/>
+          <p:cNvSpPr txBox="1"/>
+          <p:nvPr/>
+        </p:nvSpPr>
+        <p:spPr>
+          <a:xfrm>
+            <a:off x="566928" y="201168"/>
+            <a:ext cx="6400800" cy="219456"/>
+          </a:xfrm>
+          <a:prstGeom prst="rect">
+            <a:avLst/>
+          </a:prstGeom>
+          <a:noFill/>
+        </p:spPr>
+        <p:txBody>
+          <a:bodyPr wrap="square" lIns="27432" rIns="27432" tIns="27432" bIns="27432" anchor="t">
+            <a:spAutoFit/>
+          </a:bodyPr>
+          <a:lstStyle/>
+          <a:p>
+            <a:pPr algn="l">
+              <a:defRPr sz="950" b="1">
+                <a:solidFill>
+                  <a:srgbClr val="32D5C4"/>
+                </a:solidFill>
+                <a:latin typeface="Noto Sans CJK SC"/>
+              </a:defRPr>
+            </a:pPr>
+            <a:r>
+              <a:t>Takeaways</a:t>
+            </a:r>
+          </a:p>
+        </p:txBody>
+      </p:sp>
+      <p:sp>
+        <p:nvSpPr>
+          <p:cNvPr id="3" name="TextBox 2"/>
+          <p:cNvSpPr txBox="1"/>
+          <p:nvPr/>
+        </p:nvSpPr>
+        <p:spPr>
+          <a:xfrm>
+            <a:off x="548640" y="438912"/>
+            <a:ext cx="10972800" cy="603504"/>
+          </a:xfrm>
+          <a:prstGeom prst="rect">
+            <a:avLst/>
+          </a:prstGeom>
+          <a:noFill/>
+        </p:spPr>
+        <p:txBody>
+          <a:bodyPr wrap="square" lIns="27432" rIns="27432" tIns="27432" bIns="27432" anchor="t">
+            <a:spAutoFit/>
+          </a:bodyPr>
+          <a:lstStyle/>
+          <a:p>
+            <a:pPr algn="l">
+              <a:defRPr sz="2600" b="1">
+                <a:solidFill>
+                  <a:srgbClr val="F4F7FB"/>
+                </a:solidFill>
+                <a:latin typeface="Noto Sans CJK SC"/>
+              </a:defRPr>
+            </a:pPr>
+            <a:r>
+              <a:t>带走四句话，然后继续问一个更尖锐的问题</a:t>
+            </a:r>
+          </a:p>
+        </p:txBody>
+      </p:sp>
+      <p:cxnSp>
+        <p:nvCxnSpPr>
+          <p:cNvPr id="4" name="Connector 3"/>
+          <p:cNvCxnSpPr/>
+          <p:nvPr/>
+        </p:nvCxnSpPr>
+        <p:spPr>
+          <a:xfrm>
+            <a:off x="566928" y="1051560"/>
+            <a:ext cx="11064240" cy="0"/>
+          </a:xfrm>
+          <a:prstGeom prst="line">
+            <a:avLst/>
+          </a:prstGeom>
+          <a:ln w="12700">
+            <a:solidFill>
+              <a:srgbClr val="17263D"/>
+            </a:solidFill>
+          </a:ln>
+        </p:spPr>
+        <p:style>
+          <a:lnRef idx="2">
+            <a:schemeClr val="accent1"/>
+          </a:lnRef>
+          <a:fillRef idx="0">
+            <a:schemeClr val="accent1"/>
+          </a:fillRef>
+          <a:effectRef idx="1">
+            <a:schemeClr val="accent1"/>
+          </a:effectRef>
+          <a:fontRef idx="minor">
+            <a:schemeClr val="tx1"/>
+          </a:fontRef>
+        </p:style>
+      </p:cxnSp>
+      <p:sp>
+        <p:nvSpPr>
+          <p:cNvPr id="5" name="TextBox 4"/>
+          <p:cNvSpPr txBox="1"/>
+          <p:nvPr/>
+        </p:nvSpPr>
+        <p:spPr>
+          <a:xfrm>
+            <a:off x="11320272" y="201168"/>
+            <a:ext cx="320040" cy="219456"/>
+          </a:xfrm>
+          <a:prstGeom prst="rect">
+            <a:avLst/>
+          </a:prstGeom>
+          <a:noFill/>
+        </p:spPr>
+        <p:txBody>
+          <a:bodyPr wrap="square" lIns="27432" rIns="27432" tIns="27432" bIns="27432" anchor="t">
+            <a:spAutoFit/>
+          </a:bodyPr>
+          <a:lstStyle/>
+          <a:p>
+            <a:pPr algn="r">
+              <a:defRPr sz="950" b="1">
+                <a:solidFill>
+                  <a:srgbClr val="677990"/>
+                </a:solidFill>
+                <a:latin typeface="Noto Sans CJK SC"/>
+              </a:defRPr>
+            </a:pPr>
+            <a:r>
+              <a:t>19</a:t>
             </a:r>
           </a:p>
         </p:txBody>
